--- a/Extract-Insight-Action-Carrier-Process-Playbook.pptx
+++ b/Extract-Insight-Action-Carrier-Process-Playbook.pptx
@@ -125,7 +125,7 @@
   <pc:docChgLst>
     <pc:chgData name="Tirthankar Barari (TR)" userId="e41d4ef3-c9c5-4f08-a494-4c3cb9d953aa" providerId="ADAL" clId="{FDA9B3D4-9EE2-49C8-BD6B-D26A18FAF216}"/>
     <pc:docChg chg="custSel modSld">
-      <pc:chgData name="Tirthankar Barari (TR)" userId="e41d4ef3-c9c5-4f08-a494-4c3cb9d953aa" providerId="ADAL" clId="{FDA9B3D4-9EE2-49C8-BD6B-D26A18FAF216}" dt="2026-06-08T22:05:00.643" v="37" actId="26606"/>
+      <pc:chgData name="Tirthankar Barari (TR)" userId="e41d4ef3-c9c5-4f08-a494-4c3cb9d953aa" providerId="ADAL" clId="{FDA9B3D4-9EE2-49C8-BD6B-D26A18FAF216}" dt="2026-06-09T15:43:00.380" v="113" actId="26606"/>
       <pc:docMkLst>
         <pc:docMk/>
       </pc:docMkLst>
@@ -249,7 +249,7 @@
         </pc:spChg>
       </pc:sldChg>
       <pc:sldChg chg="addSp delSp modSp mod setBg">
-        <pc:chgData name="Tirthankar Barari (TR)" userId="e41d4ef3-c9c5-4f08-a494-4c3cb9d953aa" providerId="ADAL" clId="{FDA9B3D4-9EE2-49C8-BD6B-D26A18FAF216}" dt="2026-06-08T21:10:31.566" v="32" actId="26606"/>
+        <pc:chgData name="Tirthankar Barari (TR)" userId="e41d4ef3-c9c5-4f08-a494-4c3cb9d953aa" providerId="ADAL" clId="{FDA9B3D4-9EE2-49C8-BD6B-D26A18FAF216}" dt="2026-06-09T15:07:20.913" v="45" actId="20577"/>
         <pc:sldMkLst>
           <pc:docMk/>
           <pc:sldMk cId="0" sldId="257"/>
@@ -271,7 +271,7 @@
           </ac:spMkLst>
         </pc:spChg>
         <pc:spChg chg="add del mod">
-          <ac:chgData name="Tirthankar Barari (TR)" userId="e41d4ef3-c9c5-4f08-a494-4c3cb9d953aa" providerId="ADAL" clId="{FDA9B3D4-9EE2-49C8-BD6B-D26A18FAF216}" dt="2026-06-08T20:27:47.019" v="4" actId="26606"/>
+          <ac:chgData name="Tirthankar Barari (TR)" userId="e41d4ef3-c9c5-4f08-a494-4c3cb9d953aa" providerId="ADAL" clId="{FDA9B3D4-9EE2-49C8-BD6B-D26A18FAF216}" dt="2026-06-09T15:07:09.430" v="43" actId="255"/>
           <ac:spMkLst>
             <pc:docMk/>
             <pc:sldMk cId="0" sldId="257"/>
@@ -311,7 +311,7 @@
           </ac:spMkLst>
         </pc:spChg>
         <pc:spChg chg="add del mod">
-          <ac:chgData name="Tirthankar Barari (TR)" userId="e41d4ef3-c9c5-4f08-a494-4c3cb9d953aa" providerId="ADAL" clId="{FDA9B3D4-9EE2-49C8-BD6B-D26A18FAF216}" dt="2026-06-08T21:06:14.710" v="16" actId="20577"/>
+          <ac:chgData name="Tirthankar Barari (TR)" userId="e41d4ef3-c9c5-4f08-a494-4c3cb9d953aa" providerId="ADAL" clId="{FDA9B3D4-9EE2-49C8-BD6B-D26A18FAF216}" dt="2026-06-09T15:07:20.913" v="45" actId="20577"/>
           <ac:spMkLst>
             <pc:docMk/>
             <pc:sldMk cId="0" sldId="257"/>
@@ -360,25 +360,177 @@
         </pc:spChg>
       </pc:sldChg>
       <pc:sldChg chg="addSp delSp modSp mod setBg">
-        <pc:chgData name="Tirthankar Barari (TR)" userId="e41d4ef3-c9c5-4f08-a494-4c3cb9d953aa" providerId="ADAL" clId="{FDA9B3D4-9EE2-49C8-BD6B-D26A18FAF216}" dt="2026-06-08T22:05:00.643" v="37" actId="26606"/>
+        <pc:chgData name="Tirthankar Barari (TR)" userId="e41d4ef3-c9c5-4f08-a494-4c3cb9d953aa" providerId="ADAL" clId="{FDA9B3D4-9EE2-49C8-BD6B-D26A18FAF216}" dt="2026-06-09T15:43:00.380" v="113" actId="26606"/>
         <pc:sldMkLst>
           <pc:docMk/>
           <pc:sldMk cId="0" sldId="258"/>
         </pc:sldMkLst>
+        <pc:spChg chg="mod">
+          <ac:chgData name="Tirthankar Barari (TR)" userId="e41d4ef3-c9c5-4f08-a494-4c3cb9d953aa" providerId="ADAL" clId="{FDA9B3D4-9EE2-49C8-BD6B-D26A18FAF216}" dt="2026-06-09T15:43:00.380" v="113" actId="26606"/>
+          <ac:spMkLst>
+            <pc:docMk/>
+            <pc:sldMk cId="0" sldId="258"/>
+            <ac:spMk id="3" creationId="{00000000-0000-0000-0000-000000000000}"/>
+          </ac:spMkLst>
+        </pc:spChg>
+        <pc:spChg chg="add del mod">
+          <ac:chgData name="Tirthankar Barari (TR)" userId="e41d4ef3-c9c5-4f08-a494-4c3cb9d953aa" providerId="ADAL" clId="{FDA9B3D4-9EE2-49C8-BD6B-D26A18FAF216}" dt="2026-06-09T15:06:42.917" v="39" actId="255"/>
+          <ac:spMkLst>
+            <pc:docMk/>
+            <pc:sldMk cId="0" sldId="258"/>
+            <ac:spMk id="4" creationId="{00000000-0000-0000-0000-000000000000}"/>
+          </ac:spMkLst>
+        </pc:spChg>
+        <pc:spChg chg="mod">
+          <ac:chgData name="Tirthankar Barari (TR)" userId="e41d4ef3-c9c5-4f08-a494-4c3cb9d953aa" providerId="ADAL" clId="{FDA9B3D4-9EE2-49C8-BD6B-D26A18FAF216}" dt="2026-06-09T15:06:32.279" v="38" actId="255"/>
+          <ac:spMkLst>
+            <pc:docMk/>
+            <pc:sldMk cId="0" sldId="258"/>
+            <ac:spMk id="7" creationId="{00000000-0000-0000-0000-000000000000}"/>
+          </ac:spMkLst>
+        </pc:spChg>
         <pc:spChg chg="add del">
           <ac:chgData name="Tirthankar Barari (TR)" userId="e41d4ef3-c9c5-4f08-a494-4c3cb9d953aa" providerId="ADAL" clId="{FDA9B3D4-9EE2-49C8-BD6B-D26A18FAF216}" dt="2026-06-08T20:27:47.019" v="4" actId="26606"/>
           <ac:spMkLst>
             <pc:docMk/>
             <pc:sldMk cId="0" sldId="258"/>
-            <ac:spMk id="4" creationId="{00000000-0000-0000-0000-000000000000}"/>
+            <ac:spMk id="8" creationId="{00000000-0000-0000-0000-000000000000}"/>
           </ac:spMkLst>
         </pc:spChg>
         <pc:spChg chg="mod">
-          <ac:chgData name="Tirthankar Barari (TR)" userId="e41d4ef3-c9c5-4f08-a494-4c3cb9d953aa" providerId="ADAL" clId="{FDA9B3D4-9EE2-49C8-BD6B-D26A18FAF216}" dt="2026-06-08T21:49:42.680" v="35" actId="26606"/>
+          <ac:chgData name="Tirthankar Barari (TR)" userId="e41d4ef3-c9c5-4f08-a494-4c3cb9d953aa" providerId="ADAL" clId="{FDA9B3D4-9EE2-49C8-BD6B-D26A18FAF216}" dt="2026-06-09T15:07:34.646" v="46" actId="255"/>
           <ac:spMkLst>
             <pc:docMk/>
             <pc:sldMk cId="0" sldId="258"/>
-            <ac:spMk id="7" creationId="{00000000-0000-0000-0000-000000000000}"/>
+            <ac:spMk id="9" creationId="{00000000-0000-0000-0000-000000000000}"/>
+          </ac:spMkLst>
+        </pc:spChg>
+        <pc:spChg chg="mod">
+          <ac:chgData name="Tirthankar Barari (TR)" userId="e41d4ef3-c9c5-4f08-a494-4c3cb9d953aa" providerId="ADAL" clId="{FDA9B3D4-9EE2-49C8-BD6B-D26A18FAF216}" dt="2026-06-09T15:08:13.131" v="52" actId="20577"/>
+          <ac:spMkLst>
+            <pc:docMk/>
+            <pc:sldMk cId="0" sldId="258"/>
+            <ac:spMk id="10" creationId="{00000000-0000-0000-0000-000000000000}"/>
+          </ac:spMkLst>
+        </pc:spChg>
+        <pc:spChg chg="add del mod">
+          <ac:chgData name="Tirthankar Barari (TR)" userId="e41d4ef3-c9c5-4f08-a494-4c3cb9d953aa" providerId="ADAL" clId="{FDA9B3D4-9EE2-49C8-BD6B-D26A18FAF216}" dt="2026-06-08T20:49:12.088" v="8" actId="26606"/>
+          <ac:spMkLst>
+            <pc:docMk/>
+            <pc:sldMk cId="0" sldId="258"/>
+            <ac:spMk id="11" creationId="{00000000-0000-0000-0000-000000000000}"/>
+          </ac:spMkLst>
+        </pc:spChg>
+        <pc:spChg chg="mod">
+          <ac:chgData name="Tirthankar Barari (TR)" userId="e41d4ef3-c9c5-4f08-a494-4c3cb9d953aa" providerId="ADAL" clId="{FDA9B3D4-9EE2-49C8-BD6B-D26A18FAF216}" dt="2026-06-09T15:08:59.001" v="59" actId="255"/>
+          <ac:spMkLst>
+            <pc:docMk/>
+            <pc:sldMk cId="0" sldId="258"/>
+            <ac:spMk id="12" creationId="{00000000-0000-0000-0000-000000000000}"/>
+          </ac:spMkLst>
+        </pc:spChg>
+        <pc:spChg chg="mod">
+          <ac:chgData name="Tirthankar Barari (TR)" userId="e41d4ef3-c9c5-4f08-a494-4c3cb9d953aa" providerId="ADAL" clId="{FDA9B3D4-9EE2-49C8-BD6B-D26A18FAF216}" dt="2026-06-09T15:09:24.378" v="64" actId="20577"/>
+          <ac:spMkLst>
+            <pc:docMk/>
+            <pc:sldMk cId="0" sldId="258"/>
+            <ac:spMk id="13" creationId="{00000000-0000-0000-0000-000000000000}"/>
+          </ac:spMkLst>
+        </pc:spChg>
+        <pc:spChg chg="mod">
+          <ac:chgData name="Tirthankar Barari (TR)" userId="e41d4ef3-c9c5-4f08-a494-4c3cb9d953aa" providerId="ADAL" clId="{FDA9B3D4-9EE2-49C8-BD6B-D26A18FAF216}" dt="2026-06-08T20:49:12.088" v="8" actId="26606"/>
+          <ac:spMkLst>
+            <pc:docMk/>
+            <pc:sldMk cId="0" sldId="258"/>
+            <ac:spMk id="14" creationId="{00000000-0000-0000-0000-000000000000}"/>
+          </ac:spMkLst>
+        </pc:spChg>
+        <pc:spChg chg="mod">
+          <ac:chgData name="Tirthankar Barari (TR)" userId="e41d4ef3-c9c5-4f08-a494-4c3cb9d953aa" providerId="ADAL" clId="{FDA9B3D4-9EE2-49C8-BD6B-D26A18FAF216}" dt="2026-06-08T20:49:12.088" v="8" actId="26606"/>
+          <ac:spMkLst>
+            <pc:docMk/>
+            <pc:sldMk cId="0" sldId="258"/>
+            <ac:spMk id="15" creationId="{00000000-0000-0000-0000-000000000000}"/>
+          </ac:spMkLst>
+        </pc:spChg>
+        <pc:spChg chg="mod">
+          <ac:chgData name="Tirthankar Barari (TR)" userId="e41d4ef3-c9c5-4f08-a494-4c3cb9d953aa" providerId="ADAL" clId="{FDA9B3D4-9EE2-49C8-BD6B-D26A18FAF216}" dt="2026-06-09T15:06:50.245" v="40" actId="255"/>
+          <ac:spMkLst>
+            <pc:docMk/>
+            <pc:sldMk cId="0" sldId="258"/>
+            <ac:spMk id="17" creationId="{00000000-0000-0000-0000-000000000000}"/>
+          </ac:spMkLst>
+        </pc:spChg>
+        <pc:spChg chg="add del mod">
+          <ac:chgData name="Tirthankar Barari (TR)" userId="e41d4ef3-c9c5-4f08-a494-4c3cb9d953aa" providerId="ADAL" clId="{FDA9B3D4-9EE2-49C8-BD6B-D26A18FAF216}" dt="2026-06-08T21:25:35.642" v="33" actId="26606"/>
+          <ac:spMkLst>
+            <pc:docMk/>
+            <pc:sldMk cId="0" sldId="258"/>
+            <ac:spMk id="18" creationId="{00000000-0000-0000-0000-000000000000}"/>
+          </ac:spMkLst>
+        </pc:spChg>
+        <pc:spChg chg="mod">
+          <ac:chgData name="Tirthankar Barari (TR)" userId="e41d4ef3-c9c5-4f08-a494-4c3cb9d953aa" providerId="ADAL" clId="{FDA9B3D4-9EE2-49C8-BD6B-D26A18FAF216}" dt="2026-06-09T15:08:00.852" v="49" actId="255"/>
+          <ac:spMkLst>
+            <pc:docMk/>
+            <pc:sldMk cId="0" sldId="258"/>
+            <ac:spMk id="19" creationId="{00000000-0000-0000-0000-000000000000}"/>
+          </ac:spMkLst>
+        </pc:spChg>
+        <pc:spChg chg="mod">
+          <ac:chgData name="Tirthankar Barari (TR)" userId="e41d4ef3-c9c5-4f08-a494-4c3cb9d953aa" providerId="ADAL" clId="{FDA9B3D4-9EE2-49C8-BD6B-D26A18FAF216}" dt="2026-06-09T15:08:27.027" v="54" actId="20577"/>
+          <ac:spMkLst>
+            <pc:docMk/>
+            <pc:sldMk cId="0" sldId="258"/>
+            <ac:spMk id="20" creationId="{00000000-0000-0000-0000-000000000000}"/>
+          </ac:spMkLst>
+        </pc:spChg>
+        <pc:spChg chg="mod">
+          <ac:chgData name="Tirthankar Barari (TR)" userId="e41d4ef3-c9c5-4f08-a494-4c3cb9d953aa" providerId="ADAL" clId="{FDA9B3D4-9EE2-49C8-BD6B-D26A18FAF216}" dt="2026-06-08T21:25:35.642" v="33" actId="26606"/>
+          <ac:spMkLst>
+            <pc:docMk/>
+            <pc:sldMk cId="0" sldId="258"/>
+            <ac:spMk id="21" creationId="{00000000-0000-0000-0000-000000000000}"/>
+          </ac:spMkLst>
+        </pc:spChg>
+        <pc:spChg chg="mod">
+          <ac:chgData name="Tirthankar Barari (TR)" userId="e41d4ef3-c9c5-4f08-a494-4c3cb9d953aa" providerId="ADAL" clId="{FDA9B3D4-9EE2-49C8-BD6B-D26A18FAF216}" dt="2026-06-09T15:09:03.464" v="60" actId="255"/>
+          <ac:spMkLst>
+            <pc:docMk/>
+            <pc:sldMk cId="0" sldId="258"/>
+            <ac:spMk id="22" creationId="{00000000-0000-0000-0000-000000000000}"/>
+          </ac:spMkLst>
+        </pc:spChg>
+        <pc:spChg chg="mod">
+          <ac:chgData name="Tirthankar Barari (TR)" userId="e41d4ef3-c9c5-4f08-a494-4c3cb9d953aa" providerId="ADAL" clId="{FDA9B3D4-9EE2-49C8-BD6B-D26A18FAF216}" dt="2026-06-09T15:09:37.531" v="67" actId="20577"/>
+          <ac:spMkLst>
+            <pc:docMk/>
+            <pc:sldMk cId="0" sldId="258"/>
+            <ac:spMk id="23" creationId="{00000000-0000-0000-0000-000000000000}"/>
+          </ac:spMkLst>
+        </pc:spChg>
+        <pc:spChg chg="mod">
+          <ac:chgData name="Tirthankar Barari (TR)" userId="e41d4ef3-c9c5-4f08-a494-4c3cb9d953aa" providerId="ADAL" clId="{FDA9B3D4-9EE2-49C8-BD6B-D26A18FAF216}" dt="2026-06-08T20:49:12.088" v="8" actId="26606"/>
+          <ac:spMkLst>
+            <pc:docMk/>
+            <pc:sldMk cId="0" sldId="258"/>
+            <ac:spMk id="24" creationId="{00000000-0000-0000-0000-000000000000}"/>
+          </ac:spMkLst>
+        </pc:spChg>
+        <pc:spChg chg="add del mod">
+          <ac:chgData name="Tirthankar Barari (TR)" userId="e41d4ef3-c9c5-4f08-a494-4c3cb9d953aa" providerId="ADAL" clId="{FDA9B3D4-9EE2-49C8-BD6B-D26A18FAF216}" dt="2026-06-08T20:49:12.088" v="8" actId="26606"/>
+          <ac:spMkLst>
+            <pc:docMk/>
+            <pc:sldMk cId="0" sldId="258"/>
+            <ac:spMk id="25" creationId="{00000000-0000-0000-0000-000000000000}"/>
+          </ac:spMkLst>
+        </pc:spChg>
+        <pc:spChg chg="add del mod">
+          <ac:chgData name="Tirthankar Barari (TR)" userId="e41d4ef3-c9c5-4f08-a494-4c3cb9d953aa" providerId="ADAL" clId="{FDA9B3D4-9EE2-49C8-BD6B-D26A18FAF216}" dt="2026-06-09T15:06:54.474" v="41" actId="255"/>
+          <ac:spMkLst>
+            <pc:docMk/>
+            <pc:sldMk cId="0" sldId="258"/>
+            <ac:spMk id="27" creationId="{00000000-0000-0000-0000-000000000000}"/>
           </ac:spMkLst>
         </pc:spChg>
         <pc:spChg chg="add del">
@@ -386,7 +538,23 @@
           <ac:spMkLst>
             <pc:docMk/>
             <pc:sldMk cId="0" sldId="258"/>
-            <ac:spMk id="8" creationId="{00000000-0000-0000-0000-000000000000}"/>
+            <ac:spMk id="28" creationId="{00000000-0000-0000-0000-000000000000}"/>
+          </ac:spMkLst>
+        </pc:spChg>
+        <pc:spChg chg="mod">
+          <ac:chgData name="Tirthankar Barari (TR)" userId="e41d4ef3-c9c5-4f08-a494-4c3cb9d953aa" providerId="ADAL" clId="{FDA9B3D4-9EE2-49C8-BD6B-D26A18FAF216}" dt="2026-06-09T15:08:04.888" v="50" actId="255"/>
+          <ac:spMkLst>
+            <pc:docMk/>
+            <pc:sldMk cId="0" sldId="258"/>
+            <ac:spMk id="29" creationId="{00000000-0000-0000-0000-000000000000}"/>
+          </ac:spMkLst>
+        </pc:spChg>
+        <pc:spChg chg="mod">
+          <ac:chgData name="Tirthankar Barari (TR)" userId="e41d4ef3-c9c5-4f08-a494-4c3cb9d953aa" providerId="ADAL" clId="{FDA9B3D4-9EE2-49C8-BD6B-D26A18FAF216}" dt="2026-06-09T15:08:40.424" v="56" actId="20577"/>
+          <ac:spMkLst>
+            <pc:docMk/>
+            <pc:sldMk cId="0" sldId="258"/>
+            <ac:spMk id="30" creationId="{00000000-0000-0000-0000-000000000000}"/>
           </ac:spMkLst>
         </pc:spChg>
         <pc:spChg chg="mod">
@@ -394,15 +562,39 @@
           <ac:spMkLst>
             <pc:docMk/>
             <pc:sldMk cId="0" sldId="258"/>
-            <ac:spMk id="10" creationId="{00000000-0000-0000-0000-000000000000}"/>
+            <ac:spMk id="31" creationId="{00000000-0000-0000-0000-000000000000}"/>
           </ac:spMkLst>
         </pc:spChg>
         <pc:spChg chg="add del mod">
-          <ac:chgData name="Tirthankar Barari (TR)" userId="e41d4ef3-c9c5-4f08-a494-4c3cb9d953aa" providerId="ADAL" clId="{FDA9B3D4-9EE2-49C8-BD6B-D26A18FAF216}" dt="2026-06-08T20:49:12.088" v="8" actId="26606"/>
+          <ac:chgData name="Tirthankar Barari (TR)" userId="e41d4ef3-c9c5-4f08-a494-4c3cb9d953aa" providerId="ADAL" clId="{FDA9B3D4-9EE2-49C8-BD6B-D26A18FAF216}" dt="2026-06-09T15:09:06.931" v="61" actId="255"/>
           <ac:spMkLst>
             <pc:docMk/>
             <pc:sldMk cId="0" sldId="258"/>
-            <ac:spMk id="11" creationId="{00000000-0000-0000-0000-000000000000}"/>
+            <ac:spMk id="32" creationId="{00000000-0000-0000-0000-000000000000}"/>
+          </ac:spMkLst>
+        </pc:spChg>
+        <pc:spChg chg="mod">
+          <ac:chgData name="Tirthankar Barari (TR)" userId="e41d4ef3-c9c5-4f08-a494-4c3cb9d953aa" providerId="ADAL" clId="{FDA9B3D4-9EE2-49C8-BD6B-D26A18FAF216}" dt="2026-06-09T15:09:48.573" v="69" actId="20577"/>
+          <ac:spMkLst>
+            <pc:docMk/>
+            <pc:sldMk cId="0" sldId="258"/>
+            <ac:spMk id="33" creationId="{00000000-0000-0000-0000-000000000000}"/>
+          </ac:spMkLst>
+        </pc:spChg>
+        <pc:spChg chg="add del mod">
+          <ac:chgData name="Tirthankar Barari (TR)" userId="e41d4ef3-c9c5-4f08-a494-4c3cb9d953aa" providerId="ADAL" clId="{FDA9B3D4-9EE2-49C8-BD6B-D26A18FAF216}" dt="2026-06-08T21:25:35.642" v="33" actId="26606"/>
+          <ac:spMkLst>
+            <pc:docMk/>
+            <pc:sldMk cId="0" sldId="258"/>
+            <ac:spMk id="35" creationId="{00000000-0000-0000-0000-000000000000}"/>
+          </ac:spMkLst>
+        </pc:spChg>
+        <pc:spChg chg="mod">
+          <ac:chgData name="Tirthankar Barari (TR)" userId="e41d4ef3-c9c5-4f08-a494-4c3cb9d953aa" providerId="ADAL" clId="{FDA9B3D4-9EE2-49C8-BD6B-D26A18FAF216}" dt="2026-06-09T15:06:58.698" v="42" actId="255"/>
+          <ac:spMkLst>
+            <pc:docMk/>
+            <pc:sldMk cId="0" sldId="258"/>
+            <ac:spMk id="37" creationId="{00000000-0000-0000-0000-000000000000}"/>
           </ac:spMkLst>
         </pc:spChg>
         <pc:spChg chg="mod">
@@ -410,7 +602,23 @@
           <ac:spMkLst>
             <pc:docMk/>
             <pc:sldMk cId="0" sldId="258"/>
-            <ac:spMk id="13" creationId="{00000000-0000-0000-0000-000000000000}"/>
+            <ac:spMk id="38" creationId="{00000000-0000-0000-0000-000000000000}"/>
+          </ac:spMkLst>
+        </pc:spChg>
+        <pc:spChg chg="mod">
+          <ac:chgData name="Tirthankar Barari (TR)" userId="e41d4ef3-c9c5-4f08-a494-4c3cb9d953aa" providerId="ADAL" clId="{FDA9B3D4-9EE2-49C8-BD6B-D26A18FAF216}" dt="2026-06-09T15:08:08.532" v="51" actId="255"/>
+          <ac:spMkLst>
+            <pc:docMk/>
+            <pc:sldMk cId="0" sldId="258"/>
+            <ac:spMk id="39" creationId="{00000000-0000-0000-0000-000000000000}"/>
+          </ac:spMkLst>
+        </pc:spChg>
+        <pc:spChg chg="mod">
+          <ac:chgData name="Tirthankar Barari (TR)" userId="e41d4ef3-c9c5-4f08-a494-4c3cb9d953aa" providerId="ADAL" clId="{FDA9B3D4-9EE2-49C8-BD6B-D26A18FAF216}" dt="2026-06-09T15:08:51.761" v="58" actId="20577"/>
+          <ac:spMkLst>
+            <pc:docMk/>
+            <pc:sldMk cId="0" sldId="258"/>
+            <ac:spMk id="40" creationId="{00000000-0000-0000-0000-000000000000}"/>
           </ac:spMkLst>
         </pc:spChg>
         <pc:spChg chg="mod">
@@ -418,147 +626,11 @@
           <ac:spMkLst>
             <pc:docMk/>
             <pc:sldMk cId="0" sldId="258"/>
-            <ac:spMk id="14" creationId="{00000000-0000-0000-0000-000000000000}"/>
+            <ac:spMk id="41" creationId="{00000000-0000-0000-0000-000000000000}"/>
           </ac:spMkLst>
         </pc:spChg>
         <pc:spChg chg="mod">
-          <ac:chgData name="Tirthankar Barari (TR)" userId="e41d4ef3-c9c5-4f08-a494-4c3cb9d953aa" providerId="ADAL" clId="{FDA9B3D4-9EE2-49C8-BD6B-D26A18FAF216}" dt="2026-06-08T20:49:12.088" v="8" actId="26606"/>
-          <ac:spMkLst>
-            <pc:docMk/>
-            <pc:sldMk cId="0" sldId="258"/>
-            <ac:spMk id="15" creationId="{00000000-0000-0000-0000-000000000000}"/>
-          </ac:spMkLst>
-        </pc:spChg>
-        <pc:spChg chg="mod">
-          <ac:chgData name="Tirthankar Barari (TR)" userId="e41d4ef3-c9c5-4f08-a494-4c3cb9d953aa" providerId="ADAL" clId="{FDA9B3D4-9EE2-49C8-BD6B-D26A18FAF216}" dt="2026-06-08T21:49:42.680" v="35" actId="26606"/>
-          <ac:spMkLst>
-            <pc:docMk/>
-            <pc:sldMk cId="0" sldId="258"/>
-            <ac:spMk id="17" creationId="{00000000-0000-0000-0000-000000000000}"/>
-          </ac:spMkLst>
-        </pc:spChg>
-        <pc:spChg chg="add del mod">
-          <ac:chgData name="Tirthankar Barari (TR)" userId="e41d4ef3-c9c5-4f08-a494-4c3cb9d953aa" providerId="ADAL" clId="{FDA9B3D4-9EE2-49C8-BD6B-D26A18FAF216}" dt="2026-06-08T21:25:35.642" v="33" actId="26606"/>
-          <ac:spMkLst>
-            <pc:docMk/>
-            <pc:sldMk cId="0" sldId="258"/>
-            <ac:spMk id="18" creationId="{00000000-0000-0000-0000-000000000000}"/>
-          </ac:spMkLst>
-        </pc:spChg>
-        <pc:spChg chg="mod">
-          <ac:chgData name="Tirthankar Barari (TR)" userId="e41d4ef3-c9c5-4f08-a494-4c3cb9d953aa" providerId="ADAL" clId="{FDA9B3D4-9EE2-49C8-BD6B-D26A18FAF216}" dt="2026-06-08T21:25:35.642" v="33" actId="26606"/>
-          <ac:spMkLst>
-            <pc:docMk/>
-            <pc:sldMk cId="0" sldId="258"/>
-            <ac:spMk id="20" creationId="{00000000-0000-0000-0000-000000000000}"/>
-          </ac:spMkLst>
-        </pc:spChg>
-        <pc:spChg chg="mod">
-          <ac:chgData name="Tirthankar Barari (TR)" userId="e41d4ef3-c9c5-4f08-a494-4c3cb9d953aa" providerId="ADAL" clId="{FDA9B3D4-9EE2-49C8-BD6B-D26A18FAF216}" dt="2026-06-08T21:25:35.642" v="33" actId="26606"/>
-          <ac:spMkLst>
-            <pc:docMk/>
-            <pc:sldMk cId="0" sldId="258"/>
-            <ac:spMk id="21" creationId="{00000000-0000-0000-0000-000000000000}"/>
-          </ac:spMkLst>
-        </pc:spChg>
-        <pc:spChg chg="mod">
-          <ac:chgData name="Tirthankar Barari (TR)" userId="e41d4ef3-c9c5-4f08-a494-4c3cb9d953aa" providerId="ADAL" clId="{FDA9B3D4-9EE2-49C8-BD6B-D26A18FAF216}" dt="2026-06-08T21:25:35.642" v="33" actId="26606"/>
-          <ac:spMkLst>
-            <pc:docMk/>
-            <pc:sldMk cId="0" sldId="258"/>
-            <ac:spMk id="23" creationId="{00000000-0000-0000-0000-000000000000}"/>
-          </ac:spMkLst>
-        </pc:spChg>
-        <pc:spChg chg="mod">
-          <ac:chgData name="Tirthankar Barari (TR)" userId="e41d4ef3-c9c5-4f08-a494-4c3cb9d953aa" providerId="ADAL" clId="{FDA9B3D4-9EE2-49C8-BD6B-D26A18FAF216}" dt="2026-06-08T20:49:12.088" v="8" actId="26606"/>
-          <ac:spMkLst>
-            <pc:docMk/>
-            <pc:sldMk cId="0" sldId="258"/>
-            <ac:spMk id="24" creationId="{00000000-0000-0000-0000-000000000000}"/>
-          </ac:spMkLst>
-        </pc:spChg>
-        <pc:spChg chg="add del mod">
-          <ac:chgData name="Tirthankar Barari (TR)" userId="e41d4ef3-c9c5-4f08-a494-4c3cb9d953aa" providerId="ADAL" clId="{FDA9B3D4-9EE2-49C8-BD6B-D26A18FAF216}" dt="2026-06-08T20:49:12.088" v="8" actId="26606"/>
-          <ac:spMkLst>
-            <pc:docMk/>
-            <pc:sldMk cId="0" sldId="258"/>
-            <ac:spMk id="25" creationId="{00000000-0000-0000-0000-000000000000}"/>
-          </ac:spMkLst>
-        </pc:spChg>
-        <pc:spChg chg="add del mod">
-          <ac:chgData name="Tirthankar Barari (TR)" userId="e41d4ef3-c9c5-4f08-a494-4c3cb9d953aa" providerId="ADAL" clId="{FDA9B3D4-9EE2-49C8-BD6B-D26A18FAF216}" dt="2026-06-08T21:49:42.680" v="35" actId="26606"/>
-          <ac:spMkLst>
-            <pc:docMk/>
-            <pc:sldMk cId="0" sldId="258"/>
-            <ac:spMk id="27" creationId="{00000000-0000-0000-0000-000000000000}"/>
-          </ac:spMkLst>
-        </pc:spChg>
-        <pc:spChg chg="add del">
-          <ac:chgData name="Tirthankar Barari (TR)" userId="e41d4ef3-c9c5-4f08-a494-4c3cb9d953aa" providerId="ADAL" clId="{FDA9B3D4-9EE2-49C8-BD6B-D26A18FAF216}" dt="2026-06-08T20:27:47.019" v="4" actId="26606"/>
-          <ac:spMkLst>
-            <pc:docMk/>
-            <pc:sldMk cId="0" sldId="258"/>
-            <ac:spMk id="28" creationId="{00000000-0000-0000-0000-000000000000}"/>
-          </ac:spMkLst>
-        </pc:spChg>
-        <pc:spChg chg="mod">
-          <ac:chgData name="Tirthankar Barari (TR)" userId="e41d4ef3-c9c5-4f08-a494-4c3cb9d953aa" providerId="ADAL" clId="{FDA9B3D4-9EE2-49C8-BD6B-D26A18FAF216}" dt="2026-06-08T20:02:21.111" v="2" actId="26606"/>
-          <ac:spMkLst>
-            <pc:docMk/>
-            <pc:sldMk cId="0" sldId="258"/>
-            <ac:spMk id="29" creationId="{00000000-0000-0000-0000-000000000000}"/>
-          </ac:spMkLst>
-        </pc:spChg>
-        <pc:spChg chg="mod">
-          <ac:chgData name="Tirthankar Barari (TR)" userId="e41d4ef3-c9c5-4f08-a494-4c3cb9d953aa" providerId="ADAL" clId="{FDA9B3D4-9EE2-49C8-BD6B-D26A18FAF216}" dt="2026-06-08T21:25:35.642" v="33" actId="26606"/>
-          <ac:spMkLst>
-            <pc:docMk/>
-            <pc:sldMk cId="0" sldId="258"/>
-            <ac:spMk id="31" creationId="{00000000-0000-0000-0000-000000000000}"/>
-          </ac:spMkLst>
-        </pc:spChg>
-        <pc:spChg chg="add del mod">
-          <ac:chgData name="Tirthankar Barari (TR)" userId="e41d4ef3-c9c5-4f08-a494-4c3cb9d953aa" providerId="ADAL" clId="{FDA9B3D4-9EE2-49C8-BD6B-D26A18FAF216}" dt="2026-06-08T20:27:47.019" v="4" actId="26606"/>
-          <ac:spMkLst>
-            <pc:docMk/>
-            <pc:sldMk cId="0" sldId="258"/>
-            <ac:spMk id="32" creationId="{00000000-0000-0000-0000-000000000000}"/>
-          </ac:spMkLst>
-        </pc:spChg>
-        <pc:spChg chg="add del mod">
-          <ac:chgData name="Tirthankar Barari (TR)" userId="e41d4ef3-c9c5-4f08-a494-4c3cb9d953aa" providerId="ADAL" clId="{FDA9B3D4-9EE2-49C8-BD6B-D26A18FAF216}" dt="2026-06-08T21:25:35.642" v="33" actId="26606"/>
-          <ac:spMkLst>
-            <pc:docMk/>
-            <pc:sldMk cId="0" sldId="258"/>
-            <ac:spMk id="35" creationId="{00000000-0000-0000-0000-000000000000}"/>
-          </ac:spMkLst>
-        </pc:spChg>
-        <pc:spChg chg="mod">
-          <ac:chgData name="Tirthankar Barari (TR)" userId="e41d4ef3-c9c5-4f08-a494-4c3cb9d953aa" providerId="ADAL" clId="{FDA9B3D4-9EE2-49C8-BD6B-D26A18FAF216}" dt="2026-06-08T21:49:42.680" v="35" actId="26606"/>
-          <ac:spMkLst>
-            <pc:docMk/>
-            <pc:sldMk cId="0" sldId="258"/>
-            <ac:spMk id="37" creationId="{00000000-0000-0000-0000-000000000000}"/>
-          </ac:spMkLst>
-        </pc:spChg>
-        <pc:spChg chg="mod">
-          <ac:chgData name="Tirthankar Barari (TR)" userId="e41d4ef3-c9c5-4f08-a494-4c3cb9d953aa" providerId="ADAL" clId="{FDA9B3D4-9EE2-49C8-BD6B-D26A18FAF216}" dt="2026-06-08T21:25:35.642" v="33" actId="26606"/>
-          <ac:spMkLst>
-            <pc:docMk/>
-            <pc:sldMk cId="0" sldId="258"/>
-            <ac:spMk id="38" creationId="{00000000-0000-0000-0000-000000000000}"/>
-          </ac:spMkLst>
-        </pc:spChg>
-        <pc:spChg chg="mod">
-          <ac:chgData name="Tirthankar Barari (TR)" userId="e41d4ef3-c9c5-4f08-a494-4c3cb9d953aa" providerId="ADAL" clId="{FDA9B3D4-9EE2-49C8-BD6B-D26A18FAF216}" dt="2026-06-08T20:49:12.088" v="8" actId="26606"/>
-          <ac:spMkLst>
-            <pc:docMk/>
-            <pc:sldMk cId="0" sldId="258"/>
-            <ac:spMk id="41" creationId="{00000000-0000-0000-0000-000000000000}"/>
-          </ac:spMkLst>
-        </pc:spChg>
-        <pc:spChg chg="mod">
-          <ac:chgData name="Tirthankar Barari (TR)" userId="e41d4ef3-c9c5-4f08-a494-4c3cb9d953aa" providerId="ADAL" clId="{FDA9B3D4-9EE2-49C8-BD6B-D26A18FAF216}" dt="2026-06-08T20:02:21.111" v="2" actId="26606"/>
+          <ac:chgData name="Tirthankar Barari (TR)" userId="e41d4ef3-c9c5-4f08-a494-4c3cb9d953aa" providerId="ADAL" clId="{FDA9B3D4-9EE2-49C8-BD6B-D26A18FAF216}" dt="2026-06-09T15:09:10.612" v="62" actId="255"/>
           <ac:spMkLst>
             <pc:docMk/>
             <pc:sldMk cId="0" sldId="258"/>
@@ -566,7 +638,7 @@
           </ac:spMkLst>
         </pc:spChg>
         <pc:spChg chg="mod">
-          <ac:chgData name="Tirthankar Barari (TR)" userId="e41d4ef3-c9c5-4f08-a494-4c3cb9d953aa" providerId="ADAL" clId="{FDA9B3D4-9EE2-49C8-BD6B-D26A18FAF216}" dt="2026-06-08T20:49:12.088" v="8" actId="26606"/>
+          <ac:chgData name="Tirthankar Barari (TR)" userId="e41d4ef3-c9c5-4f08-a494-4c3cb9d953aa" providerId="ADAL" clId="{FDA9B3D4-9EE2-49C8-BD6B-D26A18FAF216}" dt="2026-06-09T15:09:58.836" v="71" actId="20577"/>
           <ac:spMkLst>
             <pc:docMk/>
             <pc:sldMk cId="0" sldId="258"/>
@@ -574,7 +646,7 @@
           </ac:spMkLst>
         </pc:spChg>
         <pc:spChg chg="add mod">
-          <ac:chgData name="Tirthankar Barari (TR)" userId="e41d4ef3-c9c5-4f08-a494-4c3cb9d953aa" providerId="ADAL" clId="{FDA9B3D4-9EE2-49C8-BD6B-D26A18FAF216}" dt="2026-06-08T21:25:35.642" v="33" actId="26606"/>
+          <ac:chgData name="Tirthankar Barari (TR)" userId="e41d4ef3-c9c5-4f08-a494-4c3cb9d953aa" providerId="ADAL" clId="{FDA9B3D4-9EE2-49C8-BD6B-D26A18FAF216}" dt="2026-06-09T15:11:00.915" v="75" actId="14100"/>
           <ac:spMkLst>
             <pc:docMk/>
             <pc:sldMk cId="0" sldId="258"/>
@@ -582,7 +654,15 @@
           </ac:spMkLst>
         </pc:spChg>
         <pc:spChg chg="mod">
-          <ac:chgData name="Tirthankar Barari (TR)" userId="e41d4ef3-c9c5-4f08-a494-4c3cb9d953aa" providerId="ADAL" clId="{FDA9B3D4-9EE2-49C8-BD6B-D26A18FAF216}" dt="2026-06-08T20:49:12.088" v="8" actId="26606"/>
+          <ac:chgData name="Tirthankar Barari (TR)" userId="e41d4ef3-c9c5-4f08-a494-4c3cb9d953aa" providerId="ADAL" clId="{FDA9B3D4-9EE2-49C8-BD6B-D26A18FAF216}" dt="2026-06-09T15:10:15.168" v="73" actId="255"/>
+          <ac:spMkLst>
+            <pc:docMk/>
+            <pc:sldMk cId="0" sldId="258"/>
+            <ac:spMk id="45" creationId="{00000000-0000-0000-0000-000000000000}"/>
+          </ac:spMkLst>
+        </pc:spChg>
+        <pc:spChg chg="mod">
+          <ac:chgData name="Tirthankar Barari (TR)" userId="e41d4ef3-c9c5-4f08-a494-4c3cb9d953aa" providerId="ADAL" clId="{FDA9B3D4-9EE2-49C8-BD6B-D26A18FAF216}" dt="2026-06-09T15:10:34.581" v="74" actId="255"/>
           <ac:spMkLst>
             <pc:docMk/>
             <pc:sldMk cId="0" sldId="258"/>
@@ -646,7 +726,7 @@
           </ac:spMkLst>
         </pc:spChg>
         <pc:picChg chg="mod">
-          <ac:chgData name="Tirthankar Barari (TR)" userId="e41d4ef3-c9c5-4f08-a494-4c3cb9d953aa" providerId="ADAL" clId="{FDA9B3D4-9EE2-49C8-BD6B-D26A18FAF216}" dt="2026-06-08T22:05:00.643" v="37" actId="26606"/>
+          <ac:chgData name="Tirthankar Barari (TR)" userId="e41d4ef3-c9c5-4f08-a494-4c3cb9d953aa" providerId="ADAL" clId="{FDA9B3D4-9EE2-49C8-BD6B-D26A18FAF216}" dt="2026-06-09T15:43:00.380" v="113" actId="26606"/>
           <ac:picMkLst>
             <pc:docMk/>
             <pc:sldMk cId="0" sldId="258"/>
@@ -654,7 +734,7 @@
           </ac:picMkLst>
         </pc:picChg>
         <pc:picChg chg="mod">
-          <ac:chgData name="Tirthankar Barari (TR)" userId="e41d4ef3-c9c5-4f08-a494-4c3cb9d953aa" providerId="ADAL" clId="{FDA9B3D4-9EE2-49C8-BD6B-D26A18FAF216}" dt="2026-06-08T22:05:00.643" v="37" actId="26606"/>
+          <ac:chgData name="Tirthankar Barari (TR)" userId="e41d4ef3-c9c5-4f08-a494-4c3cb9d953aa" providerId="ADAL" clId="{FDA9B3D4-9EE2-49C8-BD6B-D26A18FAF216}" dt="2026-06-09T15:43:00.380" v="113" actId="26606"/>
           <ac:picMkLst>
             <pc:docMk/>
             <pc:sldMk cId="0" sldId="258"/>
@@ -662,7 +742,7 @@
           </ac:picMkLst>
         </pc:picChg>
         <pc:picChg chg="mod">
-          <ac:chgData name="Tirthankar Barari (TR)" userId="e41d4ef3-c9c5-4f08-a494-4c3cb9d953aa" providerId="ADAL" clId="{FDA9B3D4-9EE2-49C8-BD6B-D26A18FAF216}" dt="2026-06-08T22:05:00.643" v="37" actId="26606"/>
+          <ac:chgData name="Tirthankar Barari (TR)" userId="e41d4ef3-c9c5-4f08-a494-4c3cb9d953aa" providerId="ADAL" clId="{FDA9B3D4-9EE2-49C8-BD6B-D26A18FAF216}" dt="2026-06-09T15:43:00.380" v="113" actId="26606"/>
           <ac:picMkLst>
             <pc:docMk/>
             <pc:sldMk cId="0" sldId="258"/>
@@ -670,7 +750,7 @@
           </ac:picMkLst>
         </pc:picChg>
         <pc:picChg chg="mod">
-          <ac:chgData name="Tirthankar Barari (TR)" userId="e41d4ef3-c9c5-4f08-a494-4c3cb9d953aa" providerId="ADAL" clId="{FDA9B3D4-9EE2-49C8-BD6B-D26A18FAF216}" dt="2026-06-08T22:05:00.643" v="37" actId="26606"/>
+          <ac:chgData name="Tirthankar Barari (TR)" userId="e41d4ef3-c9c5-4f08-a494-4c3cb9d953aa" providerId="ADAL" clId="{FDA9B3D4-9EE2-49C8-BD6B-D26A18FAF216}" dt="2026-06-09T15:43:00.380" v="113" actId="26606"/>
           <ac:picMkLst>
             <pc:docMk/>
             <pc:sldMk cId="0" sldId="258"/>
@@ -790,7 +870,7 @@
         </pc:spChg>
       </pc:sldChg>
       <pc:sldChg chg="addSp delSp modSp mod setBg">
-        <pc:chgData name="Tirthankar Barari (TR)" userId="e41d4ef3-c9c5-4f08-a494-4c3cb9d953aa" providerId="ADAL" clId="{FDA9B3D4-9EE2-49C8-BD6B-D26A18FAF216}" dt="2026-06-08T22:05:00.643" v="37" actId="26606"/>
+        <pc:chgData name="Tirthankar Barari (TR)" userId="e41d4ef3-c9c5-4f08-a494-4c3cb9d953aa" providerId="ADAL" clId="{FDA9B3D4-9EE2-49C8-BD6B-D26A18FAF216}" dt="2026-06-09T15:43:00.380" v="113" actId="26606"/>
         <pc:sldMkLst>
           <pc:docMk/>
           <pc:sldMk cId="0" sldId="260"/>
@@ -803,12 +883,36 @@
             <ac:spMk id="2" creationId="{00000000-0000-0000-0000-000000000000}"/>
           </ac:spMkLst>
         </pc:spChg>
+        <pc:spChg chg="add del mod">
+          <ac:chgData name="Tirthankar Barari (TR)" userId="e41d4ef3-c9c5-4f08-a494-4c3cb9d953aa" providerId="ADAL" clId="{FDA9B3D4-9EE2-49C8-BD6B-D26A18FAF216}" dt="2026-06-09T15:43:00.380" v="113" actId="26606"/>
+          <ac:spMkLst>
+            <pc:docMk/>
+            <pc:sldMk cId="0" sldId="260"/>
+            <ac:spMk id="3" creationId="{00000000-0000-0000-0000-000000000000}"/>
+          </ac:spMkLst>
+        </pc:spChg>
         <pc:spChg chg="add del">
           <ac:chgData name="Tirthankar Barari (TR)" userId="e41d4ef3-c9c5-4f08-a494-4c3cb9d953aa" providerId="ADAL" clId="{FDA9B3D4-9EE2-49C8-BD6B-D26A18FAF216}" dt="2026-06-08T20:27:47.019" v="4" actId="26606"/>
           <ac:spMkLst>
             <pc:docMk/>
             <pc:sldMk cId="0" sldId="260"/>
-            <ac:spMk id="3" creationId="{00000000-0000-0000-0000-000000000000}"/>
+            <ac:spMk id="4" creationId="{00000000-0000-0000-0000-000000000000}"/>
+          </ac:spMkLst>
+        </pc:spChg>
+        <pc:spChg chg="mod">
+          <ac:chgData name="Tirthankar Barari (TR)" userId="e41d4ef3-c9c5-4f08-a494-4c3cb9d953aa" providerId="ADAL" clId="{FDA9B3D4-9EE2-49C8-BD6B-D26A18FAF216}" dt="2026-06-08T20:49:12.088" v="8" actId="26606"/>
+          <ac:spMkLst>
+            <pc:docMk/>
+            <pc:sldMk cId="0" sldId="260"/>
+            <ac:spMk id="5" creationId="{00000000-0000-0000-0000-000000000000}"/>
+          </ac:spMkLst>
+        </pc:spChg>
+        <pc:spChg chg="mod">
+          <ac:chgData name="Tirthankar Barari (TR)" userId="e41d4ef3-c9c5-4f08-a494-4c3cb9d953aa" providerId="ADAL" clId="{FDA9B3D4-9EE2-49C8-BD6B-D26A18FAF216}" dt="2026-06-08T21:49:42.680" v="35" actId="26606"/>
+          <ac:spMkLst>
+            <pc:docMk/>
+            <pc:sldMk cId="0" sldId="260"/>
+            <ac:spMk id="7" creationId="{00000000-0000-0000-0000-000000000000}"/>
           </ac:spMkLst>
         </pc:spChg>
         <pc:spChg chg="add del">
@@ -816,7 +920,23 @@
           <ac:spMkLst>
             <pc:docMk/>
             <pc:sldMk cId="0" sldId="260"/>
-            <ac:spMk id="4" creationId="{00000000-0000-0000-0000-000000000000}"/>
+            <ac:spMk id="8" creationId="{00000000-0000-0000-0000-000000000000}"/>
+          </ac:spMkLst>
+        </pc:spChg>
+        <pc:spChg chg="mod">
+          <ac:chgData name="Tirthankar Barari (TR)" userId="e41d4ef3-c9c5-4f08-a494-4c3cb9d953aa" providerId="ADAL" clId="{FDA9B3D4-9EE2-49C8-BD6B-D26A18FAF216}" dt="2026-06-09T15:14:35.061" v="76" actId="26606"/>
+          <ac:spMkLst>
+            <pc:docMk/>
+            <pc:sldMk cId="0" sldId="260"/>
+            <ac:spMk id="9" creationId="{00000000-0000-0000-0000-000000000000}"/>
+          </ac:spMkLst>
+        </pc:spChg>
+        <pc:spChg chg="mod">
+          <ac:chgData name="Tirthankar Barari (TR)" userId="e41d4ef3-c9c5-4f08-a494-4c3cb9d953aa" providerId="ADAL" clId="{FDA9B3D4-9EE2-49C8-BD6B-D26A18FAF216}" dt="2026-06-09T15:30:19.515" v="78" actId="20577"/>
+          <ac:spMkLst>
+            <pc:docMk/>
+            <pc:sldMk cId="0" sldId="260"/>
+            <ac:spMk id="10" creationId="{00000000-0000-0000-0000-000000000000}"/>
           </ac:spMkLst>
         </pc:spChg>
         <pc:spChg chg="mod">
@@ -824,7 +944,39 @@
           <ac:spMkLst>
             <pc:docMk/>
             <pc:sldMk cId="0" sldId="260"/>
-            <ac:spMk id="5" creationId="{00000000-0000-0000-0000-000000000000}"/>
+            <ac:spMk id="11" creationId="{00000000-0000-0000-0000-000000000000}"/>
+          </ac:spMkLst>
+        </pc:spChg>
+        <pc:spChg chg="mod">
+          <ac:chgData name="Tirthankar Barari (TR)" userId="e41d4ef3-c9c5-4f08-a494-4c3cb9d953aa" providerId="ADAL" clId="{FDA9B3D4-9EE2-49C8-BD6B-D26A18FAF216}" dt="2026-06-09T15:14:35.061" v="76" actId="26606"/>
+          <ac:spMkLst>
+            <pc:docMk/>
+            <pc:sldMk cId="0" sldId="260"/>
+            <ac:spMk id="12" creationId="{00000000-0000-0000-0000-000000000000}"/>
+          </ac:spMkLst>
+        </pc:spChg>
+        <pc:spChg chg="add del mod">
+          <ac:chgData name="Tirthankar Barari (TR)" userId="e41d4ef3-c9c5-4f08-a494-4c3cb9d953aa" providerId="ADAL" clId="{FDA9B3D4-9EE2-49C8-BD6B-D26A18FAF216}" dt="2026-06-09T15:30:52.846" v="85" actId="20577"/>
+          <ac:spMkLst>
+            <pc:docMk/>
+            <pc:sldMk cId="0" sldId="260"/>
+            <ac:spMk id="13" creationId="{00000000-0000-0000-0000-000000000000}"/>
+          </ac:spMkLst>
+        </pc:spChg>
+        <pc:spChg chg="add del mod">
+          <ac:chgData name="Tirthankar Barari (TR)" userId="e41d4ef3-c9c5-4f08-a494-4c3cb9d953aa" providerId="ADAL" clId="{FDA9B3D4-9EE2-49C8-BD6B-D26A18FAF216}" dt="2026-06-08T20:49:12.088" v="8" actId="26606"/>
+          <ac:spMkLst>
+            <pc:docMk/>
+            <pc:sldMk cId="0" sldId="260"/>
+            <ac:spMk id="14" creationId="{00000000-0000-0000-0000-000000000000}"/>
+          </ac:spMkLst>
+        </pc:spChg>
+        <pc:spChg chg="mod">
+          <ac:chgData name="Tirthankar Barari (TR)" userId="e41d4ef3-c9c5-4f08-a494-4c3cb9d953aa" providerId="ADAL" clId="{FDA9B3D4-9EE2-49C8-BD6B-D26A18FAF216}" dt="2026-06-08T20:49:12.088" v="8" actId="26606"/>
+          <ac:spMkLst>
+            <pc:docMk/>
+            <pc:sldMk cId="0" sldId="260"/>
+            <ac:spMk id="15" creationId="{00000000-0000-0000-0000-000000000000}"/>
           </ac:spMkLst>
         </pc:spChg>
         <pc:spChg chg="mod">
@@ -832,15 +984,7 @@
           <ac:spMkLst>
             <pc:docMk/>
             <pc:sldMk cId="0" sldId="260"/>
-            <ac:spMk id="7" creationId="{00000000-0000-0000-0000-000000000000}"/>
-          </ac:spMkLst>
-        </pc:spChg>
-        <pc:spChg chg="add del">
-          <ac:chgData name="Tirthankar Barari (TR)" userId="e41d4ef3-c9c5-4f08-a494-4c3cb9d953aa" providerId="ADAL" clId="{FDA9B3D4-9EE2-49C8-BD6B-D26A18FAF216}" dt="2026-06-08T20:27:47.019" v="4" actId="26606"/>
-          <ac:spMkLst>
-            <pc:docMk/>
-            <pc:sldMk cId="0" sldId="260"/>
-            <ac:spMk id="8" creationId="{00000000-0000-0000-0000-000000000000}"/>
+            <ac:spMk id="17" creationId="{00000000-0000-0000-0000-000000000000}"/>
           </ac:spMkLst>
         </pc:spChg>
         <pc:spChg chg="mod">
@@ -848,7 +992,31 @@
           <ac:spMkLst>
             <pc:docMk/>
             <pc:sldMk cId="0" sldId="260"/>
-            <ac:spMk id="10" creationId="{00000000-0000-0000-0000-000000000000}"/>
+            <ac:spMk id="18" creationId="{00000000-0000-0000-0000-000000000000}"/>
+          </ac:spMkLst>
+        </pc:spChg>
+        <pc:spChg chg="mod">
+          <ac:chgData name="Tirthankar Barari (TR)" userId="e41d4ef3-c9c5-4f08-a494-4c3cb9d953aa" providerId="ADAL" clId="{FDA9B3D4-9EE2-49C8-BD6B-D26A18FAF216}" dt="2026-06-09T15:30:22.590" v="79" actId="20577"/>
+          <ac:spMkLst>
+            <pc:docMk/>
+            <pc:sldMk cId="0" sldId="260"/>
+            <ac:spMk id="20" creationId="{00000000-0000-0000-0000-000000000000}"/>
+          </ac:spMkLst>
+        </pc:spChg>
+        <pc:spChg chg="mod">
+          <ac:chgData name="Tirthankar Barari (TR)" userId="e41d4ef3-c9c5-4f08-a494-4c3cb9d953aa" providerId="ADAL" clId="{FDA9B3D4-9EE2-49C8-BD6B-D26A18FAF216}" dt="2026-06-09T15:14:35.061" v="76" actId="26606"/>
+          <ac:spMkLst>
+            <pc:docMk/>
+            <pc:sldMk cId="0" sldId="260"/>
+            <ac:spMk id="22" creationId="{00000000-0000-0000-0000-000000000000}"/>
+          </ac:spMkLst>
+        </pc:spChg>
+        <pc:spChg chg="mod">
+          <ac:chgData name="Tirthankar Barari (TR)" userId="e41d4ef3-c9c5-4f08-a494-4c3cb9d953aa" providerId="ADAL" clId="{FDA9B3D4-9EE2-49C8-BD6B-D26A18FAF216}" dt="2026-06-09T15:30:49.864" v="84" actId="20577"/>
+          <ac:spMkLst>
+            <pc:docMk/>
+            <pc:sldMk cId="0" sldId="260"/>
+            <ac:spMk id="23" creationId="{00000000-0000-0000-0000-000000000000}"/>
           </ac:spMkLst>
         </pc:spChg>
         <pc:spChg chg="mod">
@@ -856,7 +1024,79 @@
           <ac:spMkLst>
             <pc:docMk/>
             <pc:sldMk cId="0" sldId="260"/>
-            <ac:spMk id="11" creationId="{00000000-0000-0000-0000-000000000000}"/>
+            <ac:spMk id="24" creationId="{00000000-0000-0000-0000-000000000000}"/>
+          </ac:spMkLst>
+        </pc:spChg>
+        <pc:spChg chg="add del mod">
+          <ac:chgData name="Tirthankar Barari (TR)" userId="e41d4ef3-c9c5-4f08-a494-4c3cb9d953aa" providerId="ADAL" clId="{FDA9B3D4-9EE2-49C8-BD6B-D26A18FAF216}" dt="2026-06-08T21:25:35.642" v="33" actId="26606"/>
+          <ac:spMkLst>
+            <pc:docMk/>
+            <pc:sldMk cId="0" sldId="260"/>
+            <ac:spMk id="25" creationId="{00000000-0000-0000-0000-000000000000}"/>
+          </ac:spMkLst>
+        </pc:spChg>
+        <pc:spChg chg="add">
+          <ac:chgData name="Tirthankar Barari (TR)" userId="e41d4ef3-c9c5-4f08-a494-4c3cb9d953aa" providerId="ADAL" clId="{FDA9B3D4-9EE2-49C8-BD6B-D26A18FAF216}" dt="2026-06-08T20:27:47.019" v="4" actId="26606"/>
+          <ac:spMkLst>
+            <pc:docMk/>
+            <pc:sldMk cId="0" sldId="260"/>
+            <ac:spMk id="26" creationId="{00000000-0000-0000-0000-000000000000}"/>
+          </ac:spMkLst>
+        </pc:spChg>
+        <pc:spChg chg="mod">
+          <ac:chgData name="Tirthankar Barari (TR)" userId="e41d4ef3-c9c5-4f08-a494-4c3cb9d953aa" providerId="ADAL" clId="{FDA9B3D4-9EE2-49C8-BD6B-D26A18FAF216}" dt="2026-06-08T21:49:42.680" v="35" actId="26606"/>
+          <ac:spMkLst>
+            <pc:docMk/>
+            <pc:sldMk cId="0" sldId="260"/>
+            <ac:spMk id="27" creationId="{00000000-0000-0000-0000-000000000000}"/>
+          </ac:spMkLst>
+        </pc:spChg>
+        <pc:spChg chg="mod">
+          <ac:chgData name="Tirthankar Barari (TR)" userId="e41d4ef3-c9c5-4f08-a494-4c3cb9d953aa" providerId="ADAL" clId="{FDA9B3D4-9EE2-49C8-BD6B-D26A18FAF216}" dt="2026-06-09T15:30:25.474" v="80" actId="20577"/>
+          <ac:spMkLst>
+            <pc:docMk/>
+            <pc:sldMk cId="0" sldId="260"/>
+            <ac:spMk id="30" creationId="{00000000-0000-0000-0000-000000000000}"/>
+          </ac:spMkLst>
+        </pc:spChg>
+        <pc:spChg chg="mod">
+          <ac:chgData name="Tirthankar Barari (TR)" userId="e41d4ef3-c9c5-4f08-a494-4c3cb9d953aa" providerId="ADAL" clId="{FDA9B3D4-9EE2-49C8-BD6B-D26A18FAF216}" dt="2026-06-08T21:25:35.642" v="33" actId="26606"/>
+          <ac:spMkLst>
+            <pc:docMk/>
+            <pc:sldMk cId="0" sldId="260"/>
+            <ac:spMk id="31" creationId="{00000000-0000-0000-0000-000000000000}"/>
+          </ac:spMkLst>
+        </pc:spChg>
+        <pc:spChg chg="mod">
+          <ac:chgData name="Tirthankar Barari (TR)" userId="e41d4ef3-c9c5-4f08-a494-4c3cb9d953aa" providerId="ADAL" clId="{FDA9B3D4-9EE2-49C8-BD6B-D26A18FAF216}" dt="2026-06-09T15:14:35.061" v="76" actId="26606"/>
+          <ac:spMkLst>
+            <pc:docMk/>
+            <pc:sldMk cId="0" sldId="260"/>
+            <ac:spMk id="32" creationId="{00000000-0000-0000-0000-000000000000}"/>
+          </ac:spMkLst>
+        </pc:spChg>
+        <pc:spChg chg="mod">
+          <ac:chgData name="Tirthankar Barari (TR)" userId="e41d4ef3-c9c5-4f08-a494-4c3cb9d953aa" providerId="ADAL" clId="{FDA9B3D4-9EE2-49C8-BD6B-D26A18FAF216}" dt="2026-06-09T15:30:46.318" v="83" actId="20577"/>
+          <ac:spMkLst>
+            <pc:docMk/>
+            <pc:sldMk cId="0" sldId="260"/>
+            <ac:spMk id="33" creationId="{00000000-0000-0000-0000-000000000000}"/>
+          </ac:spMkLst>
+        </pc:spChg>
+        <pc:spChg chg="mod">
+          <ac:chgData name="Tirthankar Barari (TR)" userId="e41d4ef3-c9c5-4f08-a494-4c3cb9d953aa" providerId="ADAL" clId="{FDA9B3D4-9EE2-49C8-BD6B-D26A18FAF216}" dt="2026-06-08T20:49:12.088" v="8" actId="26606"/>
+          <ac:spMkLst>
+            <pc:docMk/>
+            <pc:sldMk cId="0" sldId="260"/>
+            <ac:spMk id="34" creationId="{00000000-0000-0000-0000-000000000000}"/>
+          </ac:spMkLst>
+        </pc:spChg>
+        <pc:spChg chg="mod">
+          <ac:chgData name="Tirthankar Barari (TR)" userId="e41d4ef3-c9c5-4f08-a494-4c3cb9d953aa" providerId="ADAL" clId="{FDA9B3D4-9EE2-49C8-BD6B-D26A18FAF216}" dt="2026-06-08T21:49:42.680" v="35" actId="26606"/>
+          <ac:spMkLst>
+            <pc:docMk/>
+            <pc:sldMk cId="0" sldId="260"/>
+            <ac:spMk id="37" creationId="{00000000-0000-0000-0000-000000000000}"/>
           </ac:spMkLst>
         </pc:spChg>
         <pc:spChg chg="mod">
@@ -864,23 +1104,15 @@
           <ac:spMkLst>
             <pc:docMk/>
             <pc:sldMk cId="0" sldId="260"/>
-            <ac:spMk id="12" creationId="{00000000-0000-0000-0000-000000000000}"/>
-          </ac:spMkLst>
-        </pc:spChg>
-        <pc:spChg chg="add del mod">
-          <ac:chgData name="Tirthankar Barari (TR)" userId="e41d4ef3-c9c5-4f08-a494-4c3cb9d953aa" providerId="ADAL" clId="{FDA9B3D4-9EE2-49C8-BD6B-D26A18FAF216}" dt="2026-06-08T21:25:35.642" v="33" actId="26606"/>
+            <ac:spMk id="39" creationId="{00000000-0000-0000-0000-000000000000}"/>
+          </ac:spMkLst>
+        </pc:spChg>
+        <pc:spChg chg="mod">
+          <ac:chgData name="Tirthankar Barari (TR)" userId="e41d4ef3-c9c5-4f08-a494-4c3cb9d953aa" providerId="ADAL" clId="{FDA9B3D4-9EE2-49C8-BD6B-D26A18FAF216}" dt="2026-06-09T15:30:29.147" v="81" actId="20577"/>
           <ac:spMkLst>
             <pc:docMk/>
             <pc:sldMk cId="0" sldId="260"/>
-            <ac:spMk id="13" creationId="{00000000-0000-0000-0000-000000000000}"/>
-          </ac:spMkLst>
-        </pc:spChg>
-        <pc:spChg chg="add del mod">
-          <ac:chgData name="Tirthankar Barari (TR)" userId="e41d4ef3-c9c5-4f08-a494-4c3cb9d953aa" providerId="ADAL" clId="{FDA9B3D4-9EE2-49C8-BD6B-D26A18FAF216}" dt="2026-06-08T20:49:12.088" v="8" actId="26606"/>
-          <ac:spMkLst>
-            <pc:docMk/>
-            <pc:sldMk cId="0" sldId="260"/>
-            <ac:spMk id="14" creationId="{00000000-0000-0000-0000-000000000000}"/>
+            <ac:spMk id="40" creationId="{00000000-0000-0000-0000-000000000000}"/>
           </ac:spMkLst>
         </pc:spChg>
         <pc:spChg chg="mod">
@@ -888,15 +1120,31 @@
           <ac:spMkLst>
             <pc:docMk/>
             <pc:sldMk cId="0" sldId="260"/>
-            <ac:spMk id="15" creationId="{00000000-0000-0000-0000-000000000000}"/>
+            <ac:spMk id="41" creationId="{00000000-0000-0000-0000-000000000000}"/>
+          </ac:spMkLst>
+        </pc:spChg>
+        <pc:spChg chg="add del mod">
+          <ac:chgData name="Tirthankar Barari (TR)" userId="e41d4ef3-c9c5-4f08-a494-4c3cb9d953aa" providerId="ADAL" clId="{FDA9B3D4-9EE2-49C8-BD6B-D26A18FAF216}" dt="2026-06-09T15:14:35.061" v="76" actId="26606"/>
+          <ac:spMkLst>
+            <pc:docMk/>
+            <pc:sldMk cId="0" sldId="260"/>
+            <ac:spMk id="42" creationId="{00000000-0000-0000-0000-000000000000}"/>
           </ac:spMkLst>
         </pc:spChg>
         <pc:spChg chg="mod">
-          <ac:chgData name="Tirthankar Barari (TR)" userId="e41d4ef3-c9c5-4f08-a494-4c3cb9d953aa" providerId="ADAL" clId="{FDA9B3D4-9EE2-49C8-BD6B-D26A18FAF216}" dt="2026-06-08T21:49:42.680" v="35" actId="26606"/>
+          <ac:chgData name="Tirthankar Barari (TR)" userId="e41d4ef3-c9c5-4f08-a494-4c3cb9d953aa" providerId="ADAL" clId="{FDA9B3D4-9EE2-49C8-BD6B-D26A18FAF216}" dt="2026-06-09T15:30:38.917" v="82" actId="20577"/>
           <ac:spMkLst>
             <pc:docMk/>
             <pc:sldMk cId="0" sldId="260"/>
-            <ac:spMk id="17" creationId="{00000000-0000-0000-0000-000000000000}"/>
+            <ac:spMk id="43" creationId="{00000000-0000-0000-0000-000000000000}"/>
+          </ac:spMkLst>
+        </pc:spChg>
+        <pc:spChg chg="add del mod">
+          <ac:chgData name="Tirthankar Barari (TR)" userId="e41d4ef3-c9c5-4f08-a494-4c3cb9d953aa" providerId="ADAL" clId="{FDA9B3D4-9EE2-49C8-BD6B-D26A18FAF216}" dt="2026-06-09T15:31:02.189" v="86" actId="14100"/>
+          <ac:spMkLst>
+            <pc:docMk/>
+            <pc:sldMk cId="0" sldId="260"/>
+            <ac:spMk id="44" creationId="{00000000-0000-0000-0000-000000000000}"/>
           </ac:spMkLst>
         </pc:spChg>
         <pc:spChg chg="mod">
@@ -904,131 +1152,11 @@
           <ac:spMkLst>
             <pc:docMk/>
             <pc:sldMk cId="0" sldId="260"/>
-            <ac:spMk id="18" creationId="{00000000-0000-0000-0000-000000000000}"/>
+            <ac:spMk id="45" creationId="{00000000-0000-0000-0000-000000000000}"/>
           </ac:spMkLst>
         </pc:spChg>
         <pc:spChg chg="mod">
-          <ac:chgData name="Tirthankar Barari (TR)" userId="e41d4ef3-c9c5-4f08-a494-4c3cb9d953aa" providerId="ADAL" clId="{FDA9B3D4-9EE2-49C8-BD6B-D26A18FAF216}" dt="2026-06-08T20:49:12.088" v="8" actId="26606"/>
-          <ac:spMkLst>
-            <pc:docMk/>
-            <pc:sldMk cId="0" sldId="260"/>
-            <ac:spMk id="24" creationId="{00000000-0000-0000-0000-000000000000}"/>
-          </ac:spMkLst>
-        </pc:spChg>
-        <pc:spChg chg="add del mod">
-          <ac:chgData name="Tirthankar Barari (TR)" userId="e41d4ef3-c9c5-4f08-a494-4c3cb9d953aa" providerId="ADAL" clId="{FDA9B3D4-9EE2-49C8-BD6B-D26A18FAF216}" dt="2026-06-08T21:25:35.642" v="33" actId="26606"/>
-          <ac:spMkLst>
-            <pc:docMk/>
-            <pc:sldMk cId="0" sldId="260"/>
-            <ac:spMk id="25" creationId="{00000000-0000-0000-0000-000000000000}"/>
-          </ac:spMkLst>
-        </pc:spChg>
-        <pc:spChg chg="add">
-          <ac:chgData name="Tirthankar Barari (TR)" userId="e41d4ef3-c9c5-4f08-a494-4c3cb9d953aa" providerId="ADAL" clId="{FDA9B3D4-9EE2-49C8-BD6B-D26A18FAF216}" dt="2026-06-08T20:27:47.019" v="4" actId="26606"/>
-          <ac:spMkLst>
-            <pc:docMk/>
-            <pc:sldMk cId="0" sldId="260"/>
-            <ac:spMk id="26" creationId="{00000000-0000-0000-0000-000000000000}"/>
-          </ac:spMkLst>
-        </pc:spChg>
-        <pc:spChg chg="mod">
-          <ac:chgData name="Tirthankar Barari (TR)" userId="e41d4ef3-c9c5-4f08-a494-4c3cb9d953aa" providerId="ADAL" clId="{FDA9B3D4-9EE2-49C8-BD6B-D26A18FAF216}" dt="2026-06-08T21:49:42.680" v="35" actId="26606"/>
-          <ac:spMkLst>
-            <pc:docMk/>
-            <pc:sldMk cId="0" sldId="260"/>
-            <ac:spMk id="27" creationId="{00000000-0000-0000-0000-000000000000}"/>
-          </ac:spMkLst>
-        </pc:spChg>
-        <pc:spChg chg="mod">
-          <ac:chgData name="Tirthankar Barari (TR)" userId="e41d4ef3-c9c5-4f08-a494-4c3cb9d953aa" providerId="ADAL" clId="{FDA9B3D4-9EE2-49C8-BD6B-D26A18FAF216}" dt="2026-06-08T21:25:35.642" v="33" actId="26606"/>
-          <ac:spMkLst>
-            <pc:docMk/>
-            <pc:sldMk cId="0" sldId="260"/>
-            <ac:spMk id="31" creationId="{00000000-0000-0000-0000-000000000000}"/>
-          </ac:spMkLst>
-        </pc:spChg>
-        <pc:spChg chg="mod">
-          <ac:chgData name="Tirthankar Barari (TR)" userId="e41d4ef3-c9c5-4f08-a494-4c3cb9d953aa" providerId="ADAL" clId="{FDA9B3D4-9EE2-49C8-BD6B-D26A18FAF216}" dt="2026-06-08T20:02:21.111" v="2" actId="26606"/>
-          <ac:spMkLst>
-            <pc:docMk/>
-            <pc:sldMk cId="0" sldId="260"/>
-            <ac:spMk id="32" creationId="{00000000-0000-0000-0000-000000000000}"/>
-          </ac:spMkLst>
-        </pc:spChg>
-        <pc:spChg chg="mod">
-          <ac:chgData name="Tirthankar Barari (TR)" userId="e41d4ef3-c9c5-4f08-a494-4c3cb9d953aa" providerId="ADAL" clId="{FDA9B3D4-9EE2-49C8-BD6B-D26A18FAF216}" dt="2026-06-08T21:25:35.642" v="33" actId="26606"/>
-          <ac:spMkLst>
-            <pc:docMk/>
-            <pc:sldMk cId="0" sldId="260"/>
-            <ac:spMk id="33" creationId="{00000000-0000-0000-0000-000000000000}"/>
-          </ac:spMkLst>
-        </pc:spChg>
-        <pc:spChg chg="mod">
-          <ac:chgData name="Tirthankar Barari (TR)" userId="e41d4ef3-c9c5-4f08-a494-4c3cb9d953aa" providerId="ADAL" clId="{FDA9B3D4-9EE2-49C8-BD6B-D26A18FAF216}" dt="2026-06-08T20:49:12.088" v="8" actId="26606"/>
-          <ac:spMkLst>
-            <pc:docMk/>
-            <pc:sldMk cId="0" sldId="260"/>
-            <ac:spMk id="34" creationId="{00000000-0000-0000-0000-000000000000}"/>
-          </ac:spMkLst>
-        </pc:spChg>
-        <pc:spChg chg="mod">
-          <ac:chgData name="Tirthankar Barari (TR)" userId="e41d4ef3-c9c5-4f08-a494-4c3cb9d953aa" providerId="ADAL" clId="{FDA9B3D4-9EE2-49C8-BD6B-D26A18FAF216}" dt="2026-06-08T21:49:42.680" v="35" actId="26606"/>
-          <ac:spMkLst>
-            <pc:docMk/>
-            <pc:sldMk cId="0" sldId="260"/>
-            <ac:spMk id="37" creationId="{00000000-0000-0000-0000-000000000000}"/>
-          </ac:spMkLst>
-        </pc:spChg>
-        <pc:spChg chg="mod">
-          <ac:chgData name="Tirthankar Barari (TR)" userId="e41d4ef3-c9c5-4f08-a494-4c3cb9d953aa" providerId="ADAL" clId="{FDA9B3D4-9EE2-49C8-BD6B-D26A18FAF216}" dt="2026-06-08T20:02:21.111" v="2" actId="26606"/>
-          <ac:spMkLst>
-            <pc:docMk/>
-            <pc:sldMk cId="0" sldId="260"/>
-            <ac:spMk id="39" creationId="{00000000-0000-0000-0000-000000000000}"/>
-          </ac:spMkLst>
-        </pc:spChg>
-        <pc:spChg chg="mod">
-          <ac:chgData name="Tirthankar Barari (TR)" userId="e41d4ef3-c9c5-4f08-a494-4c3cb9d953aa" providerId="ADAL" clId="{FDA9B3D4-9EE2-49C8-BD6B-D26A18FAF216}" dt="2026-06-08T20:49:12.088" v="8" actId="26606"/>
-          <ac:spMkLst>
-            <pc:docMk/>
-            <pc:sldMk cId="0" sldId="260"/>
-            <ac:spMk id="41" creationId="{00000000-0000-0000-0000-000000000000}"/>
-          </ac:spMkLst>
-        </pc:spChg>
-        <pc:spChg chg="add del">
-          <ac:chgData name="Tirthankar Barari (TR)" userId="e41d4ef3-c9c5-4f08-a494-4c3cb9d953aa" providerId="ADAL" clId="{FDA9B3D4-9EE2-49C8-BD6B-D26A18FAF216}" dt="2026-06-08T20:27:47.019" v="4" actId="26606"/>
-          <ac:spMkLst>
-            <pc:docMk/>
-            <pc:sldMk cId="0" sldId="260"/>
-            <ac:spMk id="42" creationId="{00000000-0000-0000-0000-000000000000}"/>
-          </ac:spMkLst>
-        </pc:spChg>
-        <pc:spChg chg="mod">
-          <ac:chgData name="Tirthankar Barari (TR)" userId="e41d4ef3-c9c5-4f08-a494-4c3cb9d953aa" providerId="ADAL" clId="{FDA9B3D4-9EE2-49C8-BD6B-D26A18FAF216}" dt="2026-06-08T21:25:35.642" v="33" actId="26606"/>
-          <ac:spMkLst>
-            <pc:docMk/>
-            <pc:sldMk cId="0" sldId="260"/>
-            <ac:spMk id="43" creationId="{00000000-0000-0000-0000-000000000000}"/>
-          </ac:spMkLst>
-        </pc:spChg>
-        <pc:spChg chg="add del mod">
-          <ac:chgData name="Tirthankar Barari (TR)" userId="e41d4ef3-c9c5-4f08-a494-4c3cb9d953aa" providerId="ADAL" clId="{FDA9B3D4-9EE2-49C8-BD6B-D26A18FAF216}" dt="2026-06-08T20:49:12.088" v="8" actId="26606"/>
-          <ac:spMkLst>
-            <pc:docMk/>
-            <pc:sldMk cId="0" sldId="260"/>
-            <ac:spMk id="44" creationId="{00000000-0000-0000-0000-000000000000}"/>
-          </ac:spMkLst>
-        </pc:spChg>
-        <pc:spChg chg="mod">
-          <ac:chgData name="Tirthankar Barari (TR)" userId="e41d4ef3-c9c5-4f08-a494-4c3cb9d953aa" providerId="ADAL" clId="{FDA9B3D4-9EE2-49C8-BD6B-D26A18FAF216}" dt="2026-06-08T21:25:35.642" v="33" actId="26606"/>
-          <ac:spMkLst>
-            <pc:docMk/>
-            <pc:sldMk cId="0" sldId="260"/>
-            <ac:spMk id="45" creationId="{00000000-0000-0000-0000-000000000000}"/>
-          </ac:spMkLst>
-        </pc:spChg>
-        <pc:spChg chg="mod">
-          <ac:chgData name="Tirthankar Barari (TR)" userId="e41d4ef3-c9c5-4f08-a494-4c3cb9d953aa" providerId="ADAL" clId="{FDA9B3D4-9EE2-49C8-BD6B-D26A18FAF216}" dt="2026-06-08T20:49:12.088" v="8" actId="26606"/>
+          <ac:chgData name="Tirthankar Barari (TR)" userId="e41d4ef3-c9c5-4f08-a494-4c3cb9d953aa" providerId="ADAL" clId="{FDA9B3D4-9EE2-49C8-BD6B-D26A18FAF216}" dt="2026-06-09T15:31:16.004" v="90" actId="14100"/>
           <ac:spMkLst>
             <pc:docMk/>
             <pc:sldMk cId="0" sldId="260"/>
@@ -1084,7 +1212,7 @@
           </ac:spMkLst>
         </pc:spChg>
         <pc:picChg chg="mod">
-          <ac:chgData name="Tirthankar Barari (TR)" userId="e41d4ef3-c9c5-4f08-a494-4c3cb9d953aa" providerId="ADAL" clId="{FDA9B3D4-9EE2-49C8-BD6B-D26A18FAF216}" dt="2026-06-08T22:05:00.643" v="37" actId="26606"/>
+          <ac:chgData name="Tirthankar Barari (TR)" userId="e41d4ef3-c9c5-4f08-a494-4c3cb9d953aa" providerId="ADAL" clId="{FDA9B3D4-9EE2-49C8-BD6B-D26A18FAF216}" dt="2026-06-09T15:43:00.380" v="113" actId="26606"/>
           <ac:picMkLst>
             <pc:docMk/>
             <pc:sldMk cId="0" sldId="260"/>
@@ -1092,7 +1220,7 @@
           </ac:picMkLst>
         </pc:picChg>
         <pc:picChg chg="mod">
-          <ac:chgData name="Tirthankar Barari (TR)" userId="e41d4ef3-c9c5-4f08-a494-4c3cb9d953aa" providerId="ADAL" clId="{FDA9B3D4-9EE2-49C8-BD6B-D26A18FAF216}" dt="2026-06-08T22:05:00.643" v="37" actId="26606"/>
+          <ac:chgData name="Tirthankar Barari (TR)" userId="e41d4ef3-c9c5-4f08-a494-4c3cb9d953aa" providerId="ADAL" clId="{FDA9B3D4-9EE2-49C8-BD6B-D26A18FAF216}" dt="2026-06-09T15:43:00.380" v="113" actId="26606"/>
           <ac:picMkLst>
             <pc:docMk/>
             <pc:sldMk cId="0" sldId="260"/>
@@ -1100,7 +1228,7 @@
           </ac:picMkLst>
         </pc:picChg>
         <pc:picChg chg="mod">
-          <ac:chgData name="Tirthankar Barari (TR)" userId="e41d4ef3-c9c5-4f08-a494-4c3cb9d953aa" providerId="ADAL" clId="{FDA9B3D4-9EE2-49C8-BD6B-D26A18FAF216}" dt="2026-06-08T22:05:00.643" v="37" actId="26606"/>
+          <ac:chgData name="Tirthankar Barari (TR)" userId="e41d4ef3-c9c5-4f08-a494-4c3cb9d953aa" providerId="ADAL" clId="{FDA9B3D4-9EE2-49C8-BD6B-D26A18FAF216}" dt="2026-06-09T15:43:00.380" v="113" actId="26606"/>
           <ac:picMkLst>
             <pc:docMk/>
             <pc:sldMk cId="0" sldId="260"/>
@@ -1108,7 +1236,7 @@
           </ac:picMkLst>
         </pc:picChg>
         <pc:picChg chg="mod">
-          <ac:chgData name="Tirthankar Barari (TR)" userId="e41d4ef3-c9c5-4f08-a494-4c3cb9d953aa" providerId="ADAL" clId="{FDA9B3D4-9EE2-49C8-BD6B-D26A18FAF216}" dt="2026-06-08T22:05:00.643" v="37" actId="26606"/>
+          <ac:chgData name="Tirthankar Barari (TR)" userId="e41d4ef3-c9c5-4f08-a494-4c3cb9d953aa" providerId="ADAL" clId="{FDA9B3D4-9EE2-49C8-BD6B-D26A18FAF216}" dt="2026-06-09T15:43:00.380" v="113" actId="26606"/>
           <ac:picMkLst>
             <pc:docMk/>
             <pc:sldMk cId="0" sldId="260"/>
@@ -1228,12 +1356,28 @@
         </pc:spChg>
       </pc:sldChg>
       <pc:sldChg chg="addSp delSp modSp mod setBg">
-        <pc:chgData name="Tirthankar Barari (TR)" userId="e41d4ef3-c9c5-4f08-a494-4c3cb9d953aa" providerId="ADAL" clId="{FDA9B3D4-9EE2-49C8-BD6B-D26A18FAF216}" dt="2026-06-08T22:05:00.643" v="37" actId="26606"/>
+        <pc:chgData name="Tirthankar Barari (TR)" userId="e41d4ef3-c9c5-4f08-a494-4c3cb9d953aa" providerId="ADAL" clId="{FDA9B3D4-9EE2-49C8-BD6B-D26A18FAF216}" dt="2026-06-09T15:43:00.380" v="113" actId="26606"/>
         <pc:sldMkLst>
           <pc:docMk/>
           <pc:sldMk cId="0" sldId="262"/>
         </pc:sldMkLst>
         <pc:spChg chg="mod">
+          <ac:chgData name="Tirthankar Barari (TR)" userId="e41d4ef3-c9c5-4f08-a494-4c3cb9d953aa" providerId="ADAL" clId="{FDA9B3D4-9EE2-49C8-BD6B-D26A18FAF216}" dt="2026-06-09T15:43:00.380" v="113" actId="26606"/>
+          <ac:spMkLst>
+            <pc:docMk/>
+            <pc:sldMk cId="0" sldId="262"/>
+            <ac:spMk id="3" creationId="{00000000-0000-0000-0000-000000000000}"/>
+          </ac:spMkLst>
+        </pc:spChg>
+        <pc:spChg chg="mod">
+          <ac:chgData name="Tirthankar Barari (TR)" userId="e41d4ef3-c9c5-4f08-a494-4c3cb9d953aa" providerId="ADAL" clId="{FDA9B3D4-9EE2-49C8-BD6B-D26A18FAF216}" dt="2026-06-09T15:19:42.214" v="77" actId="26606"/>
+          <ac:spMkLst>
+            <pc:docMk/>
+            <pc:sldMk cId="0" sldId="262"/>
+            <ac:spMk id="4" creationId="{00000000-0000-0000-0000-000000000000}"/>
+          </ac:spMkLst>
+        </pc:spChg>
+        <pc:spChg chg="mod">
           <ac:chgData name="Tirthankar Barari (TR)" userId="e41d4ef3-c9c5-4f08-a494-4c3cb9d953aa" providerId="ADAL" clId="{FDA9B3D4-9EE2-49C8-BD6B-D26A18FAF216}" dt="2026-06-08T21:25:35.642" v="33" actId="26606"/>
           <ac:spMkLst>
             <pc:docMk/>
@@ -1242,7 +1386,7 @@
           </ac:spMkLst>
         </pc:spChg>
         <pc:spChg chg="mod">
-          <ac:chgData name="Tirthankar Barari (TR)" userId="e41d4ef3-c9c5-4f08-a494-4c3cb9d953aa" providerId="ADAL" clId="{FDA9B3D4-9EE2-49C8-BD6B-D26A18FAF216}" dt="2026-06-08T21:49:42.680" v="35" actId="26606"/>
+          <ac:chgData name="Tirthankar Barari (TR)" userId="e41d4ef3-c9c5-4f08-a494-4c3cb9d953aa" providerId="ADAL" clId="{FDA9B3D4-9EE2-49C8-BD6B-D26A18FAF216}" dt="2026-06-09T15:19:42.214" v="77" actId="26606"/>
           <ac:spMkLst>
             <pc:docMk/>
             <pc:sldMk cId="0" sldId="262"/>
@@ -1258,6 +1402,14 @@
           </ac:spMkLst>
         </pc:spChg>
         <pc:spChg chg="mod">
+          <ac:chgData name="Tirthankar Barari (TR)" userId="e41d4ef3-c9c5-4f08-a494-4c3cb9d953aa" providerId="ADAL" clId="{FDA9B3D4-9EE2-49C8-BD6B-D26A18FAF216}" dt="2026-06-09T15:36:46.930" v="91" actId="20577"/>
+          <ac:spMkLst>
+            <pc:docMk/>
+            <pc:sldMk cId="0" sldId="262"/>
+            <ac:spMk id="10" creationId="{00000000-0000-0000-0000-000000000000}"/>
+          </ac:spMkLst>
+        </pc:spChg>
+        <pc:spChg chg="mod">
           <ac:chgData name="Tirthankar Barari (TR)" userId="e41d4ef3-c9c5-4f08-a494-4c3cb9d953aa" providerId="ADAL" clId="{FDA9B3D4-9EE2-49C8-BD6B-D26A18FAF216}" dt="2026-06-08T21:25:35.642" v="33" actId="26606"/>
           <ac:spMkLst>
             <pc:docMk/>
@@ -1274,7 +1426,7 @@
           </ac:spMkLst>
         </pc:spChg>
         <pc:spChg chg="mod">
-          <ac:chgData name="Tirthankar Barari (TR)" userId="e41d4ef3-c9c5-4f08-a494-4c3cb9d953aa" providerId="ADAL" clId="{FDA9B3D4-9EE2-49C8-BD6B-D26A18FAF216}" dt="2026-06-08T20:49:12.088" v="8" actId="26606"/>
+          <ac:chgData name="Tirthankar Barari (TR)" userId="e41d4ef3-c9c5-4f08-a494-4c3cb9d953aa" providerId="ADAL" clId="{FDA9B3D4-9EE2-49C8-BD6B-D26A18FAF216}" dt="2026-06-09T15:36:59.698" v="95" actId="20577"/>
           <ac:spMkLst>
             <pc:docMk/>
             <pc:sldMk cId="0" sldId="262"/>
@@ -1306,7 +1458,7 @@
           </ac:spMkLst>
         </pc:spChg>
         <pc:spChg chg="mod">
-          <ac:chgData name="Tirthankar Barari (TR)" userId="e41d4ef3-c9c5-4f08-a494-4c3cb9d953aa" providerId="ADAL" clId="{FDA9B3D4-9EE2-49C8-BD6B-D26A18FAF216}" dt="2026-06-08T21:49:42.680" v="35" actId="26606"/>
+          <ac:chgData name="Tirthankar Barari (TR)" userId="e41d4ef3-c9c5-4f08-a494-4c3cb9d953aa" providerId="ADAL" clId="{FDA9B3D4-9EE2-49C8-BD6B-D26A18FAF216}" dt="2026-06-09T15:19:42.214" v="77" actId="26606"/>
           <ac:spMkLst>
             <pc:docMk/>
             <pc:sldMk cId="0" sldId="262"/>
@@ -1322,7 +1474,7 @@
           </ac:spMkLst>
         </pc:spChg>
         <pc:spChg chg="mod">
-          <ac:chgData name="Tirthankar Barari (TR)" userId="e41d4ef3-c9c5-4f08-a494-4c3cb9d953aa" providerId="ADAL" clId="{FDA9B3D4-9EE2-49C8-BD6B-D26A18FAF216}" dt="2026-06-08T21:25:35.642" v="33" actId="26606"/>
+          <ac:chgData name="Tirthankar Barari (TR)" userId="e41d4ef3-c9c5-4f08-a494-4c3cb9d953aa" providerId="ADAL" clId="{FDA9B3D4-9EE2-49C8-BD6B-D26A18FAF216}" dt="2026-06-09T15:36:50.190" v="92" actId="20577"/>
           <ac:spMkLst>
             <pc:docMk/>
             <pc:sldMk cId="0" sldId="262"/>
@@ -1338,7 +1490,7 @@
           </ac:spMkLst>
         </pc:spChg>
         <pc:spChg chg="mod">
-          <ac:chgData name="Tirthankar Barari (TR)" userId="e41d4ef3-c9c5-4f08-a494-4c3cb9d953aa" providerId="ADAL" clId="{FDA9B3D4-9EE2-49C8-BD6B-D26A18FAF216}" dt="2026-06-08T20:49:12.088" v="8" actId="26606"/>
+          <ac:chgData name="Tirthankar Barari (TR)" userId="e41d4ef3-c9c5-4f08-a494-4c3cb9d953aa" providerId="ADAL" clId="{FDA9B3D4-9EE2-49C8-BD6B-D26A18FAF216}" dt="2026-06-09T15:37:02.871" v="96" actId="20577"/>
           <ac:spMkLst>
             <pc:docMk/>
             <pc:sldMk cId="0" sldId="262"/>
@@ -1394,7 +1546,7 @@
           </ac:spMkLst>
         </pc:spChg>
         <pc:spChg chg="add del mod">
-          <ac:chgData name="Tirthankar Barari (TR)" userId="e41d4ef3-c9c5-4f08-a494-4c3cb9d953aa" providerId="ADAL" clId="{FDA9B3D4-9EE2-49C8-BD6B-D26A18FAF216}" dt="2026-06-08T21:25:35.642" v="33" actId="26606"/>
+          <ac:chgData name="Tirthankar Barari (TR)" userId="e41d4ef3-c9c5-4f08-a494-4c3cb9d953aa" providerId="ADAL" clId="{FDA9B3D4-9EE2-49C8-BD6B-D26A18FAF216}" dt="2026-06-09T15:36:52.758" v="93" actId="20577"/>
           <ac:spMkLst>
             <pc:docMk/>
             <pc:sldMk cId="0" sldId="262"/>
@@ -1418,7 +1570,7 @@
           </ac:spMkLst>
         </pc:spChg>
         <pc:spChg chg="mod">
-          <ac:chgData name="Tirthankar Barari (TR)" userId="e41d4ef3-c9c5-4f08-a494-4c3cb9d953aa" providerId="ADAL" clId="{FDA9B3D4-9EE2-49C8-BD6B-D26A18FAF216}" dt="2026-06-08T20:49:12.088" v="8" actId="26606"/>
+          <ac:chgData name="Tirthankar Barari (TR)" userId="e41d4ef3-c9c5-4f08-a494-4c3cb9d953aa" providerId="ADAL" clId="{FDA9B3D4-9EE2-49C8-BD6B-D26A18FAF216}" dt="2026-06-09T15:37:06.703" v="97" actId="20577"/>
           <ac:spMkLst>
             <pc:docMk/>
             <pc:sldMk cId="0" sldId="262"/>
@@ -1441,8 +1593,8 @@
             <ac:spMk id="37" creationId="{00000000-0000-0000-0000-000000000000}"/>
           </ac:spMkLst>
         </pc:spChg>
-        <pc:spChg chg="add del">
-          <ac:chgData name="Tirthankar Barari (TR)" userId="e41d4ef3-c9c5-4f08-a494-4c3cb9d953aa" providerId="ADAL" clId="{FDA9B3D4-9EE2-49C8-BD6B-D26A18FAF216}" dt="2026-06-08T20:27:47.019" v="4" actId="26606"/>
+        <pc:spChg chg="add del mod">
+          <ac:chgData name="Tirthankar Barari (TR)" userId="e41d4ef3-c9c5-4f08-a494-4c3cb9d953aa" providerId="ADAL" clId="{FDA9B3D4-9EE2-49C8-BD6B-D26A18FAF216}" dt="2026-06-09T15:19:42.214" v="77" actId="26606"/>
           <ac:spMkLst>
             <pc:docMk/>
             <pc:sldMk cId="0" sldId="262"/>
@@ -1450,6 +1602,14 @@
           </ac:spMkLst>
         </pc:spChg>
         <pc:spChg chg="mod">
+          <ac:chgData name="Tirthankar Barari (TR)" userId="e41d4ef3-c9c5-4f08-a494-4c3cb9d953aa" providerId="ADAL" clId="{FDA9B3D4-9EE2-49C8-BD6B-D26A18FAF216}" dt="2026-06-09T15:36:55.339" v="94" actId="20577"/>
+          <ac:spMkLst>
+            <pc:docMk/>
+            <pc:sldMk cId="0" sldId="262"/>
+            <ac:spMk id="40" creationId="{00000000-0000-0000-0000-000000000000}"/>
+          </ac:spMkLst>
+        </pc:spChg>
+        <pc:spChg chg="mod">
           <ac:chgData name="Tirthankar Barari (TR)" userId="e41d4ef3-c9c5-4f08-a494-4c3cb9d953aa" providerId="ADAL" clId="{FDA9B3D4-9EE2-49C8-BD6B-D26A18FAF216}" dt="2026-06-08T20:02:21.111" v="2" actId="26606"/>
           <ac:spMkLst>
             <pc:docMk/>
@@ -1458,7 +1618,7 @@
           </ac:spMkLst>
         </pc:spChg>
         <pc:spChg chg="add del mod">
-          <ac:chgData name="Tirthankar Barari (TR)" userId="e41d4ef3-c9c5-4f08-a494-4c3cb9d953aa" providerId="ADAL" clId="{FDA9B3D4-9EE2-49C8-BD6B-D26A18FAF216}" dt="2026-06-08T20:27:47.019" v="4" actId="26606"/>
+          <ac:chgData name="Tirthankar Barari (TR)" userId="e41d4ef3-c9c5-4f08-a494-4c3cb9d953aa" providerId="ADAL" clId="{FDA9B3D4-9EE2-49C8-BD6B-D26A18FAF216}" dt="2026-06-09T15:19:42.214" v="77" actId="26606"/>
           <ac:spMkLst>
             <pc:docMk/>
             <pc:sldMk cId="0" sldId="262"/>
@@ -1466,7 +1626,7 @@
           </ac:spMkLst>
         </pc:spChg>
         <pc:spChg chg="add del mod">
-          <ac:chgData name="Tirthankar Barari (TR)" userId="e41d4ef3-c9c5-4f08-a494-4c3cb9d953aa" providerId="ADAL" clId="{FDA9B3D4-9EE2-49C8-BD6B-D26A18FAF216}" dt="2026-06-08T20:49:12.088" v="8" actId="26606"/>
+          <ac:chgData name="Tirthankar Barari (TR)" userId="e41d4ef3-c9c5-4f08-a494-4c3cb9d953aa" providerId="ADAL" clId="{FDA9B3D4-9EE2-49C8-BD6B-D26A18FAF216}" dt="2026-06-09T15:37:10.109" v="98" actId="20577"/>
           <ac:spMkLst>
             <pc:docMk/>
             <pc:sldMk cId="0" sldId="262"/>
@@ -1474,7 +1634,7 @@
           </ac:spMkLst>
         </pc:spChg>
         <pc:spChg chg="mod">
-          <ac:chgData name="Tirthankar Barari (TR)" userId="e41d4ef3-c9c5-4f08-a494-4c3cb9d953aa" providerId="ADAL" clId="{FDA9B3D4-9EE2-49C8-BD6B-D26A18FAF216}" dt="2026-06-08T21:25:35.642" v="33" actId="26606"/>
+          <ac:chgData name="Tirthankar Barari (TR)" userId="e41d4ef3-c9c5-4f08-a494-4c3cb9d953aa" providerId="ADAL" clId="{FDA9B3D4-9EE2-49C8-BD6B-D26A18FAF216}" dt="2026-06-09T15:37:17.825" v="99" actId="14100"/>
           <ac:spMkLst>
             <pc:docMk/>
             <pc:sldMk cId="0" sldId="262"/>
@@ -1482,7 +1642,7 @@
           </ac:spMkLst>
         </pc:spChg>
         <pc:spChg chg="mod">
-          <ac:chgData name="Tirthankar Barari (TR)" userId="e41d4ef3-c9c5-4f08-a494-4c3cb9d953aa" providerId="ADAL" clId="{FDA9B3D4-9EE2-49C8-BD6B-D26A18FAF216}" dt="2026-06-08T20:49:12.088" v="8" actId="26606"/>
+          <ac:chgData name="Tirthankar Barari (TR)" userId="e41d4ef3-c9c5-4f08-a494-4c3cb9d953aa" providerId="ADAL" clId="{FDA9B3D4-9EE2-49C8-BD6B-D26A18FAF216}" dt="2026-06-09T15:19:42.214" v="77" actId="26606"/>
           <ac:spMkLst>
             <pc:docMk/>
             <pc:sldMk cId="0" sldId="262"/>
@@ -1490,7 +1650,7 @@
           </ac:spMkLst>
         </pc:spChg>
         <pc:spChg chg="mod">
-          <ac:chgData name="Tirthankar Barari (TR)" userId="e41d4ef3-c9c5-4f08-a494-4c3cb9d953aa" providerId="ADAL" clId="{FDA9B3D4-9EE2-49C8-BD6B-D26A18FAF216}" dt="2026-06-08T21:25:35.642" v="33" actId="26606"/>
+          <ac:chgData name="Tirthankar Barari (TR)" userId="e41d4ef3-c9c5-4f08-a494-4c3cb9d953aa" providerId="ADAL" clId="{FDA9B3D4-9EE2-49C8-BD6B-D26A18FAF216}" dt="2026-06-09T15:37:28.633" v="101" actId="1076"/>
           <ac:spMkLst>
             <pc:docMk/>
             <pc:sldMk cId="0" sldId="262"/>
@@ -1546,7 +1706,7 @@
           </ac:spMkLst>
         </pc:spChg>
         <pc:picChg chg="mod">
-          <ac:chgData name="Tirthankar Barari (TR)" userId="e41d4ef3-c9c5-4f08-a494-4c3cb9d953aa" providerId="ADAL" clId="{FDA9B3D4-9EE2-49C8-BD6B-D26A18FAF216}" dt="2026-06-08T22:05:00.643" v="37" actId="26606"/>
+          <ac:chgData name="Tirthankar Barari (TR)" userId="e41d4ef3-c9c5-4f08-a494-4c3cb9d953aa" providerId="ADAL" clId="{FDA9B3D4-9EE2-49C8-BD6B-D26A18FAF216}" dt="2026-06-09T15:43:00.380" v="113" actId="26606"/>
           <ac:picMkLst>
             <pc:docMk/>
             <pc:sldMk cId="0" sldId="262"/>
@@ -1554,7 +1714,7 @@
           </ac:picMkLst>
         </pc:picChg>
         <pc:picChg chg="mod">
-          <ac:chgData name="Tirthankar Barari (TR)" userId="e41d4ef3-c9c5-4f08-a494-4c3cb9d953aa" providerId="ADAL" clId="{FDA9B3D4-9EE2-49C8-BD6B-D26A18FAF216}" dt="2026-06-08T22:05:00.643" v="37" actId="26606"/>
+          <ac:chgData name="Tirthankar Barari (TR)" userId="e41d4ef3-c9c5-4f08-a494-4c3cb9d953aa" providerId="ADAL" clId="{FDA9B3D4-9EE2-49C8-BD6B-D26A18FAF216}" dt="2026-06-09T15:43:00.380" v="113" actId="26606"/>
           <ac:picMkLst>
             <pc:docMk/>
             <pc:sldMk cId="0" sldId="262"/>
@@ -1562,7 +1722,7 @@
           </ac:picMkLst>
         </pc:picChg>
         <pc:picChg chg="mod">
-          <ac:chgData name="Tirthankar Barari (TR)" userId="e41d4ef3-c9c5-4f08-a494-4c3cb9d953aa" providerId="ADAL" clId="{FDA9B3D4-9EE2-49C8-BD6B-D26A18FAF216}" dt="2026-06-08T22:05:00.643" v="37" actId="26606"/>
+          <ac:chgData name="Tirthankar Barari (TR)" userId="e41d4ef3-c9c5-4f08-a494-4c3cb9d953aa" providerId="ADAL" clId="{FDA9B3D4-9EE2-49C8-BD6B-D26A18FAF216}" dt="2026-06-09T15:43:00.380" v="113" actId="26606"/>
           <ac:picMkLst>
             <pc:docMk/>
             <pc:sldMk cId="0" sldId="262"/>
@@ -1570,7 +1730,7 @@
           </ac:picMkLst>
         </pc:picChg>
         <pc:picChg chg="mod">
-          <ac:chgData name="Tirthankar Barari (TR)" userId="e41d4ef3-c9c5-4f08-a494-4c3cb9d953aa" providerId="ADAL" clId="{FDA9B3D4-9EE2-49C8-BD6B-D26A18FAF216}" dt="2026-06-08T22:05:00.643" v="37" actId="26606"/>
+          <ac:chgData name="Tirthankar Barari (TR)" userId="e41d4ef3-c9c5-4f08-a494-4c3cb9d953aa" providerId="ADAL" clId="{FDA9B3D4-9EE2-49C8-BD6B-D26A18FAF216}" dt="2026-06-09T15:43:00.380" v="113" actId="26606"/>
           <ac:picMkLst>
             <pc:docMk/>
             <pc:sldMk cId="0" sldId="262"/>
@@ -1690,12 +1850,20 @@
         </pc:spChg>
       </pc:sldChg>
       <pc:sldChg chg="addSp delSp modSp mod setBg">
-        <pc:chgData name="Tirthankar Barari (TR)" userId="e41d4ef3-c9c5-4f08-a494-4c3cb9d953aa" providerId="ADAL" clId="{FDA9B3D4-9EE2-49C8-BD6B-D26A18FAF216}" dt="2026-06-08T22:05:00.643" v="37" actId="26606"/>
+        <pc:chgData name="Tirthankar Barari (TR)" userId="e41d4ef3-c9c5-4f08-a494-4c3cb9d953aa" providerId="ADAL" clId="{FDA9B3D4-9EE2-49C8-BD6B-D26A18FAF216}" dt="2026-06-09T15:43:00.380" v="113" actId="26606"/>
         <pc:sldMkLst>
           <pc:docMk/>
           <pc:sldMk cId="0" sldId="264"/>
         </pc:sldMkLst>
         <pc:spChg chg="mod">
+          <ac:chgData name="Tirthankar Barari (TR)" userId="e41d4ef3-c9c5-4f08-a494-4c3cb9d953aa" providerId="ADAL" clId="{FDA9B3D4-9EE2-49C8-BD6B-D26A18FAF216}" dt="2026-06-09T15:43:00.380" v="113" actId="26606"/>
+          <ac:spMkLst>
+            <pc:docMk/>
+            <pc:sldMk cId="0" sldId="264"/>
+            <ac:spMk id="3" creationId="{00000000-0000-0000-0000-000000000000}"/>
+          </ac:spMkLst>
+        </pc:spChg>
+        <pc:spChg chg="mod">
           <ac:chgData name="Tirthankar Barari (TR)" userId="e41d4ef3-c9c5-4f08-a494-4c3cb9d953aa" providerId="ADAL" clId="{FDA9B3D4-9EE2-49C8-BD6B-D26A18FAF216}" dt="2026-06-08T20:49:12.088" v="8" actId="26606"/>
           <ac:spMkLst>
             <pc:docMk/>
@@ -1712,6 +1880,22 @@
           </ac:spMkLst>
         </pc:spChg>
         <pc:spChg chg="mod">
+          <ac:chgData name="Tirthankar Barari (TR)" userId="e41d4ef3-c9c5-4f08-a494-4c3cb9d953aa" providerId="ADAL" clId="{FDA9B3D4-9EE2-49C8-BD6B-D26A18FAF216}" dt="2026-06-09T15:19:42.214" v="77" actId="26606"/>
+          <ac:spMkLst>
+            <pc:docMk/>
+            <pc:sldMk cId="0" sldId="264"/>
+            <ac:spMk id="9" creationId="{00000000-0000-0000-0000-000000000000}"/>
+          </ac:spMkLst>
+        </pc:spChg>
+        <pc:spChg chg="mod">
+          <ac:chgData name="Tirthankar Barari (TR)" userId="e41d4ef3-c9c5-4f08-a494-4c3cb9d953aa" providerId="ADAL" clId="{FDA9B3D4-9EE2-49C8-BD6B-D26A18FAF216}" dt="2026-06-09T15:37:37.459" v="102" actId="20577"/>
+          <ac:spMkLst>
+            <pc:docMk/>
+            <pc:sldMk cId="0" sldId="264"/>
+            <ac:spMk id="10" creationId="{00000000-0000-0000-0000-000000000000}"/>
+          </ac:spMkLst>
+        </pc:spChg>
+        <pc:spChg chg="mod">
           <ac:chgData name="Tirthankar Barari (TR)" userId="e41d4ef3-c9c5-4f08-a494-4c3cb9d953aa" providerId="ADAL" clId="{FDA9B3D4-9EE2-49C8-BD6B-D26A18FAF216}" dt="2026-06-08T21:25:35.642" v="33" actId="26606"/>
           <ac:spMkLst>
             <pc:docMk/>
@@ -1728,7 +1912,7 @@
           </ac:spMkLst>
         </pc:spChg>
         <pc:spChg chg="add mod">
-          <ac:chgData name="Tirthankar Barari (TR)" userId="e41d4ef3-c9c5-4f08-a494-4c3cb9d953aa" providerId="ADAL" clId="{FDA9B3D4-9EE2-49C8-BD6B-D26A18FAF216}" dt="2026-06-08T21:25:35.642" v="33" actId="26606"/>
+          <ac:chgData name="Tirthankar Barari (TR)" userId="e41d4ef3-c9c5-4f08-a494-4c3cb9d953aa" providerId="ADAL" clId="{FDA9B3D4-9EE2-49C8-BD6B-D26A18FAF216}" dt="2026-06-09T15:37:49.147" v="106" actId="20577"/>
           <ac:spMkLst>
             <pc:docMk/>
             <pc:sldMk cId="0" sldId="264"/>
@@ -1775,6 +1959,14 @@
             <ac:spMk id="19" creationId="{00000000-0000-0000-0000-000000000000}"/>
           </ac:spMkLst>
         </pc:spChg>
+        <pc:spChg chg="mod">
+          <ac:chgData name="Tirthankar Barari (TR)" userId="e41d4ef3-c9c5-4f08-a494-4c3cb9d953aa" providerId="ADAL" clId="{FDA9B3D4-9EE2-49C8-BD6B-D26A18FAF216}" dt="2026-06-09T15:37:40.510" v="103" actId="20577"/>
+          <ac:spMkLst>
+            <pc:docMk/>
+            <pc:sldMk cId="0" sldId="264"/>
+            <ac:spMk id="20" creationId="{00000000-0000-0000-0000-000000000000}"/>
+          </ac:spMkLst>
+        </pc:spChg>
         <pc:spChg chg="add mod">
           <ac:chgData name="Tirthankar Barari (TR)" userId="e41d4ef3-c9c5-4f08-a494-4c3cb9d953aa" providerId="ADAL" clId="{FDA9B3D4-9EE2-49C8-BD6B-D26A18FAF216}" dt="2026-06-08T21:25:35.642" v="33" actId="26606"/>
           <ac:spMkLst>
@@ -1784,7 +1976,7 @@
           </ac:spMkLst>
         </pc:spChg>
         <pc:spChg chg="add mod">
-          <ac:chgData name="Tirthankar Barari (TR)" userId="e41d4ef3-c9c5-4f08-a494-4c3cb9d953aa" providerId="ADAL" clId="{FDA9B3D4-9EE2-49C8-BD6B-D26A18FAF216}" dt="2026-06-08T20:27:47.019" v="4" actId="26606"/>
+          <ac:chgData name="Tirthankar Barari (TR)" userId="e41d4ef3-c9c5-4f08-a494-4c3cb9d953aa" providerId="ADAL" clId="{FDA9B3D4-9EE2-49C8-BD6B-D26A18FAF216}" dt="2026-06-09T15:19:42.214" v="77" actId="26606"/>
           <ac:spMkLst>
             <pc:docMk/>
             <pc:sldMk cId="0" sldId="264"/>
@@ -1792,7 +1984,7 @@
           </ac:spMkLst>
         </pc:spChg>
         <pc:spChg chg="mod">
-          <ac:chgData name="Tirthankar Barari (TR)" userId="e41d4ef3-c9c5-4f08-a494-4c3cb9d953aa" providerId="ADAL" clId="{FDA9B3D4-9EE2-49C8-BD6B-D26A18FAF216}" dt="2026-06-08T20:49:12.088" v="8" actId="26606"/>
+          <ac:chgData name="Tirthankar Barari (TR)" userId="e41d4ef3-c9c5-4f08-a494-4c3cb9d953aa" providerId="ADAL" clId="{FDA9B3D4-9EE2-49C8-BD6B-D26A18FAF216}" dt="2026-06-09T15:37:52.231" v="107" actId="20577"/>
           <ac:spMkLst>
             <pc:docMk/>
             <pc:sldMk cId="0" sldId="264"/>
@@ -1816,7 +2008,7 @@
           </ac:spMkLst>
         </pc:spChg>
         <pc:spChg chg="mod">
-          <ac:chgData name="Tirthankar Barari (TR)" userId="e41d4ef3-c9c5-4f08-a494-4c3cb9d953aa" providerId="ADAL" clId="{FDA9B3D4-9EE2-49C8-BD6B-D26A18FAF216}" dt="2026-06-08T21:49:42.680" v="35" actId="26606"/>
+          <ac:chgData name="Tirthankar Barari (TR)" userId="e41d4ef3-c9c5-4f08-a494-4c3cb9d953aa" providerId="ADAL" clId="{FDA9B3D4-9EE2-49C8-BD6B-D26A18FAF216}" dt="2026-06-09T15:19:42.214" v="77" actId="26606"/>
           <ac:spMkLst>
             <pc:docMk/>
             <pc:sldMk cId="0" sldId="264"/>
@@ -1831,12 +2023,52 @@
             <ac:spMk id="28" creationId="{00000000-0000-0000-0000-000000000000}"/>
           </ac:spMkLst>
         </pc:spChg>
+        <pc:spChg chg="del mod">
+          <ac:chgData name="Tirthankar Barari (TR)" userId="e41d4ef3-c9c5-4f08-a494-4c3cb9d953aa" providerId="ADAL" clId="{FDA9B3D4-9EE2-49C8-BD6B-D26A18FAF216}" dt="2026-06-09T15:19:42.214" v="77" actId="26606"/>
+          <ac:spMkLst>
+            <pc:docMk/>
+            <pc:sldMk cId="0" sldId="264"/>
+            <ac:spMk id="29" creationId="{00000000-0000-0000-0000-000000000000}"/>
+          </ac:spMkLst>
+        </pc:spChg>
+        <pc:spChg chg="del mod">
+          <ac:chgData name="Tirthankar Barari (TR)" userId="e41d4ef3-c9c5-4f08-a494-4c3cb9d953aa" providerId="ADAL" clId="{FDA9B3D4-9EE2-49C8-BD6B-D26A18FAF216}" dt="2026-06-09T15:37:43.024" v="104" actId="20577"/>
+          <ac:spMkLst>
+            <pc:docMk/>
+            <pc:sldMk cId="0" sldId="264"/>
+            <ac:spMk id="30" creationId="{00000000-0000-0000-0000-000000000000}"/>
+          </ac:spMkLst>
+        </pc:spChg>
+        <pc:spChg chg="mod">
+          <ac:chgData name="Tirthankar Barari (TR)" userId="e41d4ef3-c9c5-4f08-a494-4c3cb9d953aa" providerId="ADAL" clId="{FDA9B3D4-9EE2-49C8-BD6B-D26A18FAF216}" dt="2026-06-08T20:49:12.088" v="8" actId="26606"/>
+          <ac:spMkLst>
+            <pc:docMk/>
+            <pc:sldMk cId="0" sldId="264"/>
+            <ac:spMk id="31" creationId="{00000000-0000-0000-0000-000000000000}"/>
+          </ac:spMkLst>
+        </pc:spChg>
+        <pc:spChg chg="add del mod">
+          <ac:chgData name="Tirthankar Barari (TR)" userId="e41d4ef3-c9c5-4f08-a494-4c3cb9d953aa" providerId="ADAL" clId="{FDA9B3D4-9EE2-49C8-BD6B-D26A18FAF216}" dt="2026-06-09T15:19:42.214" v="77" actId="26606"/>
+          <ac:spMkLst>
+            <pc:docMk/>
+            <pc:sldMk cId="0" sldId="264"/>
+            <ac:spMk id="32" creationId="{00000000-0000-0000-0000-000000000000}"/>
+          </ac:spMkLst>
+        </pc:spChg>
+        <pc:spChg chg="add mod">
+          <ac:chgData name="Tirthankar Barari (TR)" userId="e41d4ef3-c9c5-4f08-a494-4c3cb9d953aa" providerId="ADAL" clId="{FDA9B3D4-9EE2-49C8-BD6B-D26A18FAF216}" dt="2026-06-09T15:37:55.634" v="108" actId="20577"/>
+          <ac:spMkLst>
+            <pc:docMk/>
+            <pc:sldMk cId="0" sldId="264"/>
+            <ac:spMk id="33" creationId="{00000000-0000-0000-0000-000000000000}"/>
+          </ac:spMkLst>
+        </pc:spChg>
         <pc:spChg chg="del">
           <ac:chgData name="Tirthankar Barari (TR)" userId="e41d4ef3-c9c5-4f08-a494-4c3cb9d953aa" providerId="ADAL" clId="{FDA9B3D4-9EE2-49C8-BD6B-D26A18FAF216}" dt="2026-06-08T20:21:21.835" v="3" actId="26606"/>
           <ac:spMkLst>
             <pc:docMk/>
             <pc:sldMk cId="0" sldId="264"/>
-            <ac:spMk id="29" creationId="{00000000-0000-0000-0000-000000000000}"/>
+            <ac:spMk id="34" creationId="{00000000-0000-0000-0000-000000000000}"/>
           </ac:spMkLst>
         </pc:spChg>
         <pc:spChg chg="del">
@@ -1844,23 +2076,55 @@
           <ac:spMkLst>
             <pc:docMk/>
             <pc:sldMk cId="0" sldId="264"/>
-            <ac:spMk id="30" creationId="{00000000-0000-0000-0000-000000000000}"/>
+            <ac:spMk id="36" creationId="{00000000-0000-0000-0000-000000000000}"/>
           </ac:spMkLst>
         </pc:spChg>
         <pc:spChg chg="mod">
-          <ac:chgData name="Tirthankar Barari (TR)" userId="e41d4ef3-c9c5-4f08-a494-4c3cb9d953aa" providerId="ADAL" clId="{FDA9B3D4-9EE2-49C8-BD6B-D26A18FAF216}" dt="2026-06-08T20:49:12.088" v="8" actId="26606"/>
+          <ac:chgData name="Tirthankar Barari (TR)" userId="e41d4ef3-c9c5-4f08-a494-4c3cb9d953aa" providerId="ADAL" clId="{FDA9B3D4-9EE2-49C8-BD6B-D26A18FAF216}" dt="2026-06-09T15:19:42.214" v="77" actId="26606"/>
           <ac:spMkLst>
             <pc:docMk/>
             <pc:sldMk cId="0" sldId="264"/>
-            <ac:spMk id="31" creationId="{00000000-0000-0000-0000-000000000000}"/>
-          </ac:spMkLst>
-        </pc:spChg>
-        <pc:spChg chg="add del mod">
-          <ac:chgData name="Tirthankar Barari (TR)" userId="e41d4ef3-c9c5-4f08-a494-4c3cb9d953aa" providerId="ADAL" clId="{FDA9B3D4-9EE2-49C8-BD6B-D26A18FAF216}" dt="2026-06-08T20:27:47.019" v="4" actId="26606"/>
+            <ac:spMk id="37" creationId="{00000000-0000-0000-0000-000000000000}"/>
+          </ac:spMkLst>
+        </pc:spChg>
+        <pc:spChg chg="mod">
+          <ac:chgData name="Tirthankar Barari (TR)" userId="e41d4ef3-c9c5-4f08-a494-4c3cb9d953aa" providerId="ADAL" clId="{FDA9B3D4-9EE2-49C8-BD6B-D26A18FAF216}" dt="2026-06-09T15:37:46.072" v="105" actId="20577"/>
           <ac:spMkLst>
             <pc:docMk/>
             <pc:sldMk cId="0" sldId="264"/>
-            <ac:spMk id="32" creationId="{00000000-0000-0000-0000-000000000000}"/>
+            <ac:spMk id="40" creationId="{00000000-0000-0000-0000-000000000000}"/>
+          </ac:spMkLst>
+        </pc:spChg>
+        <pc:spChg chg="mod">
+          <ac:chgData name="Tirthankar Barari (TR)" userId="e41d4ef3-c9c5-4f08-a494-4c3cb9d953aa" providerId="ADAL" clId="{FDA9B3D4-9EE2-49C8-BD6B-D26A18FAF216}" dt="2026-06-08T21:25:35.642" v="33" actId="26606"/>
+          <ac:spMkLst>
+            <pc:docMk/>
+            <pc:sldMk cId="0" sldId="264"/>
+            <ac:spMk id="41" creationId="{00000000-0000-0000-0000-000000000000}"/>
+          </ac:spMkLst>
+        </pc:spChg>
+        <pc:spChg chg="del mod">
+          <ac:chgData name="Tirthankar Barari (TR)" userId="e41d4ef3-c9c5-4f08-a494-4c3cb9d953aa" providerId="ADAL" clId="{FDA9B3D4-9EE2-49C8-BD6B-D26A18FAF216}" dt="2026-06-09T15:19:42.214" v="77" actId="26606"/>
+          <ac:spMkLst>
+            <pc:docMk/>
+            <pc:sldMk cId="0" sldId="264"/>
+            <ac:spMk id="42" creationId="{00000000-0000-0000-0000-000000000000}"/>
+          </ac:spMkLst>
+        </pc:spChg>
+        <pc:spChg chg="mod">
+          <ac:chgData name="Tirthankar Barari (TR)" userId="e41d4ef3-c9c5-4f08-a494-4c3cb9d953aa" providerId="ADAL" clId="{FDA9B3D4-9EE2-49C8-BD6B-D26A18FAF216}" dt="2026-06-09T15:37:58.495" v="109" actId="20577"/>
+          <ac:spMkLst>
+            <pc:docMk/>
+            <pc:sldMk cId="0" sldId="264"/>
+            <ac:spMk id="43" creationId="{00000000-0000-0000-0000-000000000000}"/>
+          </ac:spMkLst>
+        </pc:spChg>
+        <pc:spChg chg="del mod">
+          <ac:chgData name="Tirthankar Barari (TR)" userId="e41d4ef3-c9c5-4f08-a494-4c3cb9d953aa" providerId="ADAL" clId="{FDA9B3D4-9EE2-49C8-BD6B-D26A18FAF216}" dt="2026-06-09T15:38:06.052" v="110" actId="14100"/>
+          <ac:spMkLst>
+            <pc:docMk/>
+            <pc:sldMk cId="0" sldId="264"/>
+            <ac:spMk id="44" creationId="{00000000-0000-0000-0000-000000000000}"/>
           </ac:spMkLst>
         </pc:spChg>
         <pc:spChg chg="add mod">
@@ -1868,67 +2132,11 @@
           <ac:spMkLst>
             <pc:docMk/>
             <pc:sldMk cId="0" sldId="264"/>
-            <ac:spMk id="33" creationId="{00000000-0000-0000-0000-000000000000}"/>
-          </ac:spMkLst>
-        </pc:spChg>
-        <pc:spChg chg="del">
-          <ac:chgData name="Tirthankar Barari (TR)" userId="e41d4ef3-c9c5-4f08-a494-4c3cb9d953aa" providerId="ADAL" clId="{FDA9B3D4-9EE2-49C8-BD6B-D26A18FAF216}" dt="2026-06-08T20:21:21.835" v="3" actId="26606"/>
-          <ac:spMkLst>
-            <pc:docMk/>
-            <pc:sldMk cId="0" sldId="264"/>
-            <ac:spMk id="34" creationId="{00000000-0000-0000-0000-000000000000}"/>
-          </ac:spMkLst>
-        </pc:spChg>
-        <pc:spChg chg="del">
-          <ac:chgData name="Tirthankar Barari (TR)" userId="e41d4ef3-c9c5-4f08-a494-4c3cb9d953aa" providerId="ADAL" clId="{FDA9B3D4-9EE2-49C8-BD6B-D26A18FAF216}" dt="2026-06-08T20:21:21.835" v="3" actId="26606"/>
-          <ac:spMkLst>
-            <pc:docMk/>
-            <pc:sldMk cId="0" sldId="264"/>
-            <ac:spMk id="36" creationId="{00000000-0000-0000-0000-000000000000}"/>
-          </ac:spMkLst>
-        </pc:spChg>
-        <pc:spChg chg="mod">
-          <ac:chgData name="Tirthankar Barari (TR)" userId="e41d4ef3-c9c5-4f08-a494-4c3cb9d953aa" providerId="ADAL" clId="{FDA9B3D4-9EE2-49C8-BD6B-D26A18FAF216}" dt="2026-06-08T21:49:42.680" v="35" actId="26606"/>
-          <ac:spMkLst>
-            <pc:docMk/>
-            <pc:sldMk cId="0" sldId="264"/>
-            <ac:spMk id="37" creationId="{00000000-0000-0000-0000-000000000000}"/>
-          </ac:spMkLst>
-        </pc:spChg>
-        <pc:spChg chg="mod">
-          <ac:chgData name="Tirthankar Barari (TR)" userId="e41d4ef3-c9c5-4f08-a494-4c3cb9d953aa" providerId="ADAL" clId="{FDA9B3D4-9EE2-49C8-BD6B-D26A18FAF216}" dt="2026-06-08T21:25:35.642" v="33" actId="26606"/>
-          <ac:spMkLst>
-            <pc:docMk/>
-            <pc:sldMk cId="0" sldId="264"/>
-            <ac:spMk id="41" creationId="{00000000-0000-0000-0000-000000000000}"/>
+            <ac:spMk id="45" creationId="{00000000-0000-0000-0000-000000000000}"/>
           </ac:spMkLst>
         </pc:spChg>
         <pc:spChg chg="del mod">
-          <ac:chgData name="Tirthankar Barari (TR)" userId="e41d4ef3-c9c5-4f08-a494-4c3cb9d953aa" providerId="ADAL" clId="{FDA9B3D4-9EE2-49C8-BD6B-D26A18FAF216}" dt="2026-06-08T20:21:21.835" v="3" actId="26606"/>
-          <ac:spMkLst>
-            <pc:docMk/>
-            <pc:sldMk cId="0" sldId="264"/>
-            <ac:spMk id="42" creationId="{00000000-0000-0000-0000-000000000000}"/>
-          </ac:spMkLst>
-        </pc:spChg>
-        <pc:spChg chg="del">
-          <ac:chgData name="Tirthankar Barari (TR)" userId="e41d4ef3-c9c5-4f08-a494-4c3cb9d953aa" providerId="ADAL" clId="{FDA9B3D4-9EE2-49C8-BD6B-D26A18FAF216}" dt="2026-06-08T20:21:21.835" v="3" actId="26606"/>
-          <ac:spMkLst>
-            <pc:docMk/>
-            <pc:sldMk cId="0" sldId="264"/>
-            <ac:spMk id="44" creationId="{00000000-0000-0000-0000-000000000000}"/>
-          </ac:spMkLst>
-        </pc:spChg>
-        <pc:spChg chg="add mod">
-          <ac:chgData name="Tirthankar Barari (TR)" userId="e41d4ef3-c9c5-4f08-a494-4c3cb9d953aa" providerId="ADAL" clId="{FDA9B3D4-9EE2-49C8-BD6B-D26A18FAF216}" dt="2026-06-08T21:25:35.642" v="33" actId="26606"/>
-          <ac:spMkLst>
-            <pc:docMk/>
-            <pc:sldMk cId="0" sldId="264"/>
-            <ac:spMk id="45" creationId="{00000000-0000-0000-0000-000000000000}"/>
-          </ac:spMkLst>
-        </pc:spChg>
-        <pc:spChg chg="del mod">
-          <ac:chgData name="Tirthankar Barari (TR)" userId="e41d4ef3-c9c5-4f08-a494-4c3cb9d953aa" providerId="ADAL" clId="{FDA9B3D4-9EE2-49C8-BD6B-D26A18FAF216}" dt="2026-06-08T20:39:10.818" v="6" actId="26606"/>
+          <ac:chgData name="Tirthankar Barari (TR)" userId="e41d4ef3-c9c5-4f08-a494-4c3cb9d953aa" providerId="ADAL" clId="{FDA9B3D4-9EE2-49C8-BD6B-D26A18FAF216}" dt="2026-06-09T15:38:17.243" v="112" actId="1076"/>
           <ac:spMkLst>
             <pc:docMk/>
             <pc:sldMk cId="0" sldId="264"/>
@@ -1984,7 +2192,7 @@
           </ac:spMkLst>
         </pc:spChg>
         <pc:picChg chg="mod">
-          <ac:chgData name="Tirthankar Barari (TR)" userId="e41d4ef3-c9c5-4f08-a494-4c3cb9d953aa" providerId="ADAL" clId="{FDA9B3D4-9EE2-49C8-BD6B-D26A18FAF216}" dt="2026-06-08T22:05:00.643" v="37" actId="26606"/>
+          <ac:chgData name="Tirthankar Barari (TR)" userId="e41d4ef3-c9c5-4f08-a494-4c3cb9d953aa" providerId="ADAL" clId="{FDA9B3D4-9EE2-49C8-BD6B-D26A18FAF216}" dt="2026-06-09T15:43:00.380" v="113" actId="26606"/>
           <ac:picMkLst>
             <pc:docMk/>
             <pc:sldMk cId="0" sldId="264"/>
@@ -1992,7 +2200,7 @@
           </ac:picMkLst>
         </pc:picChg>
         <pc:picChg chg="mod">
-          <ac:chgData name="Tirthankar Barari (TR)" userId="e41d4ef3-c9c5-4f08-a494-4c3cb9d953aa" providerId="ADAL" clId="{FDA9B3D4-9EE2-49C8-BD6B-D26A18FAF216}" dt="2026-06-08T22:05:00.643" v="37" actId="26606"/>
+          <ac:chgData name="Tirthankar Barari (TR)" userId="e41d4ef3-c9c5-4f08-a494-4c3cb9d953aa" providerId="ADAL" clId="{FDA9B3D4-9EE2-49C8-BD6B-D26A18FAF216}" dt="2026-06-09T15:43:00.380" v="113" actId="26606"/>
           <ac:picMkLst>
             <pc:docMk/>
             <pc:sldMk cId="0" sldId="264"/>
@@ -2000,7 +2208,7 @@
           </ac:picMkLst>
         </pc:picChg>
         <pc:picChg chg="mod">
-          <ac:chgData name="Tirthankar Barari (TR)" userId="e41d4ef3-c9c5-4f08-a494-4c3cb9d953aa" providerId="ADAL" clId="{FDA9B3D4-9EE2-49C8-BD6B-D26A18FAF216}" dt="2026-06-08T22:05:00.643" v="37" actId="26606"/>
+          <ac:chgData name="Tirthankar Barari (TR)" userId="e41d4ef3-c9c5-4f08-a494-4c3cb9d953aa" providerId="ADAL" clId="{FDA9B3D4-9EE2-49C8-BD6B-D26A18FAF216}" dt="2026-06-09T15:43:00.380" v="113" actId="26606"/>
           <ac:picMkLst>
             <pc:docMk/>
             <pc:sldMk cId="0" sldId="264"/>
@@ -2008,7 +2216,7 @@
           </ac:picMkLst>
         </pc:picChg>
         <pc:picChg chg="mod">
-          <ac:chgData name="Tirthankar Barari (TR)" userId="e41d4ef3-c9c5-4f08-a494-4c3cb9d953aa" providerId="ADAL" clId="{FDA9B3D4-9EE2-49C8-BD6B-D26A18FAF216}" dt="2026-06-08T22:05:00.643" v="37" actId="26606"/>
+          <ac:chgData name="Tirthankar Barari (TR)" userId="e41d4ef3-c9c5-4f08-a494-4c3cb9d953aa" providerId="ADAL" clId="{FDA9B3D4-9EE2-49C8-BD6B-D26A18FAF216}" dt="2026-06-09T15:43:00.380" v="113" actId="26606"/>
           <ac:picMkLst>
             <pc:docMk/>
             <pc:sldMk cId="0" sldId="264"/>
@@ -3743,14 +3951,14 @@
               <a:buNone/>
             </a:pPr>
             <a:r>
-              <a:rPr lang="en-US" sz="2400" b="1">
+              <a:rPr lang="en-US" sz="2400" b="1" dirty="0">
                 <a:solidFill>
                   <a:srgbClr val="FFFFFF"/>
                 </a:solidFill>
               </a:rPr>
               <a:t>Personal Lines Carrier</a:t>
             </a:r>
-            <a:endParaRPr lang="en-US" sz="2400"/>
+            <a:endParaRPr lang="en-US" sz="2400" dirty="0"/>
           </a:p>
         </p:txBody>
       </p:sp>
@@ -3779,14 +3987,14 @@
               <a:buNone/>
             </a:pPr>
             <a:r>
-              <a:rPr lang="en-US" sz="1000">
+              <a:rPr lang="en-US" sz="1200" dirty="0">
                 <a:solidFill>
                   <a:srgbClr val="8899AA"/>
                 </a:solidFill>
               </a:rPr>
               <a:t>Personal Auto Claims During Catastrophe Surge | Challenge-first process transformation</a:t>
             </a:r>
-            <a:endParaRPr lang="en-US" sz="1000"/>
+            <a:endParaRPr lang="en-US" sz="1200" dirty="0"/>
           </a:p>
         </p:txBody>
       </p:sp>
@@ -4004,6 +4212,16 @@
             <a:pPr marL="228600" indent="-228600">
               <a:buChar char="•"/>
             </a:pPr>
+            <a:endParaRPr lang="en-US" sz="1200" baseline="30000" dirty="0">
+              <a:solidFill>
+                <a:srgbClr val="2EC4B6"/>
+              </a:solidFill>
+            </a:endParaRPr>
+          </a:p>
+          <a:p>
+            <a:pPr marL="228600" indent="-228600">
+              <a:buChar char="•"/>
+            </a:pPr>
             <a:r>
               <a:rPr lang="en-US" sz="1200" b="1" dirty="0">
                 <a:solidFill>
@@ -4028,6 +4246,16 @@
               </a:rPr>
               <a:t>[2]</a:t>
             </a:r>
+          </a:p>
+          <a:p>
+            <a:pPr marL="228600" indent="-228600">
+              <a:buChar char="•"/>
+            </a:pPr>
+            <a:endParaRPr lang="en-US" sz="1200" baseline="30000" dirty="0">
+              <a:solidFill>
+                <a:srgbClr val="2EC4B6"/>
+              </a:solidFill>
+            </a:endParaRPr>
           </a:p>
           <a:p>
             <a:pPr marL="228600" indent="-228600">
@@ -4280,14 +4508,14 @@
               <a:buNone/>
             </a:pPr>
             <a:r>
-              <a:rPr lang="en-US" sz="2400" b="1">
+              <a:rPr lang="en-US" sz="2200" b="1">
                 <a:solidFill>
                   <a:srgbClr val="FFFFFF"/>
                 </a:solidFill>
               </a:rPr>
               <a:t>Personal Lines Carrier Process Flow</a:t>
             </a:r>
-            <a:endParaRPr lang="en-US" sz="2400"/>
+            <a:endParaRPr lang="en-US" sz="2200"/>
           </a:p>
         </p:txBody>
       </p:sp>
@@ -4316,14 +4544,14 @@
               <a:buNone/>
             </a:pPr>
             <a:r>
-              <a:rPr lang="en-US" sz="1000">
+              <a:rPr lang="en-US" sz="1200" dirty="0">
                 <a:solidFill>
                   <a:srgbClr val="D6E4EA"/>
                 </a:solidFill>
               </a:rPr>
               <a:t>Personal Auto Claims During Catastrophe Surge | Where the accelerator resolves stage-specific challenges</a:t>
             </a:r>
-            <a:endParaRPr lang="en-US" sz="1000"/>
+            <a:endParaRPr lang="en-US" sz="1200" dirty="0"/>
           </a:p>
         </p:txBody>
       </p:sp>
@@ -4418,14 +4646,14 @@
               <a:buNone/>
             </a:pPr>
             <a:r>
-              <a:rPr lang="en-US" sz="1200" b="1">
+              <a:rPr lang="en-US" sz="1400" b="1" dirty="0">
                 <a:solidFill>
                   <a:srgbClr val="E8ECF0"/>
                 </a:solidFill>
               </a:rPr>
               <a:t>1. FNOL Intake</a:t>
             </a:r>
-            <a:endParaRPr lang="en-US" sz="1200"/>
+            <a:endParaRPr lang="en-US" sz="1400" dirty="0"/>
           </a:p>
         </p:txBody>
       </p:sp>
@@ -4488,14 +4716,14 @@
               <a:buNone/>
             </a:pPr>
             <a:r>
-              <a:rPr lang="en-US" sz="1000" b="1">
+              <a:rPr lang="en-US" sz="1400" b="1" dirty="0">
                 <a:solidFill>
                   <a:srgbClr val="E76F51"/>
                 </a:solidFill>
               </a:rPr>
               <a:t>Business challenge</a:t>
             </a:r>
-            <a:endParaRPr lang="en-US" sz="1000"/>
+            <a:endParaRPr lang="en-US" sz="1400" dirty="0"/>
           </a:p>
         </p:txBody>
       </p:sp>
@@ -4523,15 +4751,25 @@
             <a:pPr marL="0" indent="0">
               <a:buNone/>
             </a:pPr>
-            <a:r>
-              <a:rPr lang="en-US" sz="1000">
+            <a:endParaRPr lang="en-US" sz="1200" dirty="0">
+              <a:solidFill>
+                <a:srgbClr val="D4A088"/>
+              </a:solidFill>
+            </a:endParaRPr>
+          </a:p>
+          <a:p>
+            <a:pPr marL="0" indent="0">
+              <a:buNone/>
+            </a:pPr>
+            <a:r>
+              <a:rPr lang="en-US" sz="1200" dirty="0">
                 <a:solidFill>
                   <a:srgbClr val="D4A088"/>
                 </a:solidFill>
               </a:rPr>
               <a:t>Thousands of mixed-format submissions create queue bottlenecks.</a:t>
             </a:r>
-            <a:endParaRPr lang="en-US" sz="1000"/>
+            <a:endParaRPr lang="en-US" sz="1200" dirty="0"/>
           </a:p>
         </p:txBody>
       </p:sp>
@@ -4594,14 +4832,14 @@
               <a:buNone/>
             </a:pPr>
             <a:r>
-              <a:rPr lang="en-US" sz="1000" b="1">
+              <a:rPr lang="en-US" sz="1400" b="1" dirty="0">
                 <a:solidFill>
                   <a:srgbClr val="2EC4B6"/>
                 </a:solidFill>
               </a:rPr>
               <a:t>Accelerator intervention</a:t>
             </a:r>
-            <a:endParaRPr lang="en-US" sz="1000"/>
+            <a:endParaRPr lang="en-US" sz="1400" dirty="0"/>
           </a:p>
         </p:txBody>
       </p:sp>
@@ -4629,15 +4867,25 @@
             <a:pPr marL="0" indent="0">
               <a:buNone/>
             </a:pPr>
-            <a:r>
-              <a:rPr lang="en-US" sz="1000">
+            <a:endParaRPr lang="en-US" sz="1200" dirty="0">
+              <a:solidFill>
+                <a:srgbClr val="7CCFC5"/>
+              </a:solidFill>
+            </a:endParaRPr>
+          </a:p>
+          <a:p>
+            <a:pPr marL="0" indent="0">
+              <a:buNone/>
+            </a:pPr>
+            <a:r>
+              <a:rPr lang="en-US" sz="1200" dirty="0">
                 <a:solidFill>
                   <a:srgbClr val="7CCFC5"/>
                 </a:solidFill>
               </a:rPr>
               <a:t>Auto-ingest and classify emails, photos, and forms into claim families.</a:t>
             </a:r>
-            <a:endParaRPr lang="en-US" sz="1000" dirty="0"/>
+            <a:endParaRPr lang="en-US" sz="1200" dirty="0"/>
           </a:p>
         </p:txBody>
       </p:sp>
@@ -4764,14 +5012,14 @@
               <a:buNone/>
             </a:pPr>
             <a:r>
-              <a:rPr lang="en-US" sz="1200" b="1">
+              <a:rPr lang="en-US" sz="1400" b="1" dirty="0">
                 <a:solidFill>
                   <a:srgbClr val="E8ECF0"/>
                 </a:solidFill>
               </a:rPr>
               <a:t>2. Coverage Triage</a:t>
             </a:r>
-            <a:endParaRPr lang="en-US" sz="1200"/>
+            <a:endParaRPr lang="en-US" sz="1400" dirty="0"/>
           </a:p>
         </p:txBody>
       </p:sp>
@@ -4834,14 +5082,14 @@
               <a:buNone/>
             </a:pPr>
             <a:r>
-              <a:rPr lang="en-US" sz="1000" b="1">
+              <a:rPr lang="en-US" sz="1400" b="1" dirty="0">
                 <a:solidFill>
                   <a:srgbClr val="E76F51"/>
                 </a:solidFill>
               </a:rPr>
               <a:t>Business challenge</a:t>
             </a:r>
-            <a:endParaRPr lang="en-US" sz="1000"/>
+            <a:endParaRPr lang="en-US" sz="1400" dirty="0"/>
           </a:p>
         </p:txBody>
       </p:sp>
@@ -4869,15 +5117,25 @@
             <a:pPr marL="0" indent="0">
               <a:buNone/>
             </a:pPr>
-            <a:r>
-              <a:rPr lang="en-US" sz="1000">
+            <a:endParaRPr lang="en-US" sz="1200" dirty="0">
+              <a:solidFill>
+                <a:srgbClr val="D4A088"/>
+              </a:solidFill>
+            </a:endParaRPr>
+          </a:p>
+          <a:p>
+            <a:pPr marL="0" indent="0">
+              <a:buNone/>
+            </a:pPr>
+            <a:r>
+              <a:rPr lang="en-US" sz="1200" dirty="0">
                 <a:solidFill>
                   <a:srgbClr val="D4A088"/>
                 </a:solidFill>
               </a:rPr>
               <a:t>Incomplete documentation delays early decisions.</a:t>
             </a:r>
-            <a:endParaRPr lang="en-US" sz="1000"/>
+            <a:endParaRPr lang="en-US" sz="1200" dirty="0"/>
           </a:p>
         </p:txBody>
       </p:sp>
@@ -4940,14 +5198,14 @@
               <a:buNone/>
             </a:pPr>
             <a:r>
-              <a:rPr lang="en-US" sz="1000" b="1">
+              <a:rPr lang="en-US" sz="1400" b="1" dirty="0">
                 <a:solidFill>
                   <a:srgbClr val="2EC4B6"/>
                 </a:solidFill>
               </a:rPr>
               <a:t>Accelerator intervention</a:t>
             </a:r>
-            <a:endParaRPr lang="en-US" sz="1000"/>
+            <a:endParaRPr lang="en-US" sz="1400" dirty="0"/>
           </a:p>
         </p:txBody>
       </p:sp>
@@ -4975,15 +5233,25 @@
             <a:pPr marL="0" indent="0">
               <a:buNone/>
             </a:pPr>
-            <a:r>
-              <a:rPr lang="en-US" sz="1000">
+            <a:endParaRPr lang="en-US" sz="1200" dirty="0">
+              <a:solidFill>
+                <a:srgbClr val="7CCFC5"/>
+              </a:solidFill>
+            </a:endParaRPr>
+          </a:p>
+          <a:p>
+            <a:pPr marL="0" indent="0">
+              <a:buNone/>
+            </a:pPr>
+            <a:r>
+              <a:rPr lang="en-US" sz="1200" dirty="0">
                 <a:solidFill>
                   <a:srgbClr val="7CCFC5"/>
                 </a:solidFill>
               </a:rPr>
               <a:t>Completeness scoring and missing-document alerts at first touch.</a:t>
             </a:r>
-            <a:endParaRPr lang="en-US" sz="1000"/>
+            <a:endParaRPr lang="en-US" sz="1200" dirty="0"/>
           </a:p>
         </p:txBody>
       </p:sp>
@@ -5110,14 +5378,14 @@
               <a:buNone/>
             </a:pPr>
             <a:r>
-              <a:rPr lang="en-US" sz="1200" b="1">
+              <a:rPr lang="en-US" sz="1400" b="1" dirty="0">
                 <a:solidFill>
                   <a:srgbClr val="E8ECF0"/>
                 </a:solidFill>
               </a:rPr>
               <a:t>3. Assessment</a:t>
             </a:r>
-            <a:endParaRPr lang="en-US" sz="1200"/>
+            <a:endParaRPr lang="en-US" sz="1400" dirty="0"/>
           </a:p>
         </p:txBody>
       </p:sp>
@@ -5180,14 +5448,14 @@
               <a:buNone/>
             </a:pPr>
             <a:r>
-              <a:rPr lang="en-US" sz="1000" b="1">
+              <a:rPr lang="en-US" sz="1400" b="1" dirty="0">
                 <a:solidFill>
                   <a:srgbClr val="E76F51"/>
                 </a:solidFill>
               </a:rPr>
               <a:t>Business challenge</a:t>
             </a:r>
-            <a:endParaRPr lang="en-US" sz="1000"/>
+            <a:endParaRPr lang="en-US" sz="1400" dirty="0"/>
           </a:p>
         </p:txBody>
       </p:sp>
@@ -5215,15 +5483,25 @@
             <a:pPr marL="0" indent="0">
               <a:buNone/>
             </a:pPr>
-            <a:r>
-              <a:rPr lang="en-US" sz="1000">
+            <a:endParaRPr lang="en-US" sz="1200" dirty="0">
+              <a:solidFill>
+                <a:srgbClr val="D4A088"/>
+              </a:solidFill>
+            </a:endParaRPr>
+          </a:p>
+          <a:p>
+            <a:pPr marL="0" indent="0">
+              <a:buNone/>
+            </a:pPr>
+            <a:r>
+              <a:rPr lang="en-US" sz="1200" dirty="0">
                 <a:solidFill>
                   <a:srgbClr val="D4A088"/>
                 </a:solidFill>
               </a:rPr>
               <a:t>Adjusters rebuild chronology manually.</a:t>
             </a:r>
-            <a:endParaRPr lang="en-US" sz="1000"/>
+            <a:endParaRPr lang="en-US" sz="1200" dirty="0"/>
           </a:p>
         </p:txBody>
       </p:sp>
@@ -5286,14 +5564,14 @@
               <a:buNone/>
             </a:pPr>
             <a:r>
-              <a:rPr lang="en-US" sz="1000" b="1">
+              <a:rPr lang="en-US" sz="1400" b="1" dirty="0">
                 <a:solidFill>
                   <a:srgbClr val="2EC4B6"/>
                 </a:solidFill>
               </a:rPr>
               <a:t>Accelerator intervention</a:t>
             </a:r>
-            <a:endParaRPr lang="en-US" sz="1000"/>
+            <a:endParaRPr lang="en-US" sz="1400" dirty="0"/>
           </a:p>
         </p:txBody>
       </p:sp>
@@ -5321,15 +5599,25 @@
             <a:pPr marL="0" indent="0">
               <a:buNone/>
             </a:pPr>
-            <a:r>
-              <a:rPr lang="en-US" sz="1000">
+            <a:endParaRPr lang="en-US" sz="1200" dirty="0">
+              <a:solidFill>
+                <a:srgbClr val="7CCFC5"/>
+              </a:solidFill>
+            </a:endParaRPr>
+          </a:p>
+          <a:p>
+            <a:pPr marL="0" indent="0">
+              <a:buNone/>
+            </a:pPr>
+            <a:r>
+              <a:rPr lang="en-US" sz="1200" dirty="0">
                 <a:solidFill>
                   <a:srgbClr val="7CCFC5"/>
                 </a:solidFill>
               </a:rPr>
               <a:t>Prebuilt evidence timeline and anomaly highlights.</a:t>
             </a:r>
-            <a:endParaRPr lang="en-US" sz="1000"/>
+            <a:endParaRPr lang="en-US" sz="1200" dirty="0"/>
           </a:p>
         </p:txBody>
       </p:sp>
@@ -5456,14 +5744,14 @@
               <a:buNone/>
             </a:pPr>
             <a:r>
-              <a:rPr lang="en-US" sz="1200" b="1">
+              <a:rPr lang="en-US" sz="1400" b="1" dirty="0">
                 <a:solidFill>
                   <a:srgbClr val="E8ECF0"/>
                 </a:solidFill>
               </a:rPr>
               <a:t>4. Settlement</a:t>
             </a:r>
-            <a:endParaRPr lang="en-US" sz="1200"/>
+            <a:endParaRPr lang="en-US" sz="1400" dirty="0"/>
           </a:p>
         </p:txBody>
       </p:sp>
@@ -5526,14 +5814,14 @@
               <a:buNone/>
             </a:pPr>
             <a:r>
-              <a:rPr lang="en-US" sz="1000" b="1">
+              <a:rPr lang="en-US" sz="1400" b="1" dirty="0">
                 <a:solidFill>
                   <a:srgbClr val="E76F51"/>
                 </a:solidFill>
               </a:rPr>
               <a:t>Business challenge</a:t>
             </a:r>
-            <a:endParaRPr lang="en-US" sz="1000"/>
+            <a:endParaRPr lang="en-US" sz="1400" dirty="0"/>
           </a:p>
         </p:txBody>
       </p:sp>
@@ -5561,15 +5849,25 @@
             <a:pPr marL="0" indent="0">
               <a:buNone/>
             </a:pPr>
-            <a:r>
-              <a:rPr lang="en-US" sz="1000">
+            <a:endParaRPr lang="en-US" sz="1200" dirty="0">
+              <a:solidFill>
+                <a:srgbClr val="D4A088"/>
+              </a:solidFill>
+            </a:endParaRPr>
+          </a:p>
+          <a:p>
+            <a:pPr marL="0" indent="0">
+              <a:buNone/>
+            </a:pPr>
+            <a:r>
+              <a:rPr lang="en-US" sz="1200" dirty="0">
                 <a:solidFill>
                   <a:srgbClr val="D4A088"/>
                 </a:solidFill>
               </a:rPr>
               <a:t>Inconsistent communication drives repeat calls.</a:t>
             </a:r>
-            <a:endParaRPr lang="en-US" sz="1000"/>
+            <a:endParaRPr lang="en-US" sz="1200" dirty="0"/>
           </a:p>
         </p:txBody>
       </p:sp>
@@ -5632,14 +5930,14 @@
               <a:buNone/>
             </a:pPr>
             <a:r>
-              <a:rPr lang="en-US" sz="1000" b="1">
+              <a:rPr lang="en-US" sz="1400" b="1" dirty="0">
                 <a:solidFill>
                   <a:srgbClr val="2EC4B6"/>
                 </a:solidFill>
               </a:rPr>
               <a:t>Accelerator intervention</a:t>
             </a:r>
-            <a:endParaRPr lang="en-US" sz="1000"/>
+            <a:endParaRPr lang="en-US" sz="1400" dirty="0"/>
           </a:p>
         </p:txBody>
       </p:sp>
@@ -5667,15 +5965,25 @@
             <a:pPr marL="0" indent="0">
               <a:buNone/>
             </a:pPr>
-            <a:r>
-              <a:rPr lang="en-US" sz="1000">
+            <a:endParaRPr lang="en-US" sz="1200" dirty="0">
+              <a:solidFill>
+                <a:srgbClr val="7CCFC5"/>
+              </a:solidFill>
+            </a:endParaRPr>
+          </a:p>
+          <a:p>
+            <a:pPr marL="0" indent="0">
+              <a:buNone/>
+            </a:pPr>
+            <a:r>
+              <a:rPr lang="en-US" sz="1200" dirty="0">
                 <a:solidFill>
                   <a:srgbClr val="7CCFC5"/>
                 </a:solidFill>
               </a:rPr>
               <a:t>Unified interaction timeline and action prompts for next best step.</a:t>
             </a:r>
-            <a:endParaRPr lang="en-US" sz="1000"/>
+            <a:endParaRPr lang="en-US" sz="1200" dirty="0"/>
           </a:p>
         </p:txBody>
       </p:sp>
@@ -5688,7 +5996,7 @@
         <p:spPr>
           <a:xfrm>
             <a:off x="411480" y="5923560"/>
-            <a:ext cx="11365992" cy="713232"/>
+            <a:ext cx="11365992" cy="822960"/>
           </a:xfrm>
           <a:prstGeom prst="roundRect">
             <a:avLst>
@@ -5738,14 +6046,14 @@
               <a:buNone/>
             </a:pPr>
             <a:r>
-              <a:rPr lang="en-US" sz="1000" b="1">
+              <a:rPr lang="en-US" sz="1400" b="1" dirty="0">
                 <a:solidFill>
                   <a:srgbClr val="E8ECF0"/>
                 </a:solidFill>
               </a:rPr>
               <a:t>Expected business outcomes</a:t>
             </a:r>
-            <a:endParaRPr lang="en-US" sz="1000"/>
+            <a:endParaRPr lang="en-US" sz="1400" dirty="0"/>
           </a:p>
         </p:txBody>
       </p:sp>
@@ -5758,7 +6066,7 @@
         <p:spPr>
           <a:xfrm>
             <a:off x="2468880" y="6015000"/>
-            <a:ext cx="7955280" cy="502920"/>
+            <a:ext cx="7955280" cy="612648"/>
           </a:xfrm>
           <a:prstGeom prst="rect">
             <a:avLst/>
@@ -5774,35 +6082,35 @@
               <a:buNone/>
             </a:pPr>
             <a:r>
-              <a:rPr lang="en-US" sz="1000">
+              <a:rPr lang="en-US" sz="1200" dirty="0">
                 <a:solidFill>
                   <a:srgbClr val="E8ECF0"/>
                 </a:solidFill>
               </a:rPr>
               <a:t>- Backlog growth contained during surge periods</a:t>
             </a:r>
-            <a:endParaRPr lang="en-US" sz="1000" dirty="0"/>
-          </a:p>
-          <a:p>
-            <a:pPr marL="0" indent="0">
-              <a:buNone/>
-            </a:pPr>
-            <a:r>
-              <a:rPr lang="en-US" sz="1000">
+            <a:endParaRPr lang="en-US" sz="1200" dirty="0"/>
+          </a:p>
+          <a:p>
+            <a:pPr marL="0" indent="0">
+              <a:buNone/>
+            </a:pPr>
+            <a:r>
+              <a:rPr lang="en-US" sz="1200" dirty="0">
                 <a:solidFill>
                   <a:srgbClr val="E8ECF0"/>
                 </a:solidFill>
               </a:rPr>
               <a:t>- Faster first meaningful contact with policyholders</a:t>
             </a:r>
-            <a:endParaRPr lang="en-US" sz="1000" dirty="0"/>
-          </a:p>
-          <a:p>
-            <a:pPr marL="0" indent="0">
-              <a:buNone/>
-            </a:pPr>
-            <a:r>
-              <a:rPr lang="en-US" sz="1000">
+            <a:endParaRPr lang="en-US" sz="1200" dirty="0"/>
+          </a:p>
+          <a:p>
+            <a:pPr marL="0" indent="0">
+              <a:buNone/>
+            </a:pPr>
+            <a:r>
+              <a:rPr lang="en-US" sz="1200" dirty="0">
                 <a:solidFill>
                   <a:srgbClr val="E8ECF0"/>
                 </a:solidFill>
@@ -5815,14 +6123,14 @@
               <a:buNone/>
             </a:pPr>
             <a:r>
-              <a:rPr lang="en-US" sz="1000" dirty="0">
+              <a:rPr lang="en-US" sz="1200" dirty="0">
                 <a:solidFill>
                   <a:srgbClr val="5AAFA5"/>
                 </a:solidFill>
               </a:rPr>
               <a:t>- Enterprise security in place: Entra ID authentication, least-privilege governance</a:t>
             </a:r>
-            <a:endParaRPr lang="en-US" sz="1000" dirty="0"/>
+            <a:endParaRPr lang="en-US" sz="1200" dirty="0"/>
           </a:p>
         </p:txBody>
       </p:sp>
@@ -5842,8 +6150,8 @@
         </p:blipFill>
         <p:spPr>
           <a:xfrm>
-            <a:off x="502920" y="1216152"/>
-            <a:ext cx="384048" cy="384048"/>
+            <a:off x="466344" y="1179576"/>
+            <a:ext cx="457200" cy="457200"/>
           </a:xfrm>
           <a:prstGeom prst="rect">
             <a:avLst/>
@@ -5866,8 +6174,8 @@
         </p:blipFill>
         <p:spPr>
           <a:xfrm>
-            <a:off x="3456432" y="1216152"/>
-            <a:ext cx="384048" cy="384048"/>
+            <a:off x="3419856" y="1179576"/>
+            <a:ext cx="457200" cy="457200"/>
           </a:xfrm>
           <a:prstGeom prst="rect">
             <a:avLst/>
@@ -5890,8 +6198,8 @@
         </p:blipFill>
         <p:spPr>
           <a:xfrm>
-            <a:off x="6409944" y="1216152"/>
-            <a:ext cx="384048" cy="384048"/>
+            <a:off x="6373368" y="1179576"/>
+            <a:ext cx="457200" cy="457200"/>
           </a:xfrm>
           <a:prstGeom prst="rect">
             <a:avLst/>
@@ -5914,8 +6222,8 @@
         </p:blipFill>
         <p:spPr>
           <a:xfrm>
-            <a:off x="9363456" y="1216152"/>
-            <a:ext cx="384048" cy="384048"/>
+            <a:off x="9326880" y="1179576"/>
+            <a:ext cx="457200" cy="457200"/>
           </a:xfrm>
           <a:prstGeom prst="rect">
             <a:avLst/>
@@ -6435,14 +6743,14 @@
               <a:buNone/>
             </a:pPr>
             <a:r>
-              <a:rPr lang="en-US" sz="2400" b="1">
+              <a:rPr lang="en-US" sz="2200" b="1">
                 <a:solidFill>
                   <a:srgbClr val="FFFFFF"/>
                 </a:solidFill>
               </a:rPr>
               <a:t>Commercial Lines Carrier Process Flow</a:t>
             </a:r>
-            <a:endParaRPr lang="en-US" sz="2400"/>
+            <a:endParaRPr lang="en-US" sz="2200"/>
           </a:p>
         </p:txBody>
       </p:sp>
@@ -6471,14 +6779,14 @@
               <a:buNone/>
             </a:pPr>
             <a:r>
-              <a:rPr lang="en-US" sz="1000">
+              <a:rPr lang="en-US" sz="1200">
                 <a:solidFill>
                   <a:srgbClr val="D6E4EA"/>
                 </a:solidFill>
               </a:rPr>
               <a:t>Middle-Market Package Policy Renewal and Premium Audit | Where the accelerator resolves stage-specific challenges</a:t>
             </a:r>
-            <a:endParaRPr lang="en-US" sz="1000"/>
+            <a:endParaRPr lang="en-US" sz="1200"/>
           </a:p>
         </p:txBody>
       </p:sp>
@@ -6573,14 +6881,14 @@
               <a:buNone/>
             </a:pPr>
             <a:r>
-              <a:rPr lang="en-US" sz="1200" b="1">
+              <a:rPr lang="en-US" sz="1400" b="1">
                 <a:solidFill>
                   <a:srgbClr val="E8ECF0"/>
                 </a:solidFill>
               </a:rPr>
               <a:t>1. Submission Intake</a:t>
             </a:r>
-            <a:endParaRPr lang="en-US" sz="1200"/>
+            <a:endParaRPr lang="en-US" sz="1400"/>
           </a:p>
         </p:txBody>
       </p:sp>
@@ -6643,14 +6951,14 @@
               <a:buNone/>
             </a:pPr>
             <a:r>
-              <a:rPr lang="en-US" sz="1000" b="1">
+              <a:rPr lang="en-US" sz="1400" b="1" dirty="0">
                 <a:solidFill>
                   <a:srgbClr val="E76F51"/>
                 </a:solidFill>
               </a:rPr>
               <a:t>Business challenge</a:t>
             </a:r>
-            <a:endParaRPr lang="en-US" sz="1000"/>
+            <a:endParaRPr lang="en-US" sz="1400" dirty="0"/>
           </a:p>
         </p:txBody>
       </p:sp>
@@ -6678,15 +6986,25 @@
             <a:pPr marL="0" indent="0">
               <a:buNone/>
             </a:pPr>
-            <a:r>
-              <a:rPr lang="en-US" sz="1000">
+            <a:endParaRPr lang="en-US" sz="1200" dirty="0">
+              <a:solidFill>
+                <a:srgbClr val="D4A088"/>
+              </a:solidFill>
+            </a:endParaRPr>
+          </a:p>
+          <a:p>
+            <a:pPr marL="0" indent="0">
+              <a:buNone/>
+            </a:pPr>
+            <a:r>
+              <a:rPr lang="en-US" sz="1200" dirty="0">
                 <a:solidFill>
                   <a:srgbClr val="D4A088"/>
                 </a:solidFill>
               </a:rPr>
               <a:t>ACORD packages arrive with uneven quality.</a:t>
             </a:r>
-            <a:endParaRPr lang="en-US" sz="1000"/>
+            <a:endParaRPr lang="en-US" sz="1200" dirty="0"/>
           </a:p>
         </p:txBody>
       </p:sp>
@@ -6749,14 +7067,14 @@
               <a:buNone/>
             </a:pPr>
             <a:r>
-              <a:rPr lang="en-US" sz="1000" b="1">
+              <a:rPr lang="en-US" sz="1400" b="1">
                 <a:solidFill>
                   <a:srgbClr val="2EC4B6"/>
                 </a:solidFill>
               </a:rPr>
               <a:t>Accelerator intervention</a:t>
             </a:r>
-            <a:endParaRPr lang="en-US" sz="1000"/>
+            <a:endParaRPr lang="en-US" sz="1400"/>
           </a:p>
         </p:txBody>
       </p:sp>
@@ -6784,15 +7102,25 @@
             <a:pPr marL="0" indent="0">
               <a:buNone/>
             </a:pPr>
-            <a:r>
-              <a:rPr lang="en-US" sz="1000">
+            <a:endParaRPr lang="en-US" sz="1200" dirty="0">
+              <a:solidFill>
+                <a:srgbClr val="7CCFC5"/>
+              </a:solidFill>
+            </a:endParaRPr>
+          </a:p>
+          <a:p>
+            <a:pPr marL="0" indent="0">
+              <a:buNone/>
+            </a:pPr>
+            <a:r>
+              <a:rPr lang="en-US" sz="1200" dirty="0">
                 <a:solidFill>
                   <a:srgbClr val="7CCFC5"/>
                 </a:solidFill>
               </a:rPr>
               <a:t>Extract payroll, class code, fleet, and loss history into structured risk view.</a:t>
             </a:r>
-            <a:endParaRPr lang="en-US" sz="1000"/>
+            <a:endParaRPr lang="en-US" sz="1200" dirty="0"/>
           </a:p>
         </p:txBody>
       </p:sp>
@@ -6919,14 +7247,14 @@
               <a:buNone/>
             </a:pPr>
             <a:r>
-              <a:rPr lang="en-US" sz="1200" b="1">
+              <a:rPr lang="en-US" sz="1400" b="1">
                 <a:solidFill>
                   <a:srgbClr val="E8ECF0"/>
                 </a:solidFill>
               </a:rPr>
               <a:t>2. Underwriting Review</a:t>
             </a:r>
-            <a:endParaRPr lang="en-US" sz="1200"/>
+            <a:endParaRPr lang="en-US" sz="1400"/>
           </a:p>
         </p:txBody>
       </p:sp>
@@ -6989,14 +7317,14 @@
               <a:buNone/>
             </a:pPr>
             <a:r>
-              <a:rPr lang="en-US" sz="1000" b="1">
+              <a:rPr lang="en-US" sz="1400" b="1">
                 <a:solidFill>
                   <a:srgbClr val="E76F51"/>
                 </a:solidFill>
               </a:rPr>
               <a:t>Business challenge</a:t>
             </a:r>
-            <a:endParaRPr lang="en-US" sz="1000"/>
+            <a:endParaRPr lang="en-US" sz="1400"/>
           </a:p>
         </p:txBody>
       </p:sp>
@@ -7024,15 +7352,25 @@
             <a:pPr marL="0" indent="0">
               <a:buNone/>
             </a:pPr>
-            <a:r>
-              <a:rPr lang="en-US" sz="1000">
+            <a:endParaRPr lang="en-US" sz="1200" dirty="0">
+              <a:solidFill>
+                <a:srgbClr val="D4A088"/>
+              </a:solidFill>
+            </a:endParaRPr>
+          </a:p>
+          <a:p>
+            <a:pPr marL="0" indent="0">
+              <a:buNone/>
+            </a:pPr>
+            <a:r>
+              <a:rPr lang="en-US" sz="1200" dirty="0">
                 <a:solidFill>
                   <a:srgbClr val="D4A088"/>
                 </a:solidFill>
               </a:rPr>
               <a:t>Missing controls trigger rework and referrals.</a:t>
             </a:r>
-            <a:endParaRPr lang="en-US" sz="1000"/>
+            <a:endParaRPr lang="en-US" sz="1200" dirty="0"/>
           </a:p>
         </p:txBody>
       </p:sp>
@@ -7095,14 +7433,14 @@
               <a:buNone/>
             </a:pPr>
             <a:r>
-              <a:rPr lang="en-US" sz="1000" b="1">
+              <a:rPr lang="en-US" sz="1400" b="1">
                 <a:solidFill>
                   <a:srgbClr val="2EC4B6"/>
                 </a:solidFill>
               </a:rPr>
               <a:t>Accelerator intervention</a:t>
             </a:r>
-            <a:endParaRPr lang="en-US" sz="1000"/>
+            <a:endParaRPr lang="en-US" sz="1400"/>
           </a:p>
         </p:txBody>
       </p:sp>
@@ -7130,15 +7468,25 @@
             <a:pPr marL="0" indent="0">
               <a:buNone/>
             </a:pPr>
-            <a:r>
-              <a:rPr lang="en-US" sz="1000">
+            <a:endParaRPr lang="en-US" sz="1200" dirty="0">
+              <a:solidFill>
+                <a:srgbClr val="7CCFC5"/>
+              </a:solidFill>
+            </a:endParaRPr>
+          </a:p>
+          <a:p>
+            <a:pPr marL="0" indent="0">
+              <a:buNone/>
+            </a:pPr>
+            <a:r>
+              <a:rPr lang="en-US" sz="1200" dirty="0">
                 <a:solidFill>
                   <a:srgbClr val="7CCFC5"/>
                 </a:solidFill>
               </a:rPr>
               <a:t>Risk completeness and control-gap flags before underwriter review.</a:t>
             </a:r>
-            <a:endParaRPr lang="en-US" sz="1000"/>
+            <a:endParaRPr lang="en-US" sz="1200" dirty="0"/>
           </a:p>
         </p:txBody>
       </p:sp>
@@ -7265,14 +7613,14 @@
               <a:buNone/>
             </a:pPr>
             <a:r>
-              <a:rPr lang="en-US" sz="1200" b="1">
+              <a:rPr lang="en-US" sz="1400" b="1">
                 <a:solidFill>
                   <a:srgbClr val="E8ECF0"/>
                 </a:solidFill>
               </a:rPr>
               <a:t>3. Premium Audit</a:t>
             </a:r>
-            <a:endParaRPr lang="en-US" sz="1200"/>
+            <a:endParaRPr lang="en-US" sz="1400"/>
           </a:p>
         </p:txBody>
       </p:sp>
@@ -7335,14 +7683,14 @@
               <a:buNone/>
             </a:pPr>
             <a:r>
-              <a:rPr lang="en-US" sz="1000" b="1">
+              <a:rPr lang="en-US" sz="1400" b="1">
                 <a:solidFill>
                   <a:srgbClr val="E76F51"/>
                 </a:solidFill>
               </a:rPr>
               <a:t>Business challenge</a:t>
             </a:r>
-            <a:endParaRPr lang="en-US" sz="1000"/>
+            <a:endParaRPr lang="en-US" sz="1400"/>
           </a:p>
         </p:txBody>
       </p:sp>
@@ -7370,15 +7718,25 @@
             <a:pPr marL="0" indent="0">
               <a:buNone/>
             </a:pPr>
-            <a:r>
-              <a:rPr lang="en-US" sz="1000">
+            <a:endParaRPr lang="en-US" sz="1200" dirty="0">
+              <a:solidFill>
+                <a:srgbClr val="D4A088"/>
+              </a:solidFill>
+            </a:endParaRPr>
+          </a:p>
+          <a:p>
+            <a:pPr marL="0" indent="0">
+              <a:buNone/>
+            </a:pPr>
+            <a:r>
+              <a:rPr lang="en-US" sz="1200" dirty="0">
                 <a:solidFill>
                   <a:srgbClr val="D4A088"/>
                 </a:solidFill>
               </a:rPr>
               <a:t>Declared vs observed exposure mismatches are found late.</a:t>
             </a:r>
-            <a:endParaRPr lang="en-US" sz="1000"/>
+            <a:endParaRPr lang="en-US" sz="1200" dirty="0"/>
           </a:p>
         </p:txBody>
       </p:sp>
@@ -7441,14 +7799,14 @@
               <a:buNone/>
             </a:pPr>
             <a:r>
-              <a:rPr lang="en-US" sz="1000" b="1">
+              <a:rPr lang="en-US" sz="1400" b="1">
                 <a:solidFill>
                   <a:srgbClr val="2EC4B6"/>
                 </a:solidFill>
               </a:rPr>
               <a:t>Accelerator intervention</a:t>
             </a:r>
-            <a:endParaRPr lang="en-US" sz="1000"/>
+            <a:endParaRPr lang="en-US" sz="1400"/>
           </a:p>
         </p:txBody>
       </p:sp>
@@ -7476,15 +7834,25 @@
             <a:pPr marL="0" indent="0">
               <a:buNone/>
             </a:pPr>
-            <a:r>
-              <a:rPr lang="en-US" sz="1000">
+            <a:endParaRPr lang="en-US" sz="1200" dirty="0">
+              <a:solidFill>
+                <a:srgbClr val="7CCFC5"/>
+              </a:solidFill>
+            </a:endParaRPr>
+          </a:p>
+          <a:p>
+            <a:pPr marL="0" indent="0">
+              <a:buNone/>
+            </a:pPr>
+            <a:r>
+              <a:rPr lang="en-US" sz="1200" dirty="0">
                 <a:solidFill>
                   <a:srgbClr val="7CCFC5"/>
                 </a:solidFill>
               </a:rPr>
               <a:t>Automated discrepancy detection and exception queue generation.</a:t>
             </a:r>
-            <a:endParaRPr lang="en-US" sz="1000"/>
+            <a:endParaRPr lang="en-US" sz="1200" dirty="0"/>
           </a:p>
         </p:txBody>
       </p:sp>
@@ -7611,14 +7979,14 @@
               <a:buNone/>
             </a:pPr>
             <a:r>
-              <a:rPr lang="en-US" sz="1200" b="1">
+              <a:rPr lang="en-US" sz="1400" b="1">
                 <a:solidFill>
                   <a:srgbClr val="E8ECF0"/>
                 </a:solidFill>
               </a:rPr>
               <a:t>4. Renewal Decision</a:t>
             </a:r>
-            <a:endParaRPr lang="en-US" sz="1200"/>
+            <a:endParaRPr lang="en-US" sz="1400"/>
           </a:p>
         </p:txBody>
       </p:sp>
@@ -7681,14 +8049,14 @@
               <a:buNone/>
             </a:pPr>
             <a:r>
-              <a:rPr lang="en-US" sz="1000" b="1">
+              <a:rPr lang="en-US" sz="1400" b="1">
                 <a:solidFill>
                   <a:srgbClr val="E76F51"/>
                 </a:solidFill>
               </a:rPr>
               <a:t>Business challenge</a:t>
             </a:r>
-            <a:endParaRPr lang="en-US" sz="1000"/>
+            <a:endParaRPr lang="en-US" sz="1400"/>
           </a:p>
         </p:txBody>
       </p:sp>
@@ -7716,15 +8084,25 @@
             <a:pPr marL="0" indent="0">
               <a:buNone/>
             </a:pPr>
-            <a:r>
-              <a:rPr lang="en-US" sz="1000">
+            <a:endParaRPr lang="en-US" sz="1200" dirty="0">
+              <a:solidFill>
+                <a:srgbClr val="D4A088"/>
+              </a:solidFill>
+            </a:endParaRPr>
+          </a:p>
+          <a:p>
+            <a:pPr marL="0" indent="0">
+              <a:buNone/>
+            </a:pPr>
+            <a:r>
+              <a:rPr lang="en-US" sz="1200" dirty="0">
                 <a:solidFill>
                   <a:srgbClr val="D4A088"/>
                 </a:solidFill>
               </a:rPr>
               <a:t>Loss trends are hard to aggregate quickly.</a:t>
             </a:r>
-            <a:endParaRPr lang="en-US" sz="1000"/>
+            <a:endParaRPr lang="en-US" sz="1200" dirty="0"/>
           </a:p>
         </p:txBody>
       </p:sp>
@@ -7787,14 +8165,14 @@
               <a:buNone/>
             </a:pPr>
             <a:r>
-              <a:rPr lang="en-US" sz="1000" b="1">
+              <a:rPr lang="en-US" sz="1400" b="1" dirty="0">
                 <a:solidFill>
                   <a:srgbClr val="2EC4B6"/>
                 </a:solidFill>
               </a:rPr>
               <a:t>Accelerator intervention</a:t>
             </a:r>
-            <a:endParaRPr lang="en-US" sz="1000"/>
+            <a:endParaRPr lang="en-US" sz="1400" dirty="0"/>
           </a:p>
         </p:txBody>
       </p:sp>
@@ -7822,15 +8200,25 @@
             <a:pPr marL="0" indent="0">
               <a:buNone/>
             </a:pPr>
-            <a:r>
-              <a:rPr lang="en-US" sz="1000">
+            <a:endParaRPr lang="en-US" sz="1200" dirty="0">
+              <a:solidFill>
+                <a:srgbClr val="7CCFC5"/>
+              </a:solidFill>
+            </a:endParaRPr>
+          </a:p>
+          <a:p>
+            <a:pPr marL="0" indent="0">
+              <a:buNone/>
+            </a:pPr>
+            <a:r>
+              <a:rPr lang="en-US" sz="1200" dirty="0">
                 <a:solidFill>
                   <a:srgbClr val="7CCFC5"/>
                 </a:solidFill>
               </a:rPr>
               <a:t>Precomputed trend summary with linked evidence for decision committee.</a:t>
             </a:r>
-            <a:endParaRPr lang="en-US" sz="1000"/>
+            <a:endParaRPr lang="en-US" sz="1200" dirty="0"/>
           </a:p>
         </p:txBody>
       </p:sp>
@@ -7843,7 +8231,7 @@
         <p:spPr>
           <a:xfrm>
             <a:off x="411480" y="5923560"/>
-            <a:ext cx="11365992" cy="713232"/>
+            <a:ext cx="11365992" cy="822960"/>
           </a:xfrm>
           <a:prstGeom prst="roundRect">
             <a:avLst>
@@ -7893,14 +8281,14 @@
               <a:buNone/>
             </a:pPr>
             <a:r>
-              <a:rPr lang="en-US" sz="1000" b="1">
+              <a:rPr lang="en-US" sz="1400" b="1">
                 <a:solidFill>
                   <a:srgbClr val="E8ECF0"/>
                 </a:solidFill>
               </a:rPr>
               <a:t>Expected business outcomes</a:t>
             </a:r>
-            <a:endParaRPr lang="en-US" sz="1000"/>
+            <a:endParaRPr lang="en-US" sz="1400"/>
           </a:p>
         </p:txBody>
       </p:sp>
@@ -7912,8 +8300,8 @@
         </p:nvSpPr>
         <p:spPr>
           <a:xfrm>
-            <a:off x="2468880" y="6015000"/>
-            <a:ext cx="7955280" cy="502920"/>
+            <a:off x="2468880" y="5991264"/>
+            <a:ext cx="7955280" cy="755256"/>
           </a:xfrm>
           <a:prstGeom prst="rect">
             <a:avLst/>
@@ -7929,35 +8317,35 @@
               <a:buNone/>
             </a:pPr>
             <a:r>
-              <a:rPr lang="en-US" sz="1000">
+              <a:rPr lang="en-US" sz="1200" dirty="0">
                 <a:solidFill>
                   <a:srgbClr val="E8ECF0"/>
                 </a:solidFill>
               </a:rPr>
               <a:t>- Shorter submission-to-quote cycle</a:t>
             </a:r>
-            <a:endParaRPr lang="en-US" sz="1000"/>
-          </a:p>
-          <a:p>
-            <a:pPr marL="0" indent="0">
-              <a:buNone/>
-            </a:pPr>
-            <a:r>
-              <a:rPr lang="en-US" sz="1000">
+            <a:endParaRPr lang="en-US" sz="1200" dirty="0"/>
+          </a:p>
+          <a:p>
+            <a:pPr marL="0" indent="0">
+              <a:buNone/>
+            </a:pPr>
+            <a:r>
+              <a:rPr lang="en-US" sz="1200" dirty="0">
                 <a:solidFill>
                   <a:srgbClr val="E8ECF0"/>
                 </a:solidFill>
               </a:rPr>
               <a:t>- Reduced premium leakage risk</a:t>
             </a:r>
-            <a:endParaRPr lang="en-US" sz="1000"/>
-          </a:p>
-          <a:p>
-            <a:pPr marL="0" indent="0">
-              <a:buNone/>
-            </a:pPr>
-            <a:r>
-              <a:rPr lang="en-US" sz="1000">
+            <a:endParaRPr lang="en-US" sz="1200" dirty="0"/>
+          </a:p>
+          <a:p>
+            <a:pPr marL="0" indent="0">
+              <a:buNone/>
+            </a:pPr>
+            <a:r>
+              <a:rPr lang="en-US" sz="1200" dirty="0">
                 <a:solidFill>
                   <a:srgbClr val="E8ECF0"/>
                 </a:solidFill>
@@ -7970,14 +8358,14 @@
               <a:buNone/>
             </a:pPr>
             <a:r>
-              <a:rPr lang="en-US" sz="1000">
+              <a:rPr lang="en-US" sz="1200" dirty="0">
                 <a:solidFill>
                   <a:srgbClr val="5AAFA5"/>
                 </a:solidFill>
               </a:rPr>
               <a:t>- Enterprise security in place: Entra ID authentication, least-privilege governance</a:t>
             </a:r>
-            <a:endParaRPr lang="en-US" sz="1000"/>
+            <a:endParaRPr lang="en-US" sz="1200" dirty="0"/>
           </a:p>
         </p:txBody>
       </p:sp>
@@ -7997,8 +8385,8 @@
         </p:blipFill>
         <p:spPr>
           <a:xfrm>
-            <a:off x="502920" y="1216152"/>
-            <a:ext cx="384048" cy="384048"/>
+            <a:off x="466344" y="1179576"/>
+            <a:ext cx="457200" cy="457200"/>
           </a:xfrm>
           <a:prstGeom prst="rect">
             <a:avLst/>
@@ -8021,8 +8409,8 @@
         </p:blipFill>
         <p:spPr>
           <a:xfrm>
-            <a:off x="3456432" y="1216152"/>
-            <a:ext cx="384048" cy="384048"/>
+            <a:off x="3419856" y="1179576"/>
+            <a:ext cx="457200" cy="457200"/>
           </a:xfrm>
           <a:prstGeom prst="rect">
             <a:avLst/>
@@ -8045,8 +8433,8 @@
         </p:blipFill>
         <p:spPr>
           <a:xfrm>
-            <a:off x="6409944" y="1216152"/>
-            <a:ext cx="384048" cy="384048"/>
+            <a:off x="6373368" y="1179576"/>
+            <a:ext cx="457200" cy="457200"/>
           </a:xfrm>
           <a:prstGeom prst="rect">
             <a:avLst/>
@@ -8069,8 +8457,8 @@
         </p:blipFill>
         <p:spPr>
           <a:xfrm>
-            <a:off x="9363456" y="1216152"/>
-            <a:ext cx="384048" cy="384048"/>
+            <a:off x="9326880" y="1179576"/>
+            <a:ext cx="457200" cy="457200"/>
           </a:xfrm>
           <a:prstGeom prst="rect">
             <a:avLst/>
@@ -8652,14 +9040,14 @@
               <a:buNone/>
             </a:pPr>
             <a:r>
-              <a:rPr lang="en-US" sz="2400" b="1">
+              <a:rPr lang="en-US" sz="2200" b="1">
                 <a:solidFill>
                   <a:srgbClr val="FFFFFF"/>
                 </a:solidFill>
               </a:rPr>
               <a:t>Specialty / E&amp;S Carrier Process Flow</a:t>
             </a:r>
-            <a:endParaRPr lang="en-US" sz="2400"/>
+            <a:endParaRPr lang="en-US" sz="2200"/>
           </a:p>
         </p:txBody>
       </p:sp>
@@ -8688,14 +9076,14 @@
               <a:buNone/>
             </a:pPr>
             <a:r>
-              <a:rPr lang="en-US" sz="1000">
+              <a:rPr lang="en-US" sz="1200" dirty="0">
                 <a:solidFill>
                   <a:srgbClr val="D6E4EA"/>
                 </a:solidFill>
               </a:rPr>
               <a:t>High-Hazard Liability Risk Selection and Referral Governance | Where the accelerator resolves stage-specific challenges</a:t>
             </a:r>
-            <a:endParaRPr lang="en-US" sz="1000"/>
+            <a:endParaRPr lang="en-US" sz="1200" dirty="0"/>
           </a:p>
         </p:txBody>
       </p:sp>
@@ -8790,14 +9178,14 @@
               <a:buNone/>
             </a:pPr>
             <a:r>
-              <a:rPr lang="en-US" sz="1200" b="1">
+              <a:rPr lang="en-US" sz="1400" b="1">
                 <a:solidFill>
                   <a:srgbClr val="E8ECF0"/>
                 </a:solidFill>
               </a:rPr>
               <a:t>1. Broker Submission</a:t>
             </a:r>
-            <a:endParaRPr lang="en-US" sz="1200"/>
+            <a:endParaRPr lang="en-US" sz="1400"/>
           </a:p>
         </p:txBody>
       </p:sp>
@@ -8860,14 +9248,14 @@
               <a:buNone/>
             </a:pPr>
             <a:r>
-              <a:rPr lang="en-US" sz="1000" b="1">
+              <a:rPr lang="en-US" sz="1400" b="1" dirty="0">
                 <a:solidFill>
                   <a:srgbClr val="E76F51"/>
                 </a:solidFill>
               </a:rPr>
               <a:t>Business challenge</a:t>
             </a:r>
-            <a:endParaRPr lang="en-US" sz="1000"/>
+            <a:endParaRPr lang="en-US" sz="1400" dirty="0"/>
           </a:p>
         </p:txBody>
       </p:sp>
@@ -8895,15 +9283,25 @@
             <a:pPr marL="0" indent="0">
               <a:buNone/>
             </a:pPr>
-            <a:r>
-              <a:rPr lang="en-US" sz="1000">
+            <a:endParaRPr lang="en-US" sz="1200" dirty="0">
+              <a:solidFill>
+                <a:srgbClr val="D4A088"/>
+              </a:solidFill>
+            </a:endParaRPr>
+          </a:p>
+          <a:p>
+            <a:pPr marL="0" indent="0">
+              <a:buNone/>
+            </a:pPr>
+            <a:r>
+              <a:rPr lang="en-US" sz="1200" dirty="0">
                 <a:solidFill>
                   <a:srgbClr val="D4A088"/>
                 </a:solidFill>
               </a:rPr>
               <a:t>Inconsistent narrative packets hide key hazards.</a:t>
             </a:r>
-            <a:endParaRPr lang="en-US" sz="1000"/>
+            <a:endParaRPr lang="en-US" sz="1200" dirty="0"/>
           </a:p>
         </p:txBody>
       </p:sp>
@@ -8966,14 +9364,14 @@
               <a:buNone/>
             </a:pPr>
             <a:r>
-              <a:rPr lang="en-US" sz="1000" b="1">
+              <a:rPr lang="en-US" sz="1400" b="1" dirty="0">
                 <a:solidFill>
                   <a:srgbClr val="2EC4B6"/>
                 </a:solidFill>
               </a:rPr>
               <a:t>Accelerator intervention</a:t>
             </a:r>
-            <a:endParaRPr lang="en-US" sz="1000"/>
+            <a:endParaRPr lang="en-US" sz="1400" dirty="0"/>
           </a:p>
         </p:txBody>
       </p:sp>
@@ -9001,15 +9399,25 @@
             <a:pPr marL="0" indent="0">
               <a:buNone/>
             </a:pPr>
-            <a:r>
-              <a:rPr lang="en-US" sz="1000">
+            <a:endParaRPr lang="en-US" sz="1200" dirty="0">
+              <a:solidFill>
+                <a:srgbClr val="7CCFC5"/>
+              </a:solidFill>
+            </a:endParaRPr>
+          </a:p>
+          <a:p>
+            <a:pPr marL="0" indent="0">
+              <a:buNone/>
+            </a:pPr>
+            <a:r>
+              <a:rPr lang="en-US" sz="1200" dirty="0">
                 <a:solidFill>
                   <a:srgbClr val="7CCFC5"/>
                 </a:solidFill>
               </a:rPr>
               <a:t>Normalize varied documents into consistent hazard/control profiles.</a:t>
             </a:r>
-            <a:endParaRPr lang="en-US" sz="1000"/>
+            <a:endParaRPr lang="en-US" sz="1200" dirty="0"/>
           </a:p>
         </p:txBody>
       </p:sp>
@@ -9136,14 +9544,14 @@
               <a:buNone/>
             </a:pPr>
             <a:r>
-              <a:rPr lang="en-US" sz="1200" b="1">
+              <a:rPr lang="en-US" sz="1400" b="1">
                 <a:solidFill>
                   <a:srgbClr val="E8ECF0"/>
                 </a:solidFill>
               </a:rPr>
               <a:t>2. Referral Decision</a:t>
             </a:r>
-            <a:endParaRPr lang="en-US" sz="1200"/>
+            <a:endParaRPr lang="en-US" sz="1400"/>
           </a:p>
         </p:txBody>
       </p:sp>
@@ -9206,14 +9614,14 @@
               <a:buNone/>
             </a:pPr>
             <a:r>
-              <a:rPr lang="en-US" sz="1000" b="1">
+              <a:rPr lang="en-US" sz="1400" b="1">
                 <a:solidFill>
                   <a:srgbClr val="E76F51"/>
                 </a:solidFill>
               </a:rPr>
               <a:t>Business challenge</a:t>
             </a:r>
-            <a:endParaRPr lang="en-US" sz="1000"/>
+            <a:endParaRPr lang="en-US" sz="1400"/>
           </a:p>
         </p:txBody>
       </p:sp>
@@ -9241,15 +9649,25 @@
             <a:pPr marL="0" indent="0">
               <a:buNone/>
             </a:pPr>
-            <a:r>
-              <a:rPr lang="en-US" sz="1000">
+            <a:endParaRPr lang="en-US" sz="1200" dirty="0">
+              <a:solidFill>
+                <a:srgbClr val="D4A088"/>
+              </a:solidFill>
+            </a:endParaRPr>
+          </a:p>
+          <a:p>
+            <a:pPr marL="0" indent="0">
+              <a:buNone/>
+            </a:pPr>
+            <a:r>
+              <a:rPr lang="en-US" sz="1200" dirty="0">
                 <a:solidFill>
                   <a:srgbClr val="D4A088"/>
                 </a:solidFill>
               </a:rPr>
               <a:t>Evidence gathering slows authority escalation.</a:t>
             </a:r>
-            <a:endParaRPr lang="en-US" sz="1000"/>
+            <a:endParaRPr lang="en-US" sz="1200" dirty="0"/>
           </a:p>
         </p:txBody>
       </p:sp>
@@ -9312,14 +9730,14 @@
               <a:buNone/>
             </a:pPr>
             <a:r>
-              <a:rPr lang="en-US" sz="1000" b="1">
+              <a:rPr lang="en-US" sz="1400" b="1" dirty="0">
                 <a:solidFill>
                   <a:srgbClr val="2EC4B6"/>
                 </a:solidFill>
               </a:rPr>
               <a:t>Accelerator intervention</a:t>
             </a:r>
-            <a:endParaRPr lang="en-US" sz="1000"/>
+            <a:endParaRPr lang="en-US" sz="1400" dirty="0"/>
           </a:p>
         </p:txBody>
       </p:sp>
@@ -9347,15 +9765,25 @@
             <a:pPr marL="0" indent="0">
               <a:buNone/>
             </a:pPr>
-            <a:r>
-              <a:rPr lang="en-US" sz="1000">
+            <a:endParaRPr lang="en-US" sz="1200" dirty="0">
+              <a:solidFill>
+                <a:srgbClr val="7CCFC5"/>
+              </a:solidFill>
+            </a:endParaRPr>
+          </a:p>
+          <a:p>
+            <a:pPr marL="0" indent="0">
+              <a:buNone/>
+            </a:pPr>
+            <a:r>
+              <a:rPr lang="en-US" sz="1200" dirty="0">
                 <a:solidFill>
                   <a:srgbClr val="7CCFC5"/>
                 </a:solidFill>
               </a:rPr>
               <a:t>Auto-generated referral pack with rationale and source links.</a:t>
             </a:r>
-            <a:endParaRPr lang="en-US" sz="1000"/>
+            <a:endParaRPr lang="en-US" sz="1200" dirty="0"/>
           </a:p>
         </p:txBody>
       </p:sp>
@@ -9482,14 +9910,14 @@
               <a:buNone/>
             </a:pPr>
             <a:r>
-              <a:rPr lang="en-US" sz="1200" b="1">
+              <a:rPr lang="en-US" sz="1400" b="1">
                 <a:solidFill>
                   <a:srgbClr val="E8ECF0"/>
                 </a:solidFill>
               </a:rPr>
               <a:t>3. Policy Structuring</a:t>
             </a:r>
-            <a:endParaRPr lang="en-US" sz="1200"/>
+            <a:endParaRPr lang="en-US" sz="1400"/>
           </a:p>
         </p:txBody>
       </p:sp>
@@ -9552,14 +9980,14 @@
               <a:buNone/>
             </a:pPr>
             <a:r>
-              <a:rPr lang="en-US" sz="1000" b="1">
+              <a:rPr lang="en-US" sz="1400" b="1" dirty="0">
                 <a:solidFill>
                   <a:srgbClr val="E76F51"/>
                 </a:solidFill>
               </a:rPr>
               <a:t>Business challenge</a:t>
             </a:r>
-            <a:endParaRPr lang="en-US" sz="1000"/>
+            <a:endParaRPr lang="en-US" sz="1400" dirty="0"/>
           </a:p>
         </p:txBody>
       </p:sp>
@@ -9587,15 +10015,25 @@
             <a:pPr marL="0" indent="0">
               <a:buNone/>
             </a:pPr>
-            <a:r>
-              <a:rPr lang="en-US" sz="1000">
+            <a:endParaRPr lang="en-US" sz="1200" dirty="0">
+              <a:solidFill>
+                <a:srgbClr val="D4A088"/>
+              </a:solidFill>
+            </a:endParaRPr>
+          </a:p>
+          <a:p>
+            <a:pPr marL="0" indent="0">
+              <a:buNone/>
+            </a:pPr>
+            <a:r>
+              <a:rPr lang="en-US" sz="1200" dirty="0">
                 <a:solidFill>
                   <a:srgbClr val="D4A088"/>
                 </a:solidFill>
               </a:rPr>
               <a:t>Exclusions and conditions can be misapplied under time pressure.</a:t>
             </a:r>
-            <a:endParaRPr lang="en-US" sz="1000"/>
+            <a:endParaRPr lang="en-US" sz="1200" dirty="0"/>
           </a:p>
         </p:txBody>
       </p:sp>
@@ -9658,14 +10096,14 @@
               <a:buNone/>
             </a:pPr>
             <a:r>
-              <a:rPr lang="en-US" sz="1000" b="1">
+              <a:rPr lang="en-US" sz="1400" b="1">
                 <a:solidFill>
                   <a:srgbClr val="2EC4B6"/>
                 </a:solidFill>
               </a:rPr>
               <a:t>Accelerator intervention</a:t>
             </a:r>
-            <a:endParaRPr lang="en-US" sz="1000"/>
+            <a:endParaRPr lang="en-US" sz="1400"/>
           </a:p>
         </p:txBody>
       </p:sp>
@@ -9693,15 +10131,25 @@
             <a:pPr marL="0" indent="0">
               <a:buNone/>
             </a:pPr>
-            <a:r>
-              <a:rPr lang="en-US" sz="1000">
+            <a:endParaRPr lang="en-US" sz="1200" dirty="0">
+              <a:solidFill>
+                <a:srgbClr val="7CCFC5"/>
+              </a:solidFill>
+            </a:endParaRPr>
+          </a:p>
+          <a:p>
+            <a:pPr marL="0" indent="0">
+              <a:buNone/>
+            </a:pPr>
+            <a:r>
+              <a:rPr lang="en-US" sz="1200" dirty="0">
                 <a:solidFill>
                   <a:srgbClr val="7CCFC5"/>
                 </a:solidFill>
               </a:rPr>
               <a:t>Policy condition checkpoints and missing-artifact prompts.</a:t>
             </a:r>
-            <a:endParaRPr lang="en-US" sz="1000"/>
+            <a:endParaRPr lang="en-US" sz="1200" dirty="0"/>
           </a:p>
         </p:txBody>
       </p:sp>
@@ -9828,14 +10276,14 @@
               <a:buNone/>
             </a:pPr>
             <a:r>
-              <a:rPr lang="en-US" sz="1200" b="1">
+              <a:rPr lang="en-US" sz="1400" b="1">
                 <a:solidFill>
                   <a:srgbClr val="E8ECF0"/>
                 </a:solidFill>
               </a:rPr>
               <a:t>4. Portfolio Monitoring</a:t>
             </a:r>
-            <a:endParaRPr lang="en-US" sz="1200"/>
+            <a:endParaRPr lang="en-US" sz="1400"/>
           </a:p>
         </p:txBody>
       </p:sp>
@@ -9898,14 +10346,14 @@
               <a:buNone/>
             </a:pPr>
             <a:r>
-              <a:rPr lang="en-US" sz="1000" b="1">
+              <a:rPr lang="en-US" sz="1400" b="1">
                 <a:solidFill>
                   <a:srgbClr val="E76F51"/>
                 </a:solidFill>
               </a:rPr>
               <a:t>Business challenge</a:t>
             </a:r>
-            <a:endParaRPr lang="en-US" sz="1000"/>
+            <a:endParaRPr lang="en-US" sz="1400"/>
           </a:p>
         </p:txBody>
       </p:sp>
@@ -9933,15 +10381,25 @@
             <a:pPr marL="0" indent="0">
               <a:buNone/>
             </a:pPr>
-            <a:r>
-              <a:rPr lang="en-US" sz="1000">
+            <a:endParaRPr lang="en-US" sz="1200" dirty="0">
+              <a:solidFill>
+                <a:srgbClr val="D4A088"/>
+              </a:solidFill>
+            </a:endParaRPr>
+          </a:p>
+          <a:p>
+            <a:pPr marL="0" indent="0">
+              <a:buNone/>
+            </a:pPr>
+            <a:r>
+              <a:rPr lang="en-US" sz="1200" dirty="0">
                 <a:solidFill>
                   <a:srgbClr val="D4A088"/>
                 </a:solidFill>
               </a:rPr>
               <a:t>Concentration drift appears late.</a:t>
             </a:r>
-            <a:endParaRPr lang="en-US" sz="1000"/>
+            <a:endParaRPr lang="en-US" sz="1200" dirty="0"/>
           </a:p>
         </p:txBody>
       </p:sp>
@@ -10004,14 +10462,14 @@
               <a:buNone/>
             </a:pPr>
             <a:r>
-              <a:rPr lang="en-US" sz="1000" b="1">
+              <a:rPr lang="en-US" sz="1400" b="1">
                 <a:solidFill>
                   <a:srgbClr val="2EC4B6"/>
                 </a:solidFill>
               </a:rPr>
               <a:t>Accelerator intervention</a:t>
             </a:r>
-            <a:endParaRPr lang="en-US" sz="1000"/>
+            <a:endParaRPr lang="en-US" sz="1400"/>
           </a:p>
         </p:txBody>
       </p:sp>
@@ -10039,15 +10497,25 @@
             <a:pPr marL="0" indent="0">
               <a:buNone/>
             </a:pPr>
-            <a:r>
-              <a:rPr lang="en-US" sz="1000">
+            <a:endParaRPr lang="en-US" sz="1200" dirty="0">
+              <a:solidFill>
+                <a:srgbClr val="7CCFC5"/>
+              </a:solidFill>
+            </a:endParaRPr>
+          </a:p>
+          <a:p>
+            <a:pPr marL="0" indent="0">
+              <a:buNone/>
+            </a:pPr>
+            <a:r>
+              <a:rPr lang="en-US" sz="1200" dirty="0">
                 <a:solidFill>
                   <a:srgbClr val="7CCFC5"/>
                 </a:solidFill>
               </a:rPr>
               <a:t>Segment drift indicators from extracted risk signals.</a:t>
             </a:r>
-            <a:endParaRPr lang="en-US" sz="1000"/>
+            <a:endParaRPr lang="en-US" sz="1200" dirty="0"/>
           </a:p>
         </p:txBody>
       </p:sp>
@@ -10060,7 +10528,7 @@
         <p:spPr>
           <a:xfrm>
             <a:off x="411480" y="5923560"/>
-            <a:ext cx="11365992" cy="713232"/>
+            <a:ext cx="11365992" cy="822960"/>
           </a:xfrm>
           <a:prstGeom prst="roundRect">
             <a:avLst>
@@ -10110,14 +10578,14 @@
               <a:buNone/>
             </a:pPr>
             <a:r>
-              <a:rPr lang="en-US" sz="1000" b="1">
+              <a:rPr lang="en-US" sz="1400" b="1">
                 <a:solidFill>
                   <a:srgbClr val="E8ECF0"/>
                 </a:solidFill>
               </a:rPr>
               <a:t>Expected business outcomes</a:t>
             </a:r>
-            <a:endParaRPr lang="en-US" sz="1000"/>
+            <a:endParaRPr lang="en-US" sz="1400"/>
           </a:p>
         </p:txBody>
       </p:sp>
@@ -10129,8 +10597,8 @@
         </p:nvSpPr>
         <p:spPr>
           <a:xfrm>
-            <a:off x="2468880" y="6015000"/>
-            <a:ext cx="7955280" cy="502920"/>
+            <a:off x="2468880" y="5980176"/>
+            <a:ext cx="7955280" cy="731520"/>
           </a:xfrm>
           <a:prstGeom prst="rect">
             <a:avLst/>
@@ -10146,35 +10614,35 @@
               <a:buNone/>
             </a:pPr>
             <a:r>
-              <a:rPr lang="en-US" sz="1000">
+              <a:rPr lang="en-US" sz="1200" dirty="0">
                 <a:solidFill>
                   <a:srgbClr val="E8ECF0"/>
                 </a:solidFill>
               </a:rPr>
               <a:t>- Faster specialty decision turnarounds</a:t>
             </a:r>
-            <a:endParaRPr lang="en-US" sz="1000"/>
-          </a:p>
-          <a:p>
-            <a:pPr marL="0" indent="0">
-              <a:buNone/>
-            </a:pPr>
-            <a:r>
-              <a:rPr lang="en-US" sz="1000">
+            <a:endParaRPr lang="en-US" sz="1200" dirty="0"/>
+          </a:p>
+          <a:p>
+            <a:pPr marL="0" indent="0">
+              <a:buNone/>
+            </a:pPr>
+            <a:r>
+              <a:rPr lang="en-US" sz="1200" dirty="0">
                 <a:solidFill>
                   <a:srgbClr val="E8ECF0"/>
                 </a:solidFill>
               </a:rPr>
               <a:t>- Higher consistency across underwriting pods</a:t>
             </a:r>
-            <a:endParaRPr lang="en-US" sz="1000"/>
-          </a:p>
-          <a:p>
-            <a:pPr marL="0" indent="0">
-              <a:buNone/>
-            </a:pPr>
-            <a:r>
-              <a:rPr lang="en-US" sz="1000">
+            <a:endParaRPr lang="en-US" sz="1200" dirty="0"/>
+          </a:p>
+          <a:p>
+            <a:pPr marL="0" indent="0">
+              <a:buNone/>
+            </a:pPr>
+            <a:r>
+              <a:rPr lang="en-US" sz="1200" dirty="0">
                 <a:solidFill>
                   <a:srgbClr val="E8ECF0"/>
                 </a:solidFill>
@@ -10187,14 +10655,14 @@
               <a:buNone/>
             </a:pPr>
             <a:r>
-              <a:rPr lang="en-US" sz="1000">
+              <a:rPr lang="en-US" sz="1200" dirty="0">
                 <a:solidFill>
                   <a:srgbClr val="5AAFA5"/>
                 </a:solidFill>
               </a:rPr>
               <a:t>- Enterprise security in place: Entra ID authentication, least-privilege governance</a:t>
             </a:r>
-            <a:endParaRPr lang="en-US" sz="1000"/>
+            <a:endParaRPr lang="en-US" sz="1200" dirty="0"/>
           </a:p>
         </p:txBody>
       </p:sp>
@@ -10214,8 +10682,8 @@
         </p:blipFill>
         <p:spPr>
           <a:xfrm>
-            <a:off x="502920" y="1216152"/>
-            <a:ext cx="384048" cy="384048"/>
+            <a:off x="466344" y="1179576"/>
+            <a:ext cx="457200" cy="457200"/>
           </a:xfrm>
           <a:prstGeom prst="rect">
             <a:avLst/>
@@ -10238,8 +10706,8 @@
         </p:blipFill>
         <p:spPr>
           <a:xfrm>
-            <a:off x="3456432" y="1216152"/>
-            <a:ext cx="384048" cy="384048"/>
+            <a:off x="3419856" y="1179576"/>
+            <a:ext cx="457200" cy="457200"/>
           </a:xfrm>
           <a:prstGeom prst="rect">
             <a:avLst/>
@@ -10262,8 +10730,8 @@
         </p:blipFill>
         <p:spPr>
           <a:xfrm>
-            <a:off x="6409944" y="1216152"/>
-            <a:ext cx="384048" cy="384048"/>
+            <a:off x="6373368" y="1179576"/>
+            <a:ext cx="457200" cy="457200"/>
           </a:xfrm>
           <a:prstGeom prst="rect">
             <a:avLst/>
@@ -10286,8 +10754,8 @@
         </p:blipFill>
         <p:spPr>
           <a:xfrm>
-            <a:off x="9363456" y="1216152"/>
-            <a:ext cx="384048" cy="384048"/>
+            <a:off x="9326880" y="1179576"/>
+            <a:ext cx="457200" cy="457200"/>
           </a:xfrm>
           <a:prstGeom prst="rect">
             <a:avLst/>
@@ -10869,14 +11337,14 @@
               <a:buNone/>
             </a:pPr>
             <a:r>
-              <a:rPr lang="en-US" sz="2400" b="1">
+              <a:rPr lang="en-US" sz="2200" b="1">
                 <a:solidFill>
                   <a:srgbClr val="FFFFFF"/>
                 </a:solidFill>
               </a:rPr>
               <a:t>Reinsurer Process Flow</a:t>
             </a:r>
-            <a:endParaRPr lang="en-US" sz="2400"/>
+            <a:endParaRPr lang="en-US" sz="2200"/>
           </a:p>
         </p:txBody>
       </p:sp>
@@ -10905,14 +11373,14 @@
               <a:buNone/>
             </a:pPr>
             <a:r>
-              <a:rPr lang="en-US" sz="1000">
+              <a:rPr lang="en-US" sz="1200">
                 <a:solidFill>
                   <a:srgbClr val="D6E4EA"/>
                 </a:solidFill>
               </a:rPr>
               <a:t>Treaty Bordereaux and Cat Event Aggregation | Where the accelerator resolves stage-specific challenges</a:t>
             </a:r>
-            <a:endParaRPr lang="en-US" sz="1000"/>
+            <a:endParaRPr lang="en-US" sz="1200"/>
           </a:p>
         </p:txBody>
       </p:sp>
@@ -11007,14 +11475,14 @@
               <a:buNone/>
             </a:pPr>
             <a:r>
-              <a:rPr lang="en-US" sz="1200" b="1">
+              <a:rPr lang="en-US" sz="1400" b="1">
                 <a:solidFill>
                   <a:srgbClr val="E8ECF0"/>
                 </a:solidFill>
               </a:rPr>
               <a:t>1. Cedant Intake</a:t>
             </a:r>
-            <a:endParaRPr lang="en-US" sz="1200"/>
+            <a:endParaRPr lang="en-US" sz="1400"/>
           </a:p>
         </p:txBody>
       </p:sp>
@@ -11077,14 +11545,14 @@
               <a:buNone/>
             </a:pPr>
             <a:r>
-              <a:rPr lang="en-US" sz="1000" b="1">
+              <a:rPr lang="en-US" sz="1400" b="1">
                 <a:solidFill>
                   <a:srgbClr val="E76F51"/>
                 </a:solidFill>
               </a:rPr>
               <a:t>Business challenge</a:t>
             </a:r>
-            <a:endParaRPr lang="en-US" sz="1000"/>
+            <a:endParaRPr lang="en-US" sz="1400"/>
           </a:p>
         </p:txBody>
       </p:sp>
@@ -11112,15 +11580,25 @@
             <a:pPr marL="0" indent="0">
               <a:buNone/>
             </a:pPr>
-            <a:r>
-              <a:rPr lang="en-US" sz="1000">
+            <a:endParaRPr lang="en-US" sz="1200" dirty="0">
+              <a:solidFill>
+                <a:srgbClr val="D4A088"/>
+              </a:solidFill>
+            </a:endParaRPr>
+          </a:p>
+          <a:p>
+            <a:pPr marL="0" indent="0">
+              <a:buNone/>
+            </a:pPr>
+            <a:r>
+              <a:rPr lang="en-US" sz="1200" dirty="0">
                 <a:solidFill>
                   <a:srgbClr val="D4A088"/>
                 </a:solidFill>
               </a:rPr>
               <a:t>Ceded claims arrive in heterogeneous formats.</a:t>
             </a:r>
-            <a:endParaRPr lang="en-US" sz="1000"/>
+            <a:endParaRPr lang="en-US" sz="1200" dirty="0"/>
           </a:p>
         </p:txBody>
       </p:sp>
@@ -11183,14 +11661,14 @@
               <a:buNone/>
             </a:pPr>
             <a:r>
-              <a:rPr lang="en-US" sz="1000" b="1">
+              <a:rPr lang="en-US" sz="1400" b="1">
                 <a:solidFill>
                   <a:srgbClr val="2EC4B6"/>
                 </a:solidFill>
               </a:rPr>
               <a:t>Accelerator intervention</a:t>
             </a:r>
-            <a:endParaRPr lang="en-US" sz="1000"/>
+            <a:endParaRPr lang="en-US" sz="1400"/>
           </a:p>
         </p:txBody>
       </p:sp>
@@ -11218,15 +11696,25 @@
             <a:pPr marL="0" indent="0">
               <a:buNone/>
             </a:pPr>
-            <a:r>
-              <a:rPr lang="en-US" sz="1000">
+            <a:endParaRPr lang="en-US" sz="1200" dirty="0">
+              <a:solidFill>
+                <a:srgbClr val="7CCFC5"/>
+              </a:solidFill>
+            </a:endParaRPr>
+          </a:p>
+          <a:p>
+            <a:pPr marL="0" indent="0">
+              <a:buNone/>
+            </a:pPr>
+            <a:r>
+              <a:rPr lang="en-US" sz="1200" dirty="0">
                 <a:solidFill>
                   <a:srgbClr val="7CCFC5"/>
                 </a:solidFill>
               </a:rPr>
               <a:t>Normalize cedant documents into treaty-ready structured fields.</a:t>
             </a:r>
-            <a:endParaRPr lang="en-US" sz="1000"/>
+            <a:endParaRPr lang="en-US" sz="1200" dirty="0"/>
           </a:p>
         </p:txBody>
       </p:sp>
@@ -11353,14 +11841,14 @@
               <a:buNone/>
             </a:pPr>
             <a:r>
-              <a:rPr lang="en-US" sz="1200" b="1">
+              <a:rPr lang="en-US" sz="1400" b="1">
                 <a:solidFill>
                   <a:srgbClr val="E8ECF0"/>
                 </a:solidFill>
               </a:rPr>
               <a:t>2. Data Validation</a:t>
             </a:r>
-            <a:endParaRPr lang="en-US" sz="1200"/>
+            <a:endParaRPr lang="en-US" sz="1400"/>
           </a:p>
         </p:txBody>
       </p:sp>
@@ -11423,14 +11911,14 @@
               <a:buNone/>
             </a:pPr>
             <a:r>
-              <a:rPr lang="en-US" sz="1000" b="1">
+              <a:rPr lang="en-US" sz="1400" b="1">
                 <a:solidFill>
                   <a:srgbClr val="E76F51"/>
                 </a:solidFill>
               </a:rPr>
               <a:t>Business challenge</a:t>
             </a:r>
-            <a:endParaRPr lang="en-US" sz="1000"/>
+            <a:endParaRPr lang="en-US" sz="1400"/>
           </a:p>
         </p:txBody>
       </p:sp>
@@ -11458,15 +11946,25 @@
             <a:pPr marL="0" indent="0">
               <a:buNone/>
             </a:pPr>
-            <a:r>
-              <a:rPr lang="en-US" sz="1000">
+            <a:endParaRPr lang="en-US" sz="1200" dirty="0">
+              <a:solidFill>
+                <a:srgbClr val="D4A088"/>
+              </a:solidFill>
+            </a:endParaRPr>
+          </a:p>
+          <a:p>
+            <a:pPr marL="0" indent="0">
+              <a:buNone/>
+            </a:pPr>
+            <a:r>
+              <a:rPr lang="en-US" sz="1200" dirty="0">
                 <a:solidFill>
                   <a:srgbClr val="D4A088"/>
                 </a:solidFill>
               </a:rPr>
               <a:t>Out-of-tolerance bordereaux entries require manual checks.</a:t>
             </a:r>
-            <a:endParaRPr lang="en-US" sz="1000"/>
+            <a:endParaRPr lang="en-US" sz="1200" dirty="0"/>
           </a:p>
         </p:txBody>
       </p:sp>
@@ -11529,14 +12027,14 @@
               <a:buNone/>
             </a:pPr>
             <a:r>
-              <a:rPr lang="en-US" sz="1000" b="1">
+              <a:rPr lang="en-US" sz="1400" b="1">
                 <a:solidFill>
                   <a:srgbClr val="2EC4B6"/>
                 </a:solidFill>
               </a:rPr>
               <a:t>Accelerator intervention</a:t>
             </a:r>
-            <a:endParaRPr lang="en-US" sz="1000"/>
+            <a:endParaRPr lang="en-US" sz="1400"/>
           </a:p>
         </p:txBody>
       </p:sp>
@@ -11564,15 +12062,25 @@
             <a:pPr marL="0" indent="0">
               <a:buNone/>
             </a:pPr>
-            <a:r>
-              <a:rPr lang="en-US" sz="1000">
+            <a:endParaRPr lang="en-US" sz="1200" dirty="0">
+              <a:solidFill>
+                <a:srgbClr val="7CCFC5"/>
+              </a:solidFill>
+            </a:endParaRPr>
+          </a:p>
+          <a:p>
+            <a:pPr marL="0" indent="0">
+              <a:buNone/>
+            </a:pPr>
+            <a:r>
+              <a:rPr lang="en-US" sz="1200" dirty="0">
                 <a:solidFill>
                   <a:srgbClr val="7CCFC5"/>
                 </a:solidFill>
               </a:rPr>
               <a:t>Rule-based exception detection with source traceability.</a:t>
             </a:r>
-            <a:endParaRPr lang="en-US" sz="1000"/>
+            <a:endParaRPr lang="en-US" sz="1200" dirty="0"/>
           </a:p>
         </p:txBody>
       </p:sp>
@@ -11699,14 +12207,14 @@
               <a:buNone/>
             </a:pPr>
             <a:r>
-              <a:rPr lang="en-US" sz="1200" b="1">
+              <a:rPr lang="en-US" sz="1400" b="1">
                 <a:solidFill>
                   <a:srgbClr val="E8ECF0"/>
                 </a:solidFill>
               </a:rPr>
               <a:t>3. Event Aggregation</a:t>
             </a:r>
-            <a:endParaRPr lang="en-US" sz="1200"/>
+            <a:endParaRPr lang="en-US" sz="1400"/>
           </a:p>
         </p:txBody>
       </p:sp>
@@ -11769,14 +12277,14 @@
               <a:buNone/>
             </a:pPr>
             <a:r>
-              <a:rPr lang="en-US" sz="1000" b="1">
+              <a:rPr lang="en-US" sz="1400" b="1">
                 <a:solidFill>
                   <a:srgbClr val="E76F51"/>
                 </a:solidFill>
               </a:rPr>
               <a:t>Business challenge</a:t>
             </a:r>
-            <a:endParaRPr lang="en-US" sz="1000"/>
+            <a:endParaRPr lang="en-US" sz="1400"/>
           </a:p>
         </p:txBody>
       </p:sp>
@@ -11804,15 +12312,25 @@
             <a:pPr marL="0" indent="0">
               <a:buNone/>
             </a:pPr>
-            <a:r>
-              <a:rPr lang="en-US" sz="1000">
+            <a:endParaRPr lang="en-US" sz="1200" dirty="0">
+              <a:solidFill>
+                <a:srgbClr val="D4A088"/>
+              </a:solidFill>
+            </a:endParaRPr>
+          </a:p>
+          <a:p>
+            <a:pPr marL="0" indent="0">
+              <a:buNone/>
+            </a:pPr>
+            <a:r>
+              <a:rPr lang="en-US" sz="1200" dirty="0">
                 <a:solidFill>
                   <a:srgbClr val="D4A088"/>
                 </a:solidFill>
               </a:rPr>
               <a:t>Cat losses are hard to roll up quickly across cedants.</a:t>
             </a:r>
-            <a:endParaRPr lang="en-US" sz="1000"/>
+            <a:endParaRPr lang="en-US" sz="1200" dirty="0"/>
           </a:p>
         </p:txBody>
       </p:sp>
@@ -11875,14 +12393,14 @@
               <a:buNone/>
             </a:pPr>
             <a:r>
-              <a:rPr lang="en-US" sz="1000" b="1">
+              <a:rPr lang="en-US" sz="1400" b="1">
                 <a:solidFill>
                   <a:srgbClr val="2EC4B6"/>
                 </a:solidFill>
               </a:rPr>
               <a:t>Accelerator intervention</a:t>
             </a:r>
-            <a:endParaRPr lang="en-US" sz="1000"/>
+            <a:endParaRPr lang="en-US" sz="1400"/>
           </a:p>
         </p:txBody>
       </p:sp>
@@ -11910,15 +12428,25 @@
             <a:pPr marL="0" indent="0">
               <a:buNone/>
             </a:pPr>
-            <a:r>
-              <a:rPr lang="en-US" sz="1000">
+            <a:endParaRPr lang="en-US" sz="1200" dirty="0">
+              <a:solidFill>
+                <a:srgbClr val="7CCFC5"/>
+              </a:solidFill>
+            </a:endParaRPr>
+          </a:p>
+          <a:p>
+            <a:pPr marL="0" indent="0">
+              <a:buNone/>
+            </a:pPr>
+            <a:r>
+              <a:rPr lang="en-US" sz="1200" dirty="0">
                 <a:solidFill>
                   <a:srgbClr val="7CCFC5"/>
                 </a:solidFill>
               </a:rPr>
               <a:t>Event/peril clustering and timeline-driven exposure rollups.</a:t>
             </a:r>
-            <a:endParaRPr lang="en-US" sz="1000"/>
+            <a:endParaRPr lang="en-US" sz="1200" dirty="0"/>
           </a:p>
         </p:txBody>
       </p:sp>
@@ -12045,14 +12573,14 @@
               <a:buNone/>
             </a:pPr>
             <a:r>
-              <a:rPr lang="en-US" sz="1200" b="1">
+              <a:rPr lang="en-US" sz="1400" b="1">
                 <a:solidFill>
                   <a:srgbClr val="E8ECF0"/>
                 </a:solidFill>
               </a:rPr>
               <a:t>4. Reserve &amp; Reporting</a:t>
             </a:r>
-            <a:endParaRPr lang="en-US" sz="1200"/>
+            <a:endParaRPr lang="en-US" sz="1400"/>
           </a:p>
         </p:txBody>
       </p:sp>
@@ -12115,14 +12643,14 @@
               <a:buNone/>
             </a:pPr>
             <a:r>
-              <a:rPr lang="en-US" sz="1000" b="1">
+              <a:rPr lang="en-US" sz="1400" b="1">
                 <a:solidFill>
                   <a:srgbClr val="E76F51"/>
                 </a:solidFill>
               </a:rPr>
               <a:t>Business challenge</a:t>
             </a:r>
-            <a:endParaRPr lang="en-US" sz="1000"/>
+            <a:endParaRPr lang="en-US" sz="1400"/>
           </a:p>
         </p:txBody>
       </p:sp>
@@ -12150,15 +12678,25 @@
             <a:pPr marL="0" indent="0">
               <a:buNone/>
             </a:pPr>
-            <a:r>
-              <a:rPr lang="en-US" sz="1000">
+            <a:endParaRPr lang="en-US" sz="1200" dirty="0">
+              <a:solidFill>
+                <a:srgbClr val="D4A088"/>
+              </a:solidFill>
+            </a:endParaRPr>
+          </a:p>
+          <a:p>
+            <a:pPr marL="0" indent="0">
+              <a:buNone/>
+            </a:pPr>
+            <a:r>
+              <a:rPr lang="en-US" sz="1200" dirty="0">
                 <a:solidFill>
                   <a:srgbClr val="D4A088"/>
                 </a:solidFill>
               </a:rPr>
               <a:t>Governance needs auditable source lineage.</a:t>
             </a:r>
-            <a:endParaRPr lang="en-US" sz="1000"/>
+            <a:endParaRPr lang="en-US" sz="1200" dirty="0"/>
           </a:p>
         </p:txBody>
       </p:sp>
@@ -12221,14 +12759,14 @@
               <a:buNone/>
             </a:pPr>
             <a:r>
-              <a:rPr lang="en-US" sz="1000" b="1">
+              <a:rPr lang="en-US" sz="1400" b="1">
                 <a:solidFill>
                   <a:srgbClr val="2EC4B6"/>
                 </a:solidFill>
               </a:rPr>
               <a:t>Accelerator intervention</a:t>
             </a:r>
-            <a:endParaRPr lang="en-US" sz="1000"/>
+            <a:endParaRPr lang="en-US" sz="1400"/>
           </a:p>
         </p:txBody>
       </p:sp>
@@ -12256,15 +12794,25 @@
             <a:pPr marL="0" indent="0">
               <a:buNone/>
             </a:pPr>
-            <a:r>
-              <a:rPr lang="en-US" sz="1000">
+            <a:endParaRPr lang="en-US" sz="1200" dirty="0">
+              <a:solidFill>
+                <a:srgbClr val="7CCFC5"/>
+              </a:solidFill>
+            </a:endParaRPr>
+          </a:p>
+          <a:p>
+            <a:pPr marL="0" indent="0">
+              <a:buNone/>
+            </a:pPr>
+            <a:r>
+              <a:rPr lang="en-US" sz="1200" dirty="0">
                 <a:solidFill>
                   <a:srgbClr val="7CCFC5"/>
                 </a:solidFill>
               </a:rPr>
               <a:t>Source-to-summary evidence packs for actuarial and finance review.</a:t>
             </a:r>
-            <a:endParaRPr lang="en-US" sz="1000"/>
+            <a:endParaRPr lang="en-US" sz="1200" dirty="0"/>
           </a:p>
         </p:txBody>
       </p:sp>
@@ -12277,7 +12825,7 @@
         <p:spPr>
           <a:xfrm>
             <a:off x="411480" y="5923560"/>
-            <a:ext cx="11365992" cy="713232"/>
+            <a:ext cx="11365992" cy="822960"/>
           </a:xfrm>
           <a:prstGeom prst="roundRect">
             <a:avLst>
@@ -12327,14 +12875,14 @@
               <a:buNone/>
             </a:pPr>
             <a:r>
-              <a:rPr lang="en-US" sz="1000" b="1">
+              <a:rPr lang="en-US" sz="1400" b="1">
                 <a:solidFill>
                   <a:srgbClr val="E8ECF0"/>
                 </a:solidFill>
               </a:rPr>
               <a:t>Expected business outcomes</a:t>
             </a:r>
-            <a:endParaRPr lang="en-US" sz="1000"/>
+            <a:endParaRPr lang="en-US" sz="1400"/>
           </a:p>
         </p:txBody>
       </p:sp>
@@ -12346,8 +12894,8 @@
         </p:nvSpPr>
         <p:spPr>
           <a:xfrm>
-            <a:off x="2468880" y="6015000"/>
-            <a:ext cx="7955280" cy="502920"/>
+            <a:off x="2468880" y="5969280"/>
+            <a:ext cx="7955280" cy="731520"/>
           </a:xfrm>
           <a:prstGeom prst="rect">
             <a:avLst/>
@@ -12363,35 +12911,35 @@
               <a:buNone/>
             </a:pPr>
             <a:r>
-              <a:rPr lang="en-US" sz="1000">
+              <a:rPr lang="en-US" sz="1200" dirty="0">
                 <a:solidFill>
                   <a:srgbClr val="E8ECF0"/>
                 </a:solidFill>
               </a:rPr>
               <a:t>- Faster monthly/quarterly bordereaux cycles</a:t>
             </a:r>
-            <a:endParaRPr lang="en-US" sz="1000"/>
-          </a:p>
-          <a:p>
-            <a:pPr marL="0" indent="0">
-              <a:buNone/>
-            </a:pPr>
-            <a:r>
-              <a:rPr lang="en-US" sz="1000">
+            <a:endParaRPr lang="en-US" sz="1200" dirty="0"/>
+          </a:p>
+          <a:p>
+            <a:pPr marL="0" indent="0">
+              <a:buNone/>
+            </a:pPr>
+            <a:r>
+              <a:rPr lang="en-US" sz="1200" dirty="0">
                 <a:solidFill>
                   <a:srgbClr val="E8ECF0"/>
                 </a:solidFill>
               </a:rPr>
               <a:t>- Improved ceded data confidence</a:t>
             </a:r>
-            <a:endParaRPr lang="en-US" sz="1000"/>
-          </a:p>
-          <a:p>
-            <a:pPr marL="0" indent="0">
-              <a:buNone/>
-            </a:pPr>
-            <a:r>
-              <a:rPr lang="en-US" sz="1000">
+            <a:endParaRPr lang="en-US" sz="1200" dirty="0"/>
+          </a:p>
+          <a:p>
+            <a:pPr marL="0" indent="0">
+              <a:buNone/>
+            </a:pPr>
+            <a:r>
+              <a:rPr lang="en-US" sz="1200" dirty="0">
                 <a:solidFill>
                   <a:srgbClr val="E8ECF0"/>
                 </a:solidFill>
@@ -12404,14 +12952,14 @@
               <a:buNone/>
             </a:pPr>
             <a:r>
-              <a:rPr lang="en-US" sz="1000">
+              <a:rPr lang="en-US" sz="1200" dirty="0">
                 <a:solidFill>
                   <a:srgbClr val="5AAFA5"/>
                 </a:solidFill>
               </a:rPr>
               <a:t>- Enterprise security in place: Entra ID authentication, least-privilege governance</a:t>
             </a:r>
-            <a:endParaRPr lang="en-US" sz="1000"/>
+            <a:endParaRPr lang="en-US" sz="1200" dirty="0"/>
           </a:p>
         </p:txBody>
       </p:sp>
@@ -12431,8 +12979,8 @@
         </p:blipFill>
         <p:spPr>
           <a:xfrm>
-            <a:off x="502920" y="1216152"/>
-            <a:ext cx="384048" cy="384048"/>
+            <a:off x="466344" y="1179576"/>
+            <a:ext cx="457200" cy="457200"/>
           </a:xfrm>
           <a:prstGeom prst="rect">
             <a:avLst/>
@@ -12455,8 +13003,8 @@
         </p:blipFill>
         <p:spPr>
           <a:xfrm>
-            <a:off x="3456432" y="1216152"/>
-            <a:ext cx="384048" cy="384048"/>
+            <a:off x="3419856" y="1179576"/>
+            <a:ext cx="457200" cy="457200"/>
           </a:xfrm>
           <a:prstGeom prst="rect">
             <a:avLst/>
@@ -12479,8 +13027,8 @@
         </p:blipFill>
         <p:spPr>
           <a:xfrm>
-            <a:off x="6409944" y="1216152"/>
-            <a:ext cx="384048" cy="384048"/>
+            <a:off x="6373368" y="1179576"/>
+            <a:ext cx="457200" cy="457200"/>
           </a:xfrm>
           <a:prstGeom prst="rect">
             <a:avLst/>
@@ -12503,8 +13051,8 @@
         </p:blipFill>
         <p:spPr>
           <a:xfrm>
-            <a:off x="9363456" y="1216152"/>
-            <a:ext cx="384048" cy="384048"/>
+            <a:off x="9326880" y="1179576"/>
+            <a:ext cx="457200" cy="457200"/>
           </a:xfrm>
           <a:prstGeom prst="rect">
             <a:avLst/>
@@ -13131,6 +13679,6 @@
 
 <file path=docMetadata/LabelInfo.xml><?xml version="1.0" encoding="utf-8"?>
 <clbl:labelList xmlns:clbl="http://schemas.microsoft.com/office/2020/mipLabelMetadata">
-  <clbl:label id="{f42aa342-8706-4288-bd11-ebb85995028c}" enabled="1" method="Standard" siteId="{72f988bf-86f1-41af-91ab-2d7cd011db47}" removed="0"/>
+  <clbl:label id="{f42aa342-8706-4288-bd11-ebb85995028c}" enabled="1" method="Standard" siteId="{72f988bf-86f1-41af-91ab-2d7cd011db47}" contentBits="0" removed="0"/>
 </clbl:labelList>
 </file>